--- a/slides/T319_Regressão_Linear (Parte III).pptx
+++ b/slides/T319_Regressão_Linear (Parte III).pptx
@@ -239,7 +239,7 @@
           <a:p>
             <a:fld id="{DAF0AF11-6A8A-4E64-94F5-26D4FBA2A01D}" type="datetimeFigureOut">
               <a:rPr lang="nl-BE" smtClean="0"/>
-              <a:t>24/04/2026</a:t>
+              <a:t>25/09/2026</a:t>
             </a:fld>
             <a:endParaRPr lang="nl-BE"/>
           </a:p>
@@ -3880,7 +3880,7 @@
           <a:p>
             <a:fld id="{C80E15A5-E95B-43EB-9AC7-9A96397448C0}" type="datetimeFigureOut">
               <a:rPr lang="nl-BE" smtClean="0"/>
-              <a:t>24/04/2026</a:t>
+              <a:t>25/09/2026</a:t>
             </a:fld>
             <a:endParaRPr lang="nl-BE"/>
           </a:p>
@@ -4050,7 +4050,7 @@
           <a:p>
             <a:fld id="{C80E15A5-E95B-43EB-9AC7-9A96397448C0}" type="datetimeFigureOut">
               <a:rPr lang="nl-BE" smtClean="0"/>
-              <a:t>24/04/2026</a:t>
+              <a:t>25/09/2026</a:t>
             </a:fld>
             <a:endParaRPr lang="nl-BE"/>
           </a:p>
@@ -4230,7 +4230,7 @@
           <a:p>
             <a:fld id="{C80E15A5-E95B-43EB-9AC7-9A96397448C0}" type="datetimeFigureOut">
               <a:rPr lang="nl-BE" smtClean="0"/>
-              <a:t>24/04/2026</a:t>
+              <a:t>25/09/2026</a:t>
             </a:fld>
             <a:endParaRPr lang="nl-BE"/>
           </a:p>
@@ -4400,7 +4400,7 @@
           <a:p>
             <a:fld id="{C80E15A5-E95B-43EB-9AC7-9A96397448C0}" type="datetimeFigureOut">
               <a:rPr lang="nl-BE" smtClean="0"/>
-              <a:t>24/04/2026</a:t>
+              <a:t>25/09/2026</a:t>
             </a:fld>
             <a:endParaRPr lang="nl-BE"/>
           </a:p>
@@ -4646,7 +4646,7 @@
           <a:p>
             <a:fld id="{C80E15A5-E95B-43EB-9AC7-9A96397448C0}" type="datetimeFigureOut">
               <a:rPr lang="nl-BE" smtClean="0"/>
-              <a:t>24/04/2026</a:t>
+              <a:t>25/09/2026</a:t>
             </a:fld>
             <a:endParaRPr lang="nl-BE"/>
           </a:p>
@@ -4878,7 +4878,7 @@
           <a:p>
             <a:fld id="{C80E15A5-E95B-43EB-9AC7-9A96397448C0}" type="datetimeFigureOut">
               <a:rPr lang="nl-BE" smtClean="0"/>
-              <a:t>24/04/2026</a:t>
+              <a:t>25/09/2026</a:t>
             </a:fld>
             <a:endParaRPr lang="nl-BE"/>
           </a:p>
@@ -5245,7 +5245,7 @@
           <a:p>
             <a:fld id="{C80E15A5-E95B-43EB-9AC7-9A96397448C0}" type="datetimeFigureOut">
               <a:rPr lang="nl-BE" smtClean="0"/>
-              <a:t>24/04/2026</a:t>
+              <a:t>25/09/2026</a:t>
             </a:fld>
             <a:endParaRPr lang="nl-BE"/>
           </a:p>
@@ -5363,7 +5363,7 @@
           <a:p>
             <a:fld id="{C80E15A5-E95B-43EB-9AC7-9A96397448C0}" type="datetimeFigureOut">
               <a:rPr lang="nl-BE" smtClean="0"/>
-              <a:t>24/04/2026</a:t>
+              <a:t>25/09/2026</a:t>
             </a:fld>
             <a:endParaRPr lang="nl-BE"/>
           </a:p>
@@ -5458,7 +5458,7 @@
           <a:p>
             <a:fld id="{C80E15A5-E95B-43EB-9AC7-9A96397448C0}" type="datetimeFigureOut">
               <a:rPr lang="nl-BE" smtClean="0"/>
-              <a:t>24/04/2026</a:t>
+              <a:t>25/09/2026</a:t>
             </a:fld>
             <a:endParaRPr lang="nl-BE"/>
           </a:p>
@@ -5735,7 +5735,7 @@
           <a:p>
             <a:fld id="{C80E15A5-E95B-43EB-9AC7-9A96397448C0}" type="datetimeFigureOut">
               <a:rPr lang="nl-BE" smtClean="0"/>
-              <a:t>24/04/2026</a:t>
+              <a:t>25/09/2026</a:t>
             </a:fld>
             <a:endParaRPr lang="nl-BE"/>
           </a:p>
@@ -5988,7 +5988,7 @@
           <a:p>
             <a:fld id="{C80E15A5-E95B-43EB-9AC7-9A96397448C0}" type="datetimeFigureOut">
               <a:rPr lang="nl-BE" smtClean="0"/>
-              <a:t>24/04/2026</a:t>
+              <a:t>25/09/2026</a:t>
             </a:fld>
             <a:endParaRPr lang="nl-BE"/>
           </a:p>
@@ -6201,7 +6201,7 @@
           <a:p>
             <a:fld id="{C80E15A5-E95B-43EB-9AC7-9A96397448C0}" type="datetimeFigureOut">
               <a:rPr lang="nl-BE" smtClean="0"/>
-              <a:t>24/04/2026</a:t>
+              <a:t>25/09/2026</a:t>
             </a:fld>
             <a:endParaRPr lang="nl-BE"/>
           </a:p>
@@ -6837,8 +6837,8 @@
           </a:p>
         </p:txBody>
       </p:sp>
-      <mc:AlternateContent xmlns:mc="http://schemas.openxmlformats.org/markup-compatibility/2006" xmlns:a14="http://schemas.microsoft.com/office/drawing/2010/main">
-        <mc:Choice Requires="a14">
+      <mc:AlternateContent xmlns:mc="http://schemas.openxmlformats.org/markup-compatibility/2006">
+        <mc:Choice xmlns:a14="http://schemas.microsoft.com/office/drawing/2010/main" Requires="a14">
           <p:sp>
             <p:nvSpPr>
               <p:cNvPr id="3" name="Espaço Reservado para Conteúdo 2">
@@ -6869,28 +6869,13 @@
               <a:p>
                 <a:r>
                   <a:rPr lang="pt-BR" dirty="0"/>
-                  <a:t>Caso o passo seja grande, o algoritmo pode nunca convergir.</a:t>
+                  <a:t>Caso a taxa seja grande, o algoritmo pode nunca convergir.</a:t>
                 </a:r>
               </a:p>
               <a:p>
                 <a:r>
                   <a:rPr lang="pt-BR" dirty="0"/>
-                  <a:t>Se o passo</a:t>
-                </a:r>
-                <a14:m>
-                  <m:oMath xmlns:m="http://schemas.openxmlformats.org/officeDocument/2006/math">
-                    <m:r>
-                      <a:rPr lang="pt-BR" i="1">
-                        <a:latin typeface="Cambria Math" panose="02040503050406030204" pitchFamily="18" charset="0"/>
-                        <a:ea typeface="Cambria Math" panose="02040503050406030204" pitchFamily="18" charset="0"/>
-                      </a:rPr>
-                      <m:t> </m:t>
-                    </m:r>
-                  </m:oMath>
-                </a14:m>
-                <a:r>
-                  <a:rPr lang="pt-BR" dirty="0"/>
-                  <a:t>for grande, </a:t>
+                  <a:t>Se a taxa for grande, </a:t>
                 </a:r>
                 <a:r>
                   <a:rPr lang="pt-BR" b="1" i="1" dirty="0">
@@ -7003,7 +6988,7 @@
             </p:txBody>
           </p:sp>
         </mc:Choice>
-        <mc:Fallback xmlns="">
+        <mc:Fallback>
           <p:sp>
             <p:nvSpPr>
               <p:cNvPr id="3" name="Espaço Reservado para Conteúdo 2">
@@ -7037,7 +7022,7 @@
               <a:lstStyle/>
               <a:p>
                 <a:r>
-                  <a:rPr lang="pt-BR">
+                  <a:rPr lang="en-US">
                     <a:noFill/>
                   </a:rPr>
                   <a:t> </a:t>
@@ -7358,145 +7343,83 @@
           </a:p>
         </p:txBody>
       </p:sp>
-      <mc:AlternateContent xmlns:mc="http://schemas.openxmlformats.org/markup-compatibility/2006" xmlns:a14="http://schemas.microsoft.com/office/drawing/2010/main">
-        <mc:Choice Requires="a14">
-          <p:sp>
-            <p:nvSpPr>
-              <p:cNvPr id="3" name="Espaço Reservado para Conteúdo 2">
-                <a:extLst>
-                  <a:ext uri="{FF2B5EF4-FFF2-40B4-BE49-F238E27FC236}">
-                    <a16:creationId xmlns:a16="http://schemas.microsoft.com/office/drawing/2014/main" id="{AD6B1EE1-E6EE-4E0B-FB14-A459C7084856}"/>
-                  </a:ext>
-                </a:extLst>
-              </p:cNvPr>
-              <p:cNvSpPr>
-                <a:spLocks noGrp="1"/>
-              </p:cNvSpPr>
-              <p:nvPr>
-                <p:ph idx="1"/>
-              </p:nvPr>
-            </p:nvSpPr>
-            <p:spPr>
-              <a:xfrm>
-                <a:off x="5763126" y="1825624"/>
-                <a:ext cx="6312610" cy="5032375"/>
-              </a:xfrm>
-            </p:spPr>
-            <p:txBody>
-              <a:bodyPr>
-                <a:normAutofit/>
-              </a:bodyPr>
-              <a:lstStyle/>
-              <a:p>
-                <a:r>
-                  <a:rPr lang="pt-BR" dirty="0"/>
-                  <a:t>Em outros casos, quando o passo</a:t>
-                </a:r>
-                <a14:m>
-                  <m:oMath xmlns:m="http://schemas.openxmlformats.org/officeDocument/2006/math">
-                    <m:r>
-                      <a:rPr lang="pt-BR" i="1">
-                        <a:latin typeface="Cambria Math" panose="02040503050406030204" pitchFamily="18" charset="0"/>
-                        <a:ea typeface="Cambria Math" panose="02040503050406030204" pitchFamily="18" charset="0"/>
-                      </a:rPr>
-                      <m:t> </m:t>
-                    </m:r>
-                  </m:oMath>
-                </a14:m>
-                <a:r>
-                  <a:rPr lang="pt-BR" dirty="0"/>
-                  <a:t>é </a:t>
-                </a:r>
-                <a:r>
-                  <a:rPr lang="pt-BR" b="1" i="1" dirty="0">
-                    <a:solidFill>
-                      <a:srgbClr val="00B050"/>
-                    </a:solidFill>
-                  </a:rPr>
-                  <a:t>muito grande</a:t>
-                </a:r>
-                <a:r>
-                  <a:rPr lang="pt-BR" dirty="0"/>
-                  <a:t>, a cada época, o algoritmo “pula” para um </a:t>
-                </a:r>
-                <a:r>
-                  <a:rPr lang="pt-BR" b="1" i="1" dirty="0">
-                    <a:solidFill>
-                      <a:srgbClr val="7030A0"/>
-                    </a:solidFill>
-                  </a:rPr>
-                  <a:t>valor de erro mais alto do que o anterior </a:t>
-                </a:r>
-                <a:r>
-                  <a:rPr lang="pt-BR" dirty="0"/>
-                  <a:t>e, assim, acaba divergindo.</a:t>
-                </a:r>
-              </a:p>
-              <a:p>
-                <a:r>
-                  <a:rPr lang="pt-BR" dirty="0"/>
-                  <a:t>Ou seja, ao invés de se aproximar do ponto de mínimo a cada época, ele </a:t>
-                </a:r>
-                <a:r>
-                  <a:rPr lang="pt-BR" b="1" i="1" dirty="0">
-                    <a:solidFill>
-                      <a:schemeClr val="accent2"/>
-                    </a:solidFill>
-                  </a:rPr>
-                  <a:t>se distancia dele</a:t>
-                </a:r>
-                <a:r>
-                  <a:rPr lang="pt-BR" dirty="0"/>
-                  <a:t>.</a:t>
-                </a:r>
-              </a:p>
-            </p:txBody>
-          </p:sp>
-        </mc:Choice>
-        <mc:Fallback xmlns="">
-          <p:sp>
-            <p:nvSpPr>
-              <p:cNvPr id="3" name="Espaço Reservado para Conteúdo 2">
-                <a:extLst>
-                  <a:ext uri="{FF2B5EF4-FFF2-40B4-BE49-F238E27FC236}">
-                    <a16:creationId xmlns:a16="http://schemas.microsoft.com/office/drawing/2014/main" id="{AD6B1EE1-E6EE-4E0B-FB14-A459C7084856}"/>
-                  </a:ext>
-                </a:extLst>
-              </p:cNvPr>
-              <p:cNvSpPr>
-                <a:spLocks noGrp="1" noRot="1" noChangeAspect="1" noMove="1" noResize="1" noEditPoints="1" noAdjustHandles="1" noChangeArrowheads="1" noChangeShapeType="1" noTextEdit="1"/>
-              </p:cNvSpPr>
-              <p:nvPr>
-                <p:ph idx="1"/>
-              </p:nvPr>
-            </p:nvSpPr>
-            <p:spPr>
-              <a:xfrm>
-                <a:off x="5763126" y="1825624"/>
-                <a:ext cx="6312610" cy="5032375"/>
-              </a:xfrm>
-              <a:blipFill>
-                <a:blip r:embed="rId3"/>
-                <a:stretch>
-                  <a:fillRect l="-1737" t="-1937" r="-2992"/>
-                </a:stretch>
-              </a:blipFill>
-            </p:spPr>
-            <p:txBody>
-              <a:bodyPr/>
-              <a:lstStyle/>
-              <a:p>
-                <a:r>
-                  <a:rPr lang="en-US">
-                    <a:noFill/>
-                  </a:rPr>
-                  <a:t> </a:t>
-                </a:r>
-              </a:p>
-            </p:txBody>
-          </p:sp>
-        </mc:Fallback>
-      </mc:AlternateContent>
+      <p:sp>
+        <p:nvSpPr>
+          <p:cNvPr id="3" name="Espaço Reservado para Conteúdo 2">
+            <a:extLst>
+              <a:ext uri="{FF2B5EF4-FFF2-40B4-BE49-F238E27FC236}">
+                <a16:creationId xmlns:a16="http://schemas.microsoft.com/office/drawing/2014/main" id="{AD6B1EE1-E6EE-4E0B-FB14-A459C7084856}"/>
+              </a:ext>
+            </a:extLst>
+          </p:cNvPr>
+          <p:cNvSpPr>
+            <a:spLocks noGrp="1"/>
+          </p:cNvSpPr>
+          <p:nvPr>
+            <p:ph idx="1"/>
+          </p:nvPr>
+        </p:nvSpPr>
+        <p:spPr>
+          <a:xfrm>
+            <a:off x="5763126" y="1825624"/>
+            <a:ext cx="6312610" cy="5032375"/>
+          </a:xfrm>
+        </p:spPr>
+        <p:txBody>
+          <a:bodyPr>
+            <a:normAutofit/>
+          </a:bodyPr>
+          <a:lstStyle/>
+          <a:p>
+            <a:r>
+              <a:rPr lang="pt-BR" dirty="0"/>
+              <a:t>Em outros casos, quando a taxa é </a:t>
+            </a:r>
+            <a:r>
+              <a:rPr lang="pt-BR" b="1" i="1" dirty="0">
+                <a:solidFill>
+                  <a:srgbClr val="00B050"/>
+                </a:solidFill>
+              </a:rPr>
+              <a:t>muito grande</a:t>
+            </a:r>
+            <a:r>
+              <a:rPr lang="pt-BR" dirty="0"/>
+              <a:t>, a cada época, o algoritmo “pula” para um </a:t>
+            </a:r>
+            <a:r>
+              <a:rPr lang="pt-BR" b="1" i="1" dirty="0">
+                <a:solidFill>
+                  <a:srgbClr val="7030A0"/>
+                </a:solidFill>
+              </a:rPr>
+              <a:t>valor de erro mais alto do que o anterior </a:t>
+            </a:r>
+            <a:r>
+              <a:rPr lang="pt-BR" dirty="0"/>
+              <a:t>e, assim, acaba divergindo.</a:t>
+            </a:r>
+          </a:p>
+          <a:p>
+            <a:r>
+              <a:rPr lang="pt-BR" dirty="0"/>
+              <a:t>Ou seja, ao invés de se aproximar do ponto de mínimo a cada época, ele </a:t>
+            </a:r>
+            <a:r>
+              <a:rPr lang="pt-BR" b="1" i="1" dirty="0">
+                <a:solidFill>
+                  <a:schemeClr val="accent2"/>
+                </a:solidFill>
+              </a:rPr>
+              <a:t>se distancia dele</a:t>
+            </a:r>
+            <a:r>
+              <a:rPr lang="pt-BR" dirty="0"/>
+              <a:t>.</a:t>
+            </a:r>
+          </a:p>
+        </p:txBody>
+      </p:sp>
       <p:grpSp>
         <p:nvGrpSpPr>
           <p:cNvPr id="6" name="Agrupar 5">
@@ -7532,7 +7455,7 @@
             <p:nvPr/>
           </p:nvPicPr>
           <p:blipFill rotWithShape="1">
-            <a:blip r:embed="rId4">
+            <a:blip r:embed="rId3">
               <a:extLst>
                 <a:ext uri="{28A0092B-C50C-407E-A947-70E740481C1C}">
                   <a14:useLocalDpi xmlns:a14="http://schemas.microsoft.com/office/drawing/2010/main" val="0"/>
@@ -8044,8 +7967,8 @@
           </a:p>
         </p:txBody>
       </p:sp>
-      <mc:AlternateContent xmlns:mc="http://schemas.openxmlformats.org/markup-compatibility/2006" xmlns:a14="http://schemas.microsoft.com/office/drawing/2010/main">
-        <mc:Choice Requires="a14">
+      <mc:AlternateContent xmlns:mc="http://schemas.openxmlformats.org/markup-compatibility/2006">
+        <mc:Choice xmlns:a14="http://schemas.microsoft.com/office/drawing/2010/main" Requires="a14">
           <p:sp>
             <p:nvSpPr>
               <p:cNvPr id="3" name="Espaço Reservado para Conteúdo 2">
@@ -8074,7 +7997,7 @@
               <a:p>
                 <a:r>
                   <a:rPr lang="pt-BR" dirty="0"/>
-                  <a:t>Portanto, o valor do passo de aprendizagem deve ser </a:t>
+                  <a:t>Portanto, o valor da taxa de aprendizagem deve ser </a:t>
                 </a:r>
                 <a:r>
                   <a:rPr lang="pt-BR" b="1" i="1" dirty="0">
@@ -8189,7 +8112,7 @@
             </p:txBody>
           </p:sp>
         </mc:Choice>
-        <mc:Fallback xmlns="">
+        <mc:Fallback>
           <p:sp>
             <p:nvSpPr>
               <p:cNvPr id="3" name="Espaço Reservado para Conteúdo 2">
@@ -8223,7 +8146,7 @@
               <a:lstStyle/>
               <a:p>
                 <a:r>
-                  <a:rPr lang="pt-BR">
+                  <a:rPr lang="en-US">
                     <a:noFill/>
                   </a:rPr>
                   <a:t> </a:t>
@@ -8795,7 +8718,19 @@
                   <a:srgbClr val="7030A0"/>
                 </a:solidFill>
               </a:rPr>
-              <a:t>passo tem o tamanho ideal</a:t>
+              <a:t>passo</a:t>
+            </a:r>
+            <a:r>
+              <a:rPr lang="pt-BR" dirty="0"/>
+              <a:t> </a:t>
+            </a:r>
+            <a:r>
+              <a:rPr lang="pt-BR" b="1" i="1" dirty="0">
+                <a:solidFill>
+                  <a:srgbClr val="7030A0"/>
+                </a:solidFill>
+              </a:rPr>
+              <a:t>tem o tamanho ideal</a:t>
             </a:r>
             <a:r>
               <a:rPr lang="pt-BR" dirty="0"/>
@@ -9142,7 +9077,7 @@
           <a:p>
             <a:r>
               <a:rPr lang="pt-BR" dirty="0"/>
-              <a:t>A figura mostra o caso onde o </a:t>
+              <a:t>A figura mostra o caso onde a </a:t>
             </a:r>
             <a:r>
               <a:rPr lang="pt-BR" b="1" i="1" dirty="0">
@@ -9150,7 +9085,7 @@
                   <a:srgbClr val="7030A0"/>
                 </a:solidFill>
               </a:rPr>
-              <a:t>passo de aprendizagem é muito pequeno</a:t>
+              <a:t>taxa de aprendizagem é muito pequena</a:t>
             </a:r>
             <a:r>
               <a:rPr lang="pt-BR" dirty="0"/>
@@ -9182,7 +9117,7 @@
                   <a:srgbClr val="00B050"/>
                 </a:solidFill>
               </a:rPr>
-              <a:t>Após várias épocas </a:t>
+              <a:t>Após várias iterações </a:t>
             </a:r>
             <a:r>
               <a:rPr lang="pt-BR" dirty="0"/>
@@ -9444,7 +9379,7 @@
           <a:p>
             <a:r>
               <a:rPr lang="pt-BR" dirty="0"/>
-              <a:t>A figura mostra o caso onde o </a:t>
+              <a:t>A figura mostra o caso onde a </a:t>
             </a:r>
             <a:r>
               <a:rPr lang="pt-BR" b="1" i="1" dirty="0">
@@ -9452,7 +9387,7 @@
                   <a:srgbClr val="7030A0"/>
                 </a:solidFill>
               </a:rPr>
-              <a:t>passo de aprendizagem é muito grande</a:t>
+              <a:t>taxa de aprendizagem é muito grande</a:t>
             </a:r>
             <a:r>
               <a:rPr lang="pt-BR" dirty="0"/>
@@ -9736,7 +9671,7 @@
           <a:p>
             <a:r>
               <a:rPr lang="pt-BR" dirty="0"/>
-              <a:t>A figura mostra o caso onde o </a:t>
+              <a:t>A figura mostra o caso onde a </a:t>
             </a:r>
             <a:r>
               <a:rPr lang="pt-BR" b="1" i="1" dirty="0">
@@ -9744,7 +9679,19 @@
                   <a:srgbClr val="7030A0"/>
                 </a:solidFill>
               </a:rPr>
-              <a:t>passo de aprendizagem é grande, mas não tão grande assim</a:t>
+              <a:t>taxa</a:t>
+            </a:r>
+            <a:r>
+              <a:rPr lang="pt-BR" dirty="0"/>
+              <a:t> </a:t>
+            </a:r>
+            <a:r>
+              <a:rPr lang="pt-BR" b="1" i="1" dirty="0">
+                <a:solidFill>
+                  <a:srgbClr val="7030A0"/>
+                </a:solidFill>
+              </a:rPr>
+              <a:t>de aprendizagem é grande, mas não tão grande assim</a:t>
             </a:r>
             <a:r>
               <a:rPr lang="pt-BR" dirty="0"/>
@@ -9780,7 +9727,7 @@
                   <a:srgbClr val="00B050"/>
                 </a:solidFill>
               </a:rPr>
-              <a:t>convergência pode ocorrer após algumas épocas</a:t>
+              <a:t>convergência pode ocorrer após algumas iterações</a:t>
             </a:r>
             <a:r>
               <a:rPr lang="pt-BR" dirty="0"/>
@@ -9970,8 +9917,8 @@
           </a:p>
         </p:txBody>
       </p:sp>
-      <mc:AlternateContent xmlns:mc="http://schemas.openxmlformats.org/markup-compatibility/2006" xmlns:a14="http://schemas.microsoft.com/office/drawing/2010/main">
-        <mc:Choice Requires="a14">
+      <mc:AlternateContent xmlns:mc="http://schemas.openxmlformats.org/markup-compatibility/2006">
+        <mc:Choice xmlns:a14="http://schemas.microsoft.com/office/drawing/2010/main" Requires="a14">
           <p:sp>
             <p:nvSpPr>
               <p:cNvPr id="3" name="Espaço Reservado para Conteúdo 2">
@@ -9990,8 +9937,8 @@
             </p:nvSpPr>
             <p:spPr>
               <a:xfrm>
-                <a:off x="4920793" y="1825624"/>
-                <a:ext cx="7106108" cy="5032375"/>
+                <a:off x="4817097" y="1825624"/>
+                <a:ext cx="7296346" cy="5032375"/>
               </a:xfrm>
             </p:spPr>
             <p:txBody>
@@ -10112,7 +10059,7 @@
             </p:txBody>
           </p:sp>
         </mc:Choice>
-        <mc:Fallback xmlns="">
+        <mc:Fallback>
           <p:sp>
             <p:nvSpPr>
               <p:cNvPr id="3" name="Espaço Reservado para Conteúdo 2">
@@ -10131,13 +10078,13 @@
             </p:nvSpPr>
             <p:spPr>
               <a:xfrm>
-                <a:off x="4920793" y="1825624"/>
-                <a:ext cx="7106108" cy="5032375"/>
+                <a:off x="4817097" y="1825624"/>
+                <a:ext cx="7296346" cy="5032375"/>
               </a:xfrm>
               <a:blipFill>
                 <a:blip r:embed="rId2"/>
                 <a:stretch>
-                  <a:fillRect l="-1544" t="-1937" r="-2230"/>
+                  <a:fillRect l="-1504" t="-1937" r="-2089"/>
                 </a:stretch>
               </a:blipFill>
             </p:spPr>
@@ -10280,8 +10227,8 @@
           </a:p>
         </p:txBody>
       </p:sp>
-      <mc:AlternateContent xmlns:mc="http://schemas.openxmlformats.org/markup-compatibility/2006" xmlns:a14="http://schemas.microsoft.com/office/drawing/2010/main">
-        <mc:Choice Requires="a14">
+      <mc:AlternateContent xmlns:mc="http://schemas.openxmlformats.org/markup-compatibility/2006">
+        <mc:Choice xmlns:a14="http://schemas.microsoft.com/office/drawing/2010/main" Requires="a14">
           <p:sp>
             <p:nvSpPr>
               <p:cNvPr id="3" name="Content Placeholder 2"/>
@@ -10406,7 +10353,7 @@
               <a:p>
                 <a:r>
                   <a:rPr lang="pt-BR" dirty="0"/>
-                  <a:t>Neste tópico, discutiremos o quão importante é o ajuste do passo de aprendizagem, </a:t>
+                  <a:t>Neste tópico, discutiremos o quão importante é o ajuste da taxa de aprendizagem, </a:t>
                 </a:r>
                 <a14:m>
                   <m:oMath xmlns:m="http://schemas.openxmlformats.org/officeDocument/2006/math">
@@ -10427,7 +10374,7 @@
             </p:txBody>
           </p:sp>
         </mc:Choice>
-        <mc:Fallback xmlns="">
+        <mc:Fallback>
           <p:sp>
             <p:nvSpPr>
               <p:cNvPr id="3" name="Content Placeholder 2"/>
@@ -10547,8 +10494,8 @@
         </p:nvSpPr>
         <p:spPr>
           <a:xfrm>
-            <a:off x="4901938" y="1825624"/>
-            <a:ext cx="7290061" cy="5032375"/>
+            <a:off x="4468306" y="1825624"/>
+            <a:ext cx="7723694" cy="5032375"/>
           </a:xfrm>
         </p:spPr>
         <p:txBody>
@@ -10690,13 +10637,14 @@
               <a:buChar char="§"/>
             </a:pPr>
             <a:r>
-              <a:rPr lang="pt-BR" b="1" dirty="0"/>
-              <a:t>Termo momentum</a:t>
-            </a:r>
-            <a:r>
-              <a:rPr lang="pt-BR" dirty="0"/>
-              <a:t>: redução da variação de direção</a:t>
-            </a:r>
+              <a:rPr lang="pt-BR" b="1"/>
+              <a:t>Ajuste adaptativo</a:t>
+            </a:r>
+            <a:r>
+              <a:rPr lang="pt-BR"/>
+              <a:t>: passos independentes</a:t>
+            </a:r>
+            <a:endParaRPr lang="pt-BR" dirty="0"/>
           </a:p>
           <a:p>
             <a:pPr lvl="1">
@@ -10705,86 +10653,107 @@
             </a:pPr>
             <a:r>
               <a:rPr lang="pt-BR" b="1" dirty="0"/>
-              <a:t>Ajuste adaptativo</a:t>
+              <a:t>Termo momentum</a:t>
             </a:r>
             <a:r>
               <a:rPr lang="pt-BR" dirty="0"/>
-              <a:t>: passos independentes</a:t>
+              <a:t>: redução da variação de direção</a:t>
             </a:r>
           </a:p>
         </p:txBody>
       </p:sp>
-      <p:pic>
-        <p:nvPicPr>
-          <p:cNvPr id="5" name="Picture 4">
+      <p:grpSp>
+        <p:nvGrpSpPr>
+          <p:cNvPr id="4" name="Agrupar 3">
             <a:extLst>
               <a:ext uri="{FF2B5EF4-FFF2-40B4-BE49-F238E27FC236}">
-                <a16:creationId xmlns:a16="http://schemas.microsoft.com/office/drawing/2014/main" id="{5951F0C5-9F3A-DC7B-9FF5-1DD6FD4844F5}"/>
+                <a16:creationId xmlns:a16="http://schemas.microsoft.com/office/drawing/2014/main" id="{CD64F838-936F-355B-0DA2-B5F57578C5DE}"/>
               </a:ext>
             </a:extLst>
           </p:cNvPr>
-          <p:cNvPicPr>
-            <a:picLocks noChangeAspect="1"/>
-          </p:cNvPicPr>
+          <p:cNvGrpSpPr/>
           <p:nvPr/>
-        </p:nvPicPr>
-        <p:blipFill rotWithShape="1">
-          <a:blip r:embed="rId2" cstate="print">
-            <a:extLst>
-              <a:ext uri="{28A0092B-C50C-407E-A947-70E740481C1C}">
-                <a14:useLocalDpi xmlns:a14="http://schemas.microsoft.com/office/drawing/2010/main" val="0"/>
-              </a:ext>
-            </a:extLst>
-          </a:blip>
-          <a:srcRect t="11913" r="9292" b="2280"/>
-          <a:stretch/>
-        </p:blipFill>
-        <p:spPr>
+        </p:nvGrpSpPr>
+        <p:grpSpPr>
           <a:xfrm>
-            <a:off x="715651" y="2405668"/>
-            <a:ext cx="3296575" cy="3118439"/>
+            <a:off x="649663" y="2443375"/>
+            <a:ext cx="3456831" cy="3395438"/>
+            <a:chOff x="338579" y="2405668"/>
+            <a:chExt cx="3456831" cy="3395438"/>
           </a:xfrm>
-          <a:prstGeom prst="rect">
-            <a:avLst/>
-          </a:prstGeom>
-        </p:spPr>
-      </p:pic>
-      <p:sp>
-        <p:nvSpPr>
-          <p:cNvPr id="6" name="CaixaDeTexto 5">
-            <a:extLst>
-              <a:ext uri="{FF2B5EF4-FFF2-40B4-BE49-F238E27FC236}">
-                <a16:creationId xmlns:a16="http://schemas.microsoft.com/office/drawing/2014/main" id="{B3814E3E-CFEA-A936-CCE6-0F39D8FC7B56}"/>
-              </a:ext>
-            </a:extLst>
-          </p:cNvPr>
-          <p:cNvSpPr txBox="1"/>
-          <p:nvPr/>
-        </p:nvSpPr>
-        <p:spPr>
-          <a:xfrm>
-            <a:off x="1125268" y="5524107"/>
-            <a:ext cx="3047214" cy="276999"/>
-          </a:xfrm>
-          <a:prstGeom prst="rect">
-            <a:avLst/>
-          </a:prstGeom>
-          <a:noFill/>
-        </p:spPr>
-        <p:txBody>
-          <a:bodyPr wrap="square">
-            <a:spAutoFit/>
-          </a:bodyPr>
-          <a:lstStyle/>
-          <a:p>
-            <a:pPr algn="ctr"/>
-            <a:r>
-              <a:rPr lang="pt-BR" sz="1200" dirty="0"/>
-              <a:t>Gradiente descendente estocástico (SGD)</a:t>
-            </a:r>
-          </a:p>
-        </p:txBody>
-      </p:sp>
+        </p:grpSpPr>
+        <p:pic>
+          <p:nvPicPr>
+            <p:cNvPr id="5" name="Picture 4">
+              <a:extLst>
+                <a:ext uri="{FF2B5EF4-FFF2-40B4-BE49-F238E27FC236}">
+                  <a16:creationId xmlns:a16="http://schemas.microsoft.com/office/drawing/2014/main" id="{5951F0C5-9F3A-DC7B-9FF5-1DD6FD4844F5}"/>
+                </a:ext>
+              </a:extLst>
+            </p:cNvPr>
+            <p:cNvPicPr>
+              <a:picLocks noChangeAspect="1"/>
+            </p:cNvPicPr>
+            <p:nvPr/>
+          </p:nvPicPr>
+          <p:blipFill rotWithShape="1">
+            <a:blip r:embed="rId2" cstate="print">
+              <a:extLst>
+                <a:ext uri="{28A0092B-C50C-407E-A947-70E740481C1C}">
+                  <a14:useLocalDpi xmlns:a14="http://schemas.microsoft.com/office/drawing/2010/main" val="0"/>
+                </a:ext>
+              </a:extLst>
+            </a:blip>
+            <a:srcRect t="11913" r="9292" b="2280"/>
+            <a:stretch/>
+          </p:blipFill>
+          <p:spPr>
+            <a:xfrm>
+              <a:off x="338579" y="2405668"/>
+              <a:ext cx="3296575" cy="3118439"/>
+            </a:xfrm>
+            <a:prstGeom prst="rect">
+              <a:avLst/>
+            </a:prstGeom>
+          </p:spPr>
+        </p:pic>
+        <p:sp>
+          <p:nvSpPr>
+            <p:cNvPr id="6" name="CaixaDeTexto 5">
+              <a:extLst>
+                <a:ext uri="{FF2B5EF4-FFF2-40B4-BE49-F238E27FC236}">
+                  <a16:creationId xmlns:a16="http://schemas.microsoft.com/office/drawing/2014/main" id="{B3814E3E-CFEA-A936-CCE6-0F39D8FC7B56}"/>
+                </a:ext>
+              </a:extLst>
+            </p:cNvPr>
+            <p:cNvSpPr txBox="1"/>
+            <p:nvPr/>
+          </p:nvSpPr>
+          <p:spPr>
+            <a:xfrm>
+              <a:off x="748196" y="5524107"/>
+              <a:ext cx="3047214" cy="276999"/>
+            </a:xfrm>
+            <a:prstGeom prst="rect">
+              <a:avLst/>
+            </a:prstGeom>
+            <a:noFill/>
+          </p:spPr>
+          <p:txBody>
+            <a:bodyPr wrap="square">
+              <a:spAutoFit/>
+            </a:bodyPr>
+            <a:lstStyle/>
+            <a:p>
+              <a:pPr algn="ctr"/>
+              <a:r>
+                <a:rPr lang="pt-BR" sz="1200" dirty="0"/>
+                <a:t>Gradiente descendente estocástico (SGD)</a:t>
+              </a:r>
+            </a:p>
+          </p:txBody>
+        </p:sp>
+      </p:grpSp>
     </p:spTree>
     <p:extLst>
       <p:ext uri="{BB962C8B-B14F-4D97-AF65-F5344CB8AC3E}">
@@ -10951,10 +10920,7 @@
                 </a:pPr>
                 <a14:m>
                   <m:oMathPara xmlns:m="http://schemas.openxmlformats.org/officeDocument/2006/math">
-                    <m:oMathParaPr>
-                      <m:jc m:val="centerGroup"/>
-                    </m:oMathParaPr>
-                    <m:oMath xmlns:m="http://schemas.openxmlformats.org/officeDocument/2006/math">
+                    <m:oMath>
                       <m:r>
                         <a:rPr lang="pt-BR" sz="2800" b="1" i="1" smtClean="0">
                           <a:solidFill>
@@ -11017,10 +10983,7 @@
                       <m:d>
                         <m:dPr>
                           <m:ctrlPr>
-                            <a:rPr lang="pt-BR" sz="2800" b="1" i="1">
-                              <a:solidFill>
-                                <a:schemeClr val="tx1"/>
-                              </a:solidFill>
+                            <a:rPr lang="pt-BR" sz="2800" i="1">
                               <a:latin typeface="Cambria Math" panose="02040503050406030204" pitchFamily="18" charset="0"/>
                             </a:rPr>
                           </m:ctrlPr>
@@ -11058,11 +11021,7 @@
                         <m:dPr>
                           <m:ctrlPr>
                             <a:rPr lang="pt-BR" sz="2800" i="1">
-                              <a:solidFill>
-                                <a:schemeClr val="tx1"/>
-                              </a:solidFill>
                               <a:latin typeface="Cambria Math" panose="02040503050406030204" pitchFamily="18" charset="0"/>
-                              <a:ea typeface="Cambria Math" panose="02040503050406030204" pitchFamily="18" charset="0"/>
                             </a:rPr>
                           </m:ctrlPr>
                         </m:dPr>
@@ -11133,7 +11092,7 @@
                       <m:d>
                         <m:dPr>
                           <m:ctrlPr>
-                            <a:rPr lang="pt-BR" i="1">
+                            <a:rPr lang="pt-BR" b="1" i="1">
                               <a:latin typeface="Cambria Math" panose="02040503050406030204" pitchFamily="18" charset="0"/>
                               <a:ea typeface="Cambria Math" panose="02040503050406030204" pitchFamily="18" charset="0"/>
                             </a:rPr>
@@ -11270,7 +11229,7 @@
                     <m:d>
                       <m:dPr>
                         <m:ctrlPr>
-                          <a:rPr lang="pt-BR" i="1">
+                          <a:rPr lang="pt-BR" b="1" i="1">
                             <a:latin typeface="Cambria Math" panose="02040503050406030204" pitchFamily="18" charset="0"/>
                             <a:ea typeface="Cambria Math" panose="02040503050406030204" pitchFamily="18" charset="0"/>
                           </a:rPr>
@@ -11913,7 +11872,7 @@
                       <m:fPr>
                         <m:type m:val="skw"/>
                         <m:ctrlPr>
-                          <a:rPr lang="pt-BR" b="0" i="1" smtClean="0">
+                          <a:rPr lang="pt-BR" i="1">
                             <a:latin typeface="Cambria Math" panose="02040503050406030204" pitchFamily="18" charset="0"/>
                             <a:ea typeface="Cambria Math" panose="02040503050406030204" pitchFamily="18" charset="0"/>
                           </a:rPr>
@@ -12069,7 +12028,7 @@
                     <m:sSub>
                       <m:sSubPr>
                         <m:ctrlPr>
-                          <a:rPr lang="pt-BR" i="1" smtClean="0">
+                          <a:rPr lang="pt-BR" i="1">
                             <a:latin typeface="Cambria Math" panose="02040503050406030204" pitchFamily="18" charset="0"/>
                             <a:ea typeface="Cambria Math" panose="02040503050406030204" pitchFamily="18" charset="0"/>
                           </a:rPr>
@@ -12369,10 +12328,7 @@
                 </a:pPr>
                 <a14:m>
                   <m:oMathPara xmlns:m="http://schemas.openxmlformats.org/officeDocument/2006/math">
-                    <m:oMathParaPr>
-                      <m:jc m:val="centerGroup"/>
-                    </m:oMathParaPr>
-                    <m:oMath xmlns:m="http://schemas.openxmlformats.org/officeDocument/2006/math">
+                    <m:oMath>
                       <m:r>
                         <a:rPr lang="en-US" sz="2800" b="1" i="1" smtClean="0">
                           <a:latin typeface="Cambria Math" panose="02040503050406030204" pitchFamily="18" charset="0"/>
@@ -12383,7 +12339,7 @@
                       <m:d>
                         <m:dPr>
                           <m:ctrlPr>
-                            <a:rPr lang="pt-BR" sz="2800" b="1" i="1" smtClean="0">
+                            <a:rPr lang="pt-BR" i="1">
                               <a:latin typeface="Cambria Math" panose="02040503050406030204" pitchFamily="18" charset="0"/>
                               <a:ea typeface="Cambria Math" panose="02040503050406030204" pitchFamily="18" charset="0"/>
                             </a:rPr>
@@ -12539,7 +12495,7 @@
                       <m:d>
                         <m:dPr>
                           <m:ctrlPr>
-                            <a:rPr lang="pt-BR" sz="2800" i="1">
+                            <a:rPr lang="pt-BR" sz="2800" b="1" i="1">
                               <a:latin typeface="Cambria Math" panose="02040503050406030204" pitchFamily="18" charset="0"/>
                               <a:ea typeface="Cambria Math" panose="02040503050406030204" pitchFamily="18" charset="0"/>
                             </a:rPr>
@@ -12597,10 +12553,7 @@
                 </a:pPr>
                 <a14:m>
                   <m:oMathPara xmlns:m="http://schemas.openxmlformats.org/officeDocument/2006/math">
-                    <m:oMathParaPr>
-                      <m:jc m:val="centerGroup"/>
-                    </m:oMathParaPr>
-                    <m:oMath xmlns:m="http://schemas.openxmlformats.org/officeDocument/2006/math">
+                    <m:oMath>
                       <m:r>
                         <a:rPr lang="pt-BR" sz="2800" i="1" smtClean="0">
                           <a:latin typeface="Cambria Math" panose="02040503050406030204" pitchFamily="18" charset="0"/>
@@ -12794,7 +12747,7 @@
                     <m:d>
                       <m:dPr>
                         <m:ctrlPr>
-                          <a:rPr lang="pt-BR" sz="2800" i="1">
+                          <a:rPr lang="pt-BR" sz="2800" b="1" i="1">
                             <a:latin typeface="Cambria Math" panose="02040503050406030204" pitchFamily="18" charset="0"/>
                             <a:ea typeface="Cambria Math" panose="02040503050406030204" pitchFamily="18" charset="0"/>
                           </a:rPr>
@@ -17225,7 +17178,7 @@
           <a:p>
             <a:r>
               <a:rPr lang="pt-BR" dirty="0"/>
-              <a:t>Escolha do passo de aprendizagem</a:t>
+              <a:t>Escolha da taxa de aprendizagem</a:t>
             </a:r>
           </a:p>
         </p:txBody>
@@ -17316,7 +17269,6 @@
                         <m:ctrlPr>
                           <a:rPr lang="pt-BR" i="1">
                             <a:latin typeface="Cambria Math" panose="02040503050406030204" pitchFamily="18" charset="0"/>
-                            <a:ea typeface="Cambria Math" panose="02040503050406030204" pitchFamily="18" charset="0"/>
                           </a:rPr>
                         </m:ctrlPr>
                       </m:dPr>
@@ -19152,10 +19104,7 @@
                   <a:pPr/>
                   <a14:m>
                     <m:oMathPara xmlns:m="http://schemas.openxmlformats.org/officeDocument/2006/math">
-                      <m:oMathParaPr>
-                        <m:jc m:val="centerGroup"/>
-                      </m:oMathParaPr>
-                      <m:oMath xmlns:m="http://schemas.openxmlformats.org/officeDocument/2006/math">
+                      <m:oMath>
                         <m:sSub>
                           <m:sSubPr>
                             <m:ctrlPr>
@@ -19278,10 +19227,7 @@
                   <a:pPr/>
                   <a14:m>
                     <m:oMathPara xmlns:m="http://schemas.openxmlformats.org/officeDocument/2006/math">
-                      <m:oMathParaPr>
-                        <m:jc m:val="centerGroup"/>
-                      </m:oMathParaPr>
-                      <m:oMath xmlns:m="http://schemas.openxmlformats.org/officeDocument/2006/math">
+                      <m:oMath>
                         <m:r>
                           <a:rPr lang="en-US" b="1" i="1" smtClean="0">
                             <a:latin typeface="Cambria Math" panose="02040503050406030204" pitchFamily="18" charset="0"/>
@@ -19898,10 +19844,7 @@
                   <a:pPr/>
                   <a14:m>
                     <m:oMathPara xmlns:m="http://schemas.openxmlformats.org/officeDocument/2006/math">
-                      <m:oMathParaPr>
-                        <m:jc m:val="centerGroup"/>
-                      </m:oMathParaPr>
-                      <m:oMath xmlns:m="http://schemas.openxmlformats.org/officeDocument/2006/math">
+                      <m:oMath>
                         <m:sSub>
                           <m:sSubPr>
                             <m:ctrlPr>
@@ -20024,10 +19967,7 @@
                   <a:pPr/>
                   <a14:m>
                     <m:oMathPara xmlns:m="http://schemas.openxmlformats.org/officeDocument/2006/math">
-                      <m:oMathParaPr>
-                        <m:jc m:val="centerGroup"/>
-                      </m:oMathParaPr>
-                      <m:oMath xmlns:m="http://schemas.openxmlformats.org/officeDocument/2006/math">
+                      <m:oMath>
                         <m:r>
                           <a:rPr lang="en-US" b="0" i="1" smtClean="0">
                             <a:latin typeface="Cambria Math" panose="02040503050406030204" pitchFamily="18" charset="0"/>
@@ -20906,10 +20846,7 @@
                   <a:pPr/>
                   <a14:m>
                     <m:oMathPara xmlns:m="http://schemas.openxmlformats.org/officeDocument/2006/math">
-                      <m:oMathParaPr>
-                        <m:jc m:val="centerGroup"/>
-                      </m:oMathParaPr>
-                      <m:oMath xmlns:m="http://schemas.openxmlformats.org/officeDocument/2006/math">
+                      <m:oMath>
                         <m:sSub>
                           <m:sSubPr>
                             <m:ctrlPr>
@@ -21032,10 +20969,7 @@
                   <a:pPr/>
                   <a14:m>
                     <m:oMathPara xmlns:m="http://schemas.openxmlformats.org/officeDocument/2006/math">
-                      <m:oMathParaPr>
-                        <m:jc m:val="centerGroup"/>
-                      </m:oMathParaPr>
-                      <m:oMath xmlns:m="http://schemas.openxmlformats.org/officeDocument/2006/math">
+                      <m:oMath>
                         <m:r>
                           <a:rPr lang="en-US" b="0" i="1" smtClean="0">
                             <a:latin typeface="Cambria Math" panose="02040503050406030204" pitchFamily="18" charset="0"/>
@@ -21839,10 +21773,7 @@
                   <a:pPr/>
                   <a14:m>
                     <m:oMathPara xmlns:m="http://schemas.openxmlformats.org/officeDocument/2006/math">
-                      <m:oMathParaPr>
-                        <m:jc m:val="centerGroup"/>
-                      </m:oMathParaPr>
-                      <m:oMath xmlns:m="http://schemas.openxmlformats.org/officeDocument/2006/math">
+                      <m:oMath>
                         <m:sSub>
                           <m:sSubPr>
                             <m:ctrlPr>
@@ -21965,10 +21896,7 @@
                   <a:pPr/>
                   <a14:m>
                     <m:oMathPara xmlns:m="http://schemas.openxmlformats.org/officeDocument/2006/math">
-                      <m:oMathParaPr>
-                        <m:jc m:val="centerGroup"/>
-                      </m:oMathParaPr>
-                      <m:oMath xmlns:m="http://schemas.openxmlformats.org/officeDocument/2006/math">
+                      <m:oMath>
                         <m:r>
                           <a:rPr lang="en-US" b="0" i="1" smtClean="0">
                             <a:latin typeface="Cambria Math" panose="02040503050406030204" pitchFamily="18" charset="0"/>
@@ -22080,14 +22008,11 @@
                   <a:pPr algn="ctr"/>
                   <a14:m>
                     <m:oMathPara xmlns:m="http://schemas.openxmlformats.org/officeDocument/2006/math">
-                      <m:oMathParaPr>
-                        <m:jc m:val="centerGroup"/>
-                      </m:oMathParaPr>
-                      <m:oMath xmlns:m="http://schemas.openxmlformats.org/officeDocument/2006/math">
+                      <m:oMath>
                         <m:sSub>
                           <m:sSubPr>
                             <m:ctrlPr>
-                              <a:rPr lang="nl-BE" sz="1400" i="1" smtClean="0">
+                              <a:rPr lang="en-US" sz="1400" b="0" i="1" smtClean="0">
                                 <a:latin typeface="Cambria Math" panose="02040503050406030204" pitchFamily="18" charset="0"/>
                               </a:rPr>
                             </m:ctrlPr>
@@ -23071,10 +22996,7 @@
                   <a:pPr/>
                   <a14:m>
                     <m:oMathPara xmlns:m="http://schemas.openxmlformats.org/officeDocument/2006/math">
-                      <m:oMathParaPr>
-                        <m:jc m:val="centerGroup"/>
-                      </m:oMathParaPr>
-                      <m:oMath xmlns:m="http://schemas.openxmlformats.org/officeDocument/2006/math">
+                      <m:oMath>
                         <m:sSub>
                           <m:sSubPr>
                             <m:ctrlPr>
@@ -23113,7 +23035,7 @@
                         <m:sSub>
                           <m:sSubPr>
                             <m:ctrlPr>
-                              <a:rPr lang="nl-BE" sz="1600" i="1">
+                              <a:rPr lang="en-US" sz="1600" i="1">
                                 <a:latin typeface="Cambria Math" panose="02040503050406030204" pitchFamily="18" charset="0"/>
                               </a:rPr>
                             </m:ctrlPr>
@@ -23215,14 +23137,11 @@
                   <a:pPr/>
                   <a14:m>
                     <m:oMathPara xmlns:m="http://schemas.openxmlformats.org/officeDocument/2006/math">
-                      <m:oMathParaPr>
-                        <m:jc m:val="centerGroup"/>
-                      </m:oMathParaPr>
-                      <m:oMath xmlns:m="http://schemas.openxmlformats.org/officeDocument/2006/math">
+                      <m:oMath>
                         <m:sSub>
                           <m:sSubPr>
                             <m:ctrlPr>
-                              <a:rPr lang="nl-BE" sz="1600" i="1" smtClean="0">
+                              <a:rPr lang="en-US" sz="1600" b="0" i="1" smtClean="0">
                                 <a:latin typeface="Cambria Math" panose="02040503050406030204" pitchFamily="18" charset="0"/>
                               </a:rPr>
                             </m:ctrlPr>
@@ -23321,7 +23240,7 @@
                       <m:sSub>
                         <m:sSubPr>
                           <m:ctrlPr>
-                            <a:rPr lang="nl-BE" sz="1400" b="1" i="1">
+                            <a:rPr lang="en-US" sz="1400" b="1" i="1">
                               <a:latin typeface="Cambria Math" panose="02040503050406030204" pitchFamily="18" charset="0"/>
                             </a:rPr>
                           </m:ctrlPr>
@@ -23448,14 +23367,11 @@
                   <a:pPr algn="ctr"/>
                   <a14:m>
                     <m:oMathPara xmlns:m="http://schemas.openxmlformats.org/officeDocument/2006/math">
-                      <m:oMathParaPr>
-                        <m:jc m:val="centerGroup"/>
-                      </m:oMathParaPr>
-                      <m:oMath xmlns:m="http://schemas.openxmlformats.org/officeDocument/2006/math">
+                      <m:oMath>
                         <m:sSubSup>
                           <m:sSubSupPr>
                             <m:ctrlPr>
-                              <a:rPr lang="nl-BE" sz="1400" i="1" smtClean="0">
+                              <a:rPr lang="en-US" sz="1400" b="0" i="1" smtClean="0">
                                 <a:latin typeface="Cambria Math" panose="02040503050406030204" pitchFamily="18" charset="0"/>
                               </a:rPr>
                             </m:ctrlPr>
@@ -23578,14 +23494,11 @@
                   <a:pPr/>
                   <a14:m>
                     <m:oMathPara xmlns:m="http://schemas.openxmlformats.org/officeDocument/2006/math">
-                      <m:oMathParaPr>
-                        <m:jc m:val="centerGroup"/>
-                      </m:oMathParaPr>
-                      <m:oMath xmlns:m="http://schemas.openxmlformats.org/officeDocument/2006/math">
+                      <m:oMath>
                         <m:sSubSup>
                           <m:sSubSupPr>
                             <m:ctrlPr>
-                              <a:rPr lang="nl-BE" sz="1400" i="1" smtClean="0">
+                              <a:rPr lang="en-US" sz="1400" i="1">
                                 <a:latin typeface="Cambria Math" panose="02040503050406030204" pitchFamily="18" charset="0"/>
                               </a:rPr>
                             </m:ctrlPr>
@@ -23780,7 +23693,7 @@
                       <m:sSub>
                         <m:sSubPr>
                           <m:ctrlPr>
-                            <a:rPr lang="en-US" sz="1400" i="1">
+                            <a:rPr lang="en-US" sz="1400" b="0" i="1" smtClean="0">
                               <a:latin typeface="Cambria Math" panose="02040503050406030204" pitchFamily="18" charset="0"/>
                             </a:rPr>
                           </m:ctrlPr>
@@ -23811,7 +23724,7 @@
                       <m:sSubSup>
                         <m:sSubSupPr>
                           <m:ctrlPr>
-                            <a:rPr lang="nl-BE" sz="1400" i="1" smtClean="0">
+                            <a:rPr lang="en-US" sz="1400" i="1">
                               <a:latin typeface="Cambria Math" panose="02040503050406030204" pitchFamily="18" charset="0"/>
                             </a:rPr>
                           </m:ctrlPr>
@@ -23895,9 +23808,8 @@
                       <m:d>
                         <m:dPr>
                           <m:ctrlPr>
-                            <a:rPr lang="pt-BR" sz="1400" i="1">
+                            <a:rPr lang="nl-BE" sz="1400" i="1">
                               <a:latin typeface="Cambria Math" panose="02040503050406030204" pitchFamily="18" charset="0"/>
-                              <a:ea typeface="Cambria Math" panose="02040503050406030204" pitchFamily="18" charset="0"/>
                             </a:rPr>
                           </m:ctrlPr>
                         </m:dPr>
@@ -23905,7 +23817,7 @@
                           <m:sSub>
                             <m:sSubPr>
                               <m:ctrlPr>
-                                <a:rPr lang="nl-BE" sz="1400" i="1">
+                                <a:rPr lang="en-US" sz="1400" i="1">
                                   <a:latin typeface="Cambria Math" panose="02040503050406030204" pitchFamily="18" charset="0"/>
                                 </a:rPr>
                               </m:ctrlPr>
@@ -24334,10 +24246,7 @@
                   <a:pPr/>
                   <a14:m>
                     <m:oMathPara xmlns:m="http://schemas.openxmlformats.org/officeDocument/2006/math">
-                      <m:oMathParaPr>
-                        <m:jc m:val="centerGroup"/>
-                      </m:oMathParaPr>
-                      <m:oMath xmlns:m="http://schemas.openxmlformats.org/officeDocument/2006/math">
+                      <m:oMath>
                         <m:sSub>
                           <m:sSubPr>
                             <m:ctrlPr>
@@ -24376,7 +24285,7 @@
                         <m:sSub>
                           <m:sSubPr>
                             <m:ctrlPr>
-                              <a:rPr lang="nl-BE" sz="1600" i="1">
+                              <a:rPr lang="en-US" sz="1600" i="1">
                                 <a:latin typeface="Cambria Math" panose="02040503050406030204" pitchFamily="18" charset="0"/>
                               </a:rPr>
                             </m:ctrlPr>
@@ -24478,14 +24387,11 @@
                   <a:pPr/>
                   <a14:m>
                     <m:oMathPara xmlns:m="http://schemas.openxmlformats.org/officeDocument/2006/math">
-                      <m:oMathParaPr>
-                        <m:jc m:val="centerGroup"/>
-                      </m:oMathParaPr>
-                      <m:oMath xmlns:m="http://schemas.openxmlformats.org/officeDocument/2006/math">
+                      <m:oMath>
                         <m:sSub>
                           <m:sSubPr>
                             <m:ctrlPr>
-                              <a:rPr lang="nl-BE" sz="1600" i="1" smtClean="0">
+                              <a:rPr lang="en-US" sz="1600" b="0" i="1" smtClean="0">
                                 <a:latin typeface="Cambria Math" panose="02040503050406030204" pitchFamily="18" charset="0"/>
                               </a:rPr>
                             </m:ctrlPr>
@@ -24584,7 +24490,7 @@
                       <m:sSub>
                         <m:sSubPr>
                           <m:ctrlPr>
-                            <a:rPr lang="nl-BE" sz="1400" b="1" i="1">
+                            <a:rPr lang="en-US" sz="1400" b="1" i="1">
                               <a:latin typeface="Cambria Math" panose="02040503050406030204" pitchFamily="18" charset="0"/>
                             </a:rPr>
                           </m:ctrlPr>
@@ -24719,14 +24625,11 @@
                   <a:pPr algn="ctr"/>
                   <a14:m>
                     <m:oMathPara xmlns:m="http://schemas.openxmlformats.org/officeDocument/2006/math">
-                      <m:oMathParaPr>
-                        <m:jc m:val="centerGroup"/>
-                      </m:oMathParaPr>
-                      <m:oMath xmlns:m="http://schemas.openxmlformats.org/officeDocument/2006/math">
+                      <m:oMath>
                         <m:sSubSup>
                           <m:sSubSupPr>
                             <m:ctrlPr>
-                              <a:rPr lang="nl-BE" sz="1400" i="1" smtClean="0">
+                              <a:rPr lang="en-US" sz="1400" b="0" i="1" smtClean="0">
                                 <a:latin typeface="Cambria Math" panose="02040503050406030204" pitchFamily="18" charset="0"/>
                               </a:rPr>
                             </m:ctrlPr>
@@ -24849,14 +24752,11 @@
                   <a:pPr/>
                   <a14:m>
                     <m:oMathPara xmlns:m="http://schemas.openxmlformats.org/officeDocument/2006/math">
-                      <m:oMathParaPr>
-                        <m:jc m:val="centerGroup"/>
-                      </m:oMathParaPr>
-                      <m:oMath xmlns:m="http://schemas.openxmlformats.org/officeDocument/2006/math">
+                      <m:oMath>
                         <m:sSubSup>
                           <m:sSubSupPr>
                             <m:ctrlPr>
-                              <a:rPr lang="nl-BE" sz="1400" i="1" smtClean="0">
+                              <a:rPr lang="en-US" sz="1400" i="1">
                                 <a:latin typeface="Cambria Math" panose="02040503050406030204" pitchFamily="18" charset="0"/>
                               </a:rPr>
                             </m:ctrlPr>
@@ -25050,7 +24950,7 @@
                       <m:sSub>
                         <m:sSubPr>
                           <m:ctrlPr>
-                            <a:rPr lang="en-US" sz="1400" i="1">
+                            <a:rPr lang="en-US" sz="1400" b="0" i="1" smtClean="0">
                               <a:latin typeface="Cambria Math" panose="02040503050406030204" pitchFamily="18" charset="0"/>
                             </a:rPr>
                           </m:ctrlPr>
@@ -25081,7 +24981,7 @@
                       <m:sSubSup>
                         <m:sSubSupPr>
                           <m:ctrlPr>
-                            <a:rPr lang="nl-BE" sz="1400" i="1" smtClean="0">
+                            <a:rPr lang="en-US" sz="1400" i="1">
                               <a:latin typeface="Cambria Math" panose="02040503050406030204" pitchFamily="18" charset="0"/>
                             </a:rPr>
                           </m:ctrlPr>
@@ -25165,9 +25065,8 @@
                       <m:d>
                         <m:dPr>
                           <m:ctrlPr>
-                            <a:rPr lang="pt-BR" sz="1400" i="1">
+                            <a:rPr lang="nl-BE" sz="1400" i="1">
                               <a:latin typeface="Cambria Math" panose="02040503050406030204" pitchFamily="18" charset="0"/>
-                              <a:ea typeface="Cambria Math" panose="02040503050406030204" pitchFamily="18" charset="0"/>
                             </a:rPr>
                           </m:ctrlPr>
                         </m:dPr>
@@ -25175,7 +25074,7 @@
                           <m:sSub>
                             <m:sSubPr>
                               <m:ctrlPr>
-                                <a:rPr lang="nl-BE" sz="1400" i="1">
+                                <a:rPr lang="en-US" sz="1400" i="1">
                                   <a:latin typeface="Cambria Math" panose="02040503050406030204" pitchFamily="18" charset="0"/>
                                 </a:rPr>
                               </m:ctrlPr>
@@ -25521,10 +25420,7 @@
                   <a:pPr/>
                   <a14:m>
                     <m:oMathPara xmlns:m="http://schemas.openxmlformats.org/officeDocument/2006/math">
-                      <m:oMathParaPr>
-                        <m:jc m:val="centerGroup"/>
-                      </m:oMathParaPr>
-                      <m:oMath xmlns:m="http://schemas.openxmlformats.org/officeDocument/2006/math">
+                      <m:oMath>
                         <m:sSub>
                           <m:sSubPr>
                             <m:ctrlPr>
@@ -25849,10 +25745,7 @@
                   <a:pPr/>
                   <a14:m>
                     <m:oMathPara xmlns:m="http://schemas.openxmlformats.org/officeDocument/2006/math">
-                      <m:oMathParaPr>
-                        <m:jc m:val="centerGroup"/>
-                      </m:oMathParaPr>
-                      <m:oMath xmlns:m="http://schemas.openxmlformats.org/officeDocument/2006/math">
+                      <m:oMath>
                         <m:sSub>
                           <m:sSubPr>
                             <m:ctrlPr>
@@ -26177,10 +26070,7 @@
                   <a:pPr/>
                   <a14:m>
                     <m:oMathPara xmlns:m="http://schemas.openxmlformats.org/officeDocument/2006/math">
-                      <m:oMathParaPr>
-                        <m:jc m:val="centerGroup"/>
-                      </m:oMathParaPr>
-                      <m:oMath xmlns:m="http://schemas.openxmlformats.org/officeDocument/2006/math">
+                      <m:oMath>
                         <m:sSub>
                           <m:sSubPr>
                             <m:ctrlPr>
@@ -26505,10 +26395,7 @@
                   <a:pPr/>
                   <a14:m>
                     <m:oMathPara xmlns:m="http://schemas.openxmlformats.org/officeDocument/2006/math">
-                      <m:oMathParaPr>
-                        <m:jc m:val="centerGroup"/>
-                      </m:oMathParaPr>
-                      <m:oMath xmlns:m="http://schemas.openxmlformats.org/officeDocument/2006/math">
+                      <m:oMath>
                         <m:sSub>
                           <m:sSubPr>
                             <m:ctrlPr>
@@ -27267,10 +27154,7 @@
                   <a:pPr/>
                   <a14:m>
                     <m:oMathPara xmlns:m="http://schemas.openxmlformats.org/officeDocument/2006/math">
-                      <m:oMathParaPr>
-                        <m:jc m:val="centerGroup"/>
-                      </m:oMathParaPr>
-                      <m:oMath xmlns:m="http://schemas.openxmlformats.org/officeDocument/2006/math">
+                      <m:oMath>
                         <m:sSub>
                           <m:sSubPr>
                             <m:ctrlPr>
@@ -28089,10 +27973,7 @@
                   <a:pPr/>
                   <a14:m>
                     <m:oMathPara xmlns:m="http://schemas.openxmlformats.org/officeDocument/2006/math">
-                      <m:oMathParaPr>
-                        <m:jc m:val="centerGroup"/>
-                      </m:oMathParaPr>
-                      <m:oMath xmlns:m="http://schemas.openxmlformats.org/officeDocument/2006/math">
+                      <m:oMath>
                         <m:sSub>
                           <m:sSubPr>
                             <m:ctrlPr>
@@ -28419,10 +28300,7 @@
                   <a:pPr/>
                   <a14:m>
                     <m:oMathPara xmlns:m="http://schemas.openxmlformats.org/officeDocument/2006/math">
-                      <m:oMathParaPr>
-                        <m:jc m:val="centerGroup"/>
-                      </m:oMathParaPr>
-                      <m:oMath xmlns:m="http://schemas.openxmlformats.org/officeDocument/2006/math">
+                      <m:oMath>
                         <m:sSub>
                           <m:sSubPr>
                             <m:ctrlPr>
@@ -28749,10 +28627,7 @@
                   <a:pPr/>
                   <a14:m>
                     <m:oMathPara xmlns:m="http://schemas.openxmlformats.org/officeDocument/2006/math">
-                      <m:oMathParaPr>
-                        <m:jc m:val="centerGroup"/>
-                      </m:oMathParaPr>
-                      <m:oMath xmlns:m="http://schemas.openxmlformats.org/officeDocument/2006/math">
+                      <m:oMath>
                         <m:sSub>
                           <m:sSubPr>
                             <m:ctrlPr>
@@ -29079,10 +28954,7 @@
                   <a:pPr/>
                   <a14:m>
                     <m:oMathPara xmlns:m="http://schemas.openxmlformats.org/officeDocument/2006/math">
-                      <m:oMathParaPr>
-                        <m:jc m:val="centerGroup"/>
-                      </m:oMathParaPr>
-                      <m:oMath xmlns:m="http://schemas.openxmlformats.org/officeDocument/2006/math">
+                      <m:oMath>
                         <m:sSub>
                           <m:sSubPr>
                             <m:ctrlPr>
@@ -30742,14 +30614,11 @@
                   <a:pPr/>
                   <a14:m>
                     <m:oMathPara xmlns:m="http://schemas.openxmlformats.org/officeDocument/2006/math">
-                      <m:oMathParaPr>
-                        <m:jc m:val="centerGroup"/>
-                      </m:oMathParaPr>
-                      <m:oMath xmlns:m="http://schemas.openxmlformats.org/officeDocument/2006/math">
+                      <m:oMath>
                         <m:sSub>
                           <m:sSubPr>
                             <m:ctrlPr>
-                              <a:rPr lang="pt-BR" sz="2000" i="1" smtClean="0">
+                              <a:rPr lang="pt-BR" sz="2000" b="0" i="1" smtClean="0">
                                 <a:latin typeface="Cambria Math" panose="02040503050406030204" pitchFamily="18" charset="0"/>
                               </a:rPr>
                             </m:ctrlPr>
@@ -30845,14 +30714,11 @@
                   <a:pPr/>
                   <a14:m>
                     <m:oMathPara xmlns:m="http://schemas.openxmlformats.org/officeDocument/2006/math">
-                      <m:oMathParaPr>
-                        <m:jc m:val="centerGroup"/>
-                      </m:oMathParaPr>
-                      <m:oMath xmlns:m="http://schemas.openxmlformats.org/officeDocument/2006/math">
+                      <m:oMath>
                         <m:sSub>
                           <m:sSubPr>
                             <m:ctrlPr>
-                              <a:rPr lang="pt-BR" sz="2000" i="1" smtClean="0">
+                              <a:rPr lang="pt-BR" sz="2000" b="0" i="1" smtClean="0">
                                 <a:latin typeface="Cambria Math" panose="02040503050406030204" pitchFamily="18" charset="0"/>
                               </a:rPr>
                             </m:ctrlPr>
@@ -32951,14 +32817,11 @@
                   <a:pPr/>
                   <a14:m>
                     <m:oMathPara xmlns:m="http://schemas.openxmlformats.org/officeDocument/2006/math">
-                      <m:oMathParaPr>
-                        <m:jc m:val="centerGroup"/>
-                      </m:oMathParaPr>
-                      <m:oMath xmlns:m="http://schemas.openxmlformats.org/officeDocument/2006/math">
+                      <m:oMath>
                         <m:sSub>
                           <m:sSubPr>
                             <m:ctrlPr>
-                              <a:rPr lang="pt-BR" sz="2000" i="1" smtClean="0">
+                              <a:rPr lang="pt-BR" sz="2000" b="0" i="1" smtClean="0">
                                 <a:latin typeface="Cambria Math" panose="02040503050406030204" pitchFamily="18" charset="0"/>
                               </a:rPr>
                             </m:ctrlPr>
@@ -33054,14 +32917,11 @@
                   <a:pPr/>
                   <a14:m>
                     <m:oMathPara xmlns:m="http://schemas.openxmlformats.org/officeDocument/2006/math">
-                      <m:oMathParaPr>
-                        <m:jc m:val="centerGroup"/>
-                      </m:oMathParaPr>
-                      <m:oMath xmlns:m="http://schemas.openxmlformats.org/officeDocument/2006/math">
+                      <m:oMath>
                         <m:sSub>
                           <m:sSubPr>
                             <m:ctrlPr>
-                              <a:rPr lang="pt-BR" sz="2000" i="1" smtClean="0">
+                              <a:rPr lang="pt-BR" sz="2000" b="0" i="1" smtClean="0">
                                 <a:latin typeface="Cambria Math" panose="02040503050406030204" pitchFamily="18" charset="0"/>
                               </a:rPr>
                             </m:ctrlPr>
@@ -33184,13 +33044,13 @@
           <a:p>
             <a:r>
               <a:rPr lang="pt-BR" dirty="0"/>
-              <a:t>Escolha do passo de aprendizagem</a:t>
+              <a:t>Escolha da taxa de aprendizagem</a:t>
             </a:r>
           </a:p>
         </p:txBody>
       </p:sp>
-      <mc:AlternateContent xmlns:mc="http://schemas.openxmlformats.org/markup-compatibility/2006" xmlns:a14="http://schemas.microsoft.com/office/drawing/2010/main">
-        <mc:Choice Requires="a14">
+      <mc:AlternateContent xmlns:mc="http://schemas.openxmlformats.org/markup-compatibility/2006">
+        <mc:Choice xmlns:a14="http://schemas.microsoft.com/office/drawing/2010/main" Requires="a14">
           <p:sp>
             <p:nvSpPr>
               <p:cNvPr id="3" name="Espaço Reservado para Conteúdo 2">
@@ -33210,7 +33070,7 @@
             <p:spPr>
               <a:xfrm>
                 <a:off x="5533534" y="1825624"/>
-                <a:ext cx="6466789" cy="5032375"/>
+                <a:ext cx="6551629" cy="5032375"/>
               </a:xfrm>
             </p:spPr>
             <p:txBody>
@@ -33251,7 +33111,7 @@
               <a:p>
                 <a:r>
                   <a:rPr lang="pt-BR" dirty="0"/>
-                  <a:t>Essa porcentagem é dada pelo </a:t>
+                  <a:t>Essa porcentagem é dada pela </a:t>
                 </a:r>
                 <a:r>
                   <a:rPr lang="pt-BR" b="1" i="1" dirty="0">
@@ -33259,7 +33119,19 @@
                       <a:srgbClr val="00B050"/>
                     </a:solidFill>
                   </a:rPr>
-                  <a:t>passo de aprendizagem</a:t>
+                  <a:t>taxa</a:t>
+                </a:r>
+                <a:r>
+                  <a:rPr lang="pt-BR" dirty="0"/>
+                  <a:t> </a:t>
+                </a:r>
+                <a:r>
+                  <a:rPr lang="pt-BR" b="1" i="1" dirty="0">
+                    <a:solidFill>
+                      <a:srgbClr val="00B050"/>
+                    </a:solidFill>
+                  </a:rPr>
+                  <a:t>de aprendizagem</a:t>
                 </a:r>
                 <a:r>
                   <a:rPr lang="pt-BR" dirty="0"/>
@@ -33281,13 +33153,10 @@
                   <a:t>, que é sempre um valor maior do que zero.</a:t>
                 </a:r>
               </a:p>
-              <a:p>
-                <a:endParaRPr lang="pt-BR" dirty="0"/>
-              </a:p>
             </p:txBody>
           </p:sp>
         </mc:Choice>
-        <mc:Fallback xmlns="">
+        <mc:Fallback>
           <p:sp>
             <p:nvSpPr>
               <p:cNvPr id="3" name="Espaço Reservado para Conteúdo 2">
@@ -33307,12 +33176,12 @@
             <p:spPr>
               <a:xfrm>
                 <a:off x="5533534" y="1825624"/>
-                <a:ext cx="6466789" cy="5032375"/>
+                <a:ext cx="6551629" cy="5032375"/>
               </a:xfrm>
               <a:blipFill>
                 <a:blip r:embed="rId2"/>
                 <a:stretch>
-                  <a:fillRect l="-1697" t="-1937" r="-2262"/>
+                  <a:fillRect l="-1676" t="-1937" r="-1024"/>
                 </a:stretch>
               </a:blipFill>
             </p:spPr>
@@ -33364,10 +33233,7 @@
                 <a:pPr/>
                 <a14:m>
                   <m:oMathPara xmlns:m="http://schemas.openxmlformats.org/officeDocument/2006/math">
-                    <m:oMathParaPr>
-                      <m:jc m:val="centerGroup"/>
-                    </m:oMathParaPr>
-                    <m:oMath xmlns:m="http://schemas.openxmlformats.org/officeDocument/2006/math">
+                    <m:oMath>
                       <m:r>
                         <a:rPr lang="pt-BR" sz="2800" b="1" i="1" smtClean="0">
                           <a:solidFill>
@@ -33997,14 +33863,11 @@
                     <a:pPr/>
                     <a14:m>
                       <m:oMathPara xmlns:m="http://schemas.openxmlformats.org/officeDocument/2006/math">
-                        <m:oMathParaPr>
-                          <m:jc m:val="centerGroup"/>
-                        </m:oMathParaPr>
-                        <m:oMath xmlns:m="http://schemas.openxmlformats.org/officeDocument/2006/math">
+                        <m:oMath>
                           <m:sSub>
                             <m:sSubPr>
                               <m:ctrlPr>
-                                <a:rPr lang="pt-BR" sz="2000" i="1" smtClean="0">
+                                <a:rPr lang="pt-BR" sz="2000" b="0" i="1" smtClean="0">
                                   <a:latin typeface="Cambria Math" panose="02040503050406030204" pitchFamily="18" charset="0"/>
                                 </a:rPr>
                               </m:ctrlPr>
@@ -34100,14 +33963,11 @@
                     <a:pPr/>
                     <a14:m>
                       <m:oMathPara xmlns:m="http://schemas.openxmlformats.org/officeDocument/2006/math">
-                        <m:oMathParaPr>
-                          <m:jc m:val="centerGroup"/>
-                        </m:oMathParaPr>
-                        <m:oMath xmlns:m="http://schemas.openxmlformats.org/officeDocument/2006/math">
+                        <m:oMath>
                           <m:sSub>
                             <m:sSubPr>
                               <m:ctrlPr>
-                                <a:rPr lang="pt-BR" sz="2000" i="1" smtClean="0">
+                                <a:rPr lang="pt-BR" sz="2000" b="0" i="1" smtClean="0">
                                   <a:latin typeface="Cambria Math" panose="02040503050406030204" pitchFamily="18" charset="0"/>
                                 </a:rPr>
                               </m:ctrlPr>
@@ -34243,14 +34103,11 @@
                     <a:pPr/>
                     <a14:m>
                       <m:oMathPara xmlns:m="http://schemas.openxmlformats.org/officeDocument/2006/math">
-                        <m:oMathParaPr>
-                          <m:jc m:val="centerGroup"/>
-                        </m:oMathParaPr>
-                        <m:oMath xmlns:m="http://schemas.openxmlformats.org/officeDocument/2006/math">
+                        <m:oMath>
                           <m:sSup>
                             <m:sSupPr>
                               <m:ctrlPr>
-                                <a:rPr lang="pt-BR" b="1" i="1" smtClean="0">
+                                <a:rPr lang="pt-BR" b="1" i="1">
                                   <a:latin typeface="Cambria Math" panose="02040503050406030204" pitchFamily="18" charset="0"/>
                                 </a:rPr>
                               </m:ctrlPr>
@@ -34266,7 +34123,7 @@
                                 <m:rPr>
                                   <m:nor/>
                                 </m:rPr>
-                                <a:rPr lang="pt-BR" b="1" dirty="0"/>
+                                <a:rPr lang="pt-BR" b="1" i="0" dirty="0"/>
                                 <m:t> </m:t>
                               </m:r>
                             </m:e>
@@ -34474,10 +34331,7 @@
                     <a:pPr/>
                     <a14:m>
                       <m:oMathPara xmlns:m="http://schemas.openxmlformats.org/officeDocument/2006/math">
-                        <m:oMathParaPr>
-                          <m:jc m:val="centerGroup"/>
-                        </m:oMathParaPr>
-                        <m:oMath xmlns:m="http://schemas.openxmlformats.org/officeDocument/2006/math">
+                        <m:oMath>
                           <m:sSub>
                             <m:sSubPr>
                               <m:ctrlPr>
@@ -34493,9 +34347,8 @@
                                   <m:begChr m:val="‖"/>
                                   <m:endChr m:val="‖"/>
                                   <m:ctrlPr>
-                                    <a:rPr lang="pt-BR" i="1">
+                                    <a:rPr lang="pt-BR" b="1" i="1">
                                       <a:latin typeface="Cambria Math" panose="02040503050406030204" pitchFamily="18" charset="0"/>
-                                      <a:ea typeface="Cambria Math" panose="02040503050406030204" pitchFamily="18" charset="0"/>
                                     </a:rPr>
                                   </m:ctrlPr>
                                 </m:dPr>
@@ -34690,14 +34543,11 @@
                     <a:pPr/>
                     <a14:m>
                       <m:oMathPara xmlns:m="http://schemas.openxmlformats.org/officeDocument/2006/math">
-                        <m:oMathParaPr>
-                          <m:jc m:val="centerGroup"/>
-                        </m:oMathParaPr>
-                        <m:oMath xmlns:m="http://schemas.openxmlformats.org/officeDocument/2006/math">
+                        <m:oMath>
                           <m:sSub>
                             <m:sSubPr>
                               <m:ctrlPr>
-                                <a:rPr lang="pt-BR" sz="2000" i="1" smtClean="0">
+                                <a:rPr lang="pt-BR" sz="2000" b="0" i="1" smtClean="0">
                                   <a:latin typeface="Cambria Math" panose="02040503050406030204" pitchFamily="18" charset="0"/>
                                 </a:rPr>
                               </m:ctrlPr>
@@ -34793,14 +34643,11 @@
                     <a:pPr/>
                     <a14:m>
                       <m:oMathPara xmlns:m="http://schemas.openxmlformats.org/officeDocument/2006/math">
-                        <m:oMathParaPr>
-                          <m:jc m:val="centerGroup"/>
-                        </m:oMathParaPr>
-                        <m:oMath xmlns:m="http://schemas.openxmlformats.org/officeDocument/2006/math">
+                        <m:oMath>
                           <m:sSub>
                             <m:sSubPr>
                               <m:ctrlPr>
-                                <a:rPr lang="pt-BR" sz="2000" i="1" smtClean="0">
+                                <a:rPr lang="pt-BR" sz="2000" b="0" i="1" smtClean="0">
                                   <a:latin typeface="Cambria Math" panose="02040503050406030204" pitchFamily="18" charset="0"/>
                                 </a:rPr>
                               </m:ctrlPr>
@@ -35310,14 +35157,11 @@
                     <a:pPr/>
                     <a14:m>
                       <m:oMathPara xmlns:m="http://schemas.openxmlformats.org/officeDocument/2006/math">
-                        <m:oMathParaPr>
-                          <m:jc m:val="centerGroup"/>
-                        </m:oMathParaPr>
-                        <m:oMath xmlns:m="http://schemas.openxmlformats.org/officeDocument/2006/math">
+                        <m:oMath>
                           <m:sSup>
                             <m:sSupPr>
                               <m:ctrlPr>
-                                <a:rPr lang="pt-BR" b="1" i="1" smtClean="0">
+                                <a:rPr lang="pt-BR" b="1" i="1">
                                   <a:latin typeface="Cambria Math" panose="02040503050406030204" pitchFamily="18" charset="0"/>
                                 </a:rPr>
                               </m:ctrlPr>
@@ -35333,7 +35177,7 @@
                                 <m:rPr>
                                   <m:nor/>
                                 </m:rPr>
-                                <a:rPr lang="pt-BR" b="1" dirty="0"/>
+                                <a:rPr lang="pt-BR" b="1" i="0" dirty="0"/>
                                 <m:t> </m:t>
                               </m:r>
                             </m:e>
@@ -35493,10 +35337,7 @@
                     <a:pPr/>
                     <a14:m>
                       <m:oMathPara xmlns:m="http://schemas.openxmlformats.org/officeDocument/2006/math">
-                        <m:oMathParaPr>
-                          <m:jc m:val="centerGroup"/>
-                        </m:oMathParaPr>
-                        <m:oMath xmlns:m="http://schemas.openxmlformats.org/officeDocument/2006/math">
+                        <m:oMath>
                           <m:sSubSup>
                             <m:sSubSupPr>
                               <m:ctrlPr>
@@ -35512,9 +35353,8 @@
                                   <m:begChr m:val="‖"/>
                                   <m:endChr m:val="‖"/>
                                   <m:ctrlPr>
-                                    <a:rPr lang="pt-BR" i="1">
+                                    <a:rPr lang="pt-BR" b="1" i="1">
                                       <a:latin typeface="Cambria Math" panose="02040503050406030204" pitchFamily="18" charset="0"/>
-                                      <a:ea typeface="Cambria Math" panose="02040503050406030204" pitchFamily="18" charset="0"/>
                                     </a:rPr>
                                   </m:ctrlPr>
                                 </m:dPr>
@@ -35837,14 +35677,11 @@
                   <a:pPr/>
                   <a14:m>
                     <m:oMathPara xmlns:m="http://schemas.openxmlformats.org/officeDocument/2006/math">
-                      <m:oMathParaPr>
-                        <m:jc m:val="centerGroup"/>
-                      </m:oMathParaPr>
-                      <m:oMath xmlns:m="http://schemas.openxmlformats.org/officeDocument/2006/math">
+                      <m:oMath>
                         <m:sSub>
                           <m:sSubPr>
                             <m:ctrlPr>
-                              <a:rPr lang="pt-BR" sz="2000" i="1" smtClean="0">
+                              <a:rPr lang="pt-BR" sz="2000" b="0" i="1" smtClean="0">
                                 <a:latin typeface="Cambria Math" panose="02040503050406030204" pitchFamily="18" charset="0"/>
                               </a:rPr>
                             </m:ctrlPr>
@@ -36396,14 +36233,11 @@
                     <a:pPr/>
                     <a14:m>
                       <m:oMathPara xmlns:m="http://schemas.openxmlformats.org/officeDocument/2006/math">
-                        <m:oMathParaPr>
-                          <m:jc m:val="centerGroup"/>
-                        </m:oMathParaPr>
-                        <m:oMath xmlns:m="http://schemas.openxmlformats.org/officeDocument/2006/math">
+                        <m:oMath>
                           <m:sSub>
                             <m:sSubPr>
                               <m:ctrlPr>
-                                <a:rPr lang="pt-BR" sz="2000" i="1" smtClean="0">
+                                <a:rPr lang="pt-BR" sz="2000" b="0" i="1" smtClean="0">
                                   <a:latin typeface="Cambria Math" panose="02040503050406030204" pitchFamily="18" charset="0"/>
                                 </a:rPr>
                               </m:ctrlPr>
@@ -37399,14 +37233,11 @@
                   <a:pPr/>
                   <a14:m>
                     <m:oMathPara xmlns:m="http://schemas.openxmlformats.org/officeDocument/2006/math">
-                      <m:oMathParaPr>
-                        <m:jc m:val="centerGroup"/>
-                      </m:oMathParaPr>
-                      <m:oMath xmlns:m="http://schemas.openxmlformats.org/officeDocument/2006/math">
+                      <m:oMath>
                         <m:sSub>
                           <m:sSubPr>
                             <m:ctrlPr>
-                              <a:rPr lang="pt-BR" sz="2000" i="1" smtClean="0">
+                              <a:rPr lang="pt-BR" sz="2000" b="0" i="1" smtClean="0">
                                 <a:latin typeface="Cambria Math" panose="02040503050406030204" pitchFamily="18" charset="0"/>
                               </a:rPr>
                             </m:ctrlPr>
@@ -37502,14 +37333,11 @@
                   <a:pPr/>
                   <a14:m>
                     <m:oMathPara xmlns:m="http://schemas.openxmlformats.org/officeDocument/2006/math">
-                      <m:oMathParaPr>
-                        <m:jc m:val="centerGroup"/>
-                      </m:oMathParaPr>
-                      <m:oMath xmlns:m="http://schemas.openxmlformats.org/officeDocument/2006/math">
+                      <m:oMath>
                         <m:sSub>
                           <m:sSubPr>
                             <m:ctrlPr>
-                              <a:rPr lang="pt-BR" sz="2000" i="1" smtClean="0">
+                              <a:rPr lang="pt-BR" sz="2000" b="0" i="1" smtClean="0">
                                 <a:latin typeface="Cambria Math" panose="02040503050406030204" pitchFamily="18" charset="0"/>
                               </a:rPr>
                             </m:ctrlPr>
@@ -38334,7 +38162,7 @@
           <a:p>
             <a:r>
               <a:rPr lang="pt-BR" dirty="0"/>
-              <a:t>Escolha do passo de aprendizagem</a:t>
+              <a:t>Escolha da taxa de aprendizagem</a:t>
             </a:r>
           </a:p>
         </p:txBody>
@@ -38358,7 +38186,7 @@
         <p:spPr>
           <a:xfrm>
             <a:off x="5533534" y="1825624"/>
-            <a:ext cx="6466789" cy="5032375"/>
+            <a:ext cx="6579909" cy="5032375"/>
           </a:xfrm>
         </p:spPr>
         <p:txBody>
@@ -38368,14 +38196,10 @@
           <a:lstStyle/>
           <a:p>
             <a:r>
-              <a:rPr lang="pt-BR" dirty="0"/>
-              <a:t>O</a:t>
-            </a:r>
-            <a:r>
               <a:rPr lang="pt-BR" b="0" i="0" dirty="0">
                 <a:effectLst/>
               </a:rPr>
-              <a:t> passo de aprendizagem </a:t>
+              <a:t>A taxa de aprendizagem </a:t>
             </a:r>
             <a:r>
               <a:rPr lang="pt-BR" b="1" i="1" dirty="0">
@@ -38435,7 +38259,7 @@
           <a:p>
             <a:r>
               <a:rPr lang="pt-BR" dirty="0"/>
-              <a:t>Ou seja, ele determina o </a:t>
+              <a:t>Ou seja, ela determina o </a:t>
             </a:r>
             <a:r>
               <a:rPr lang="pt-BR" b="1" i="1" dirty="0">
@@ -38524,10 +38348,7 @@
                 <a:pPr/>
                 <a14:m>
                   <m:oMathPara xmlns:m="http://schemas.openxmlformats.org/officeDocument/2006/math">
-                    <m:oMathParaPr>
-                      <m:jc m:val="centerGroup"/>
-                    </m:oMathParaPr>
-                    <m:oMath xmlns:m="http://schemas.openxmlformats.org/officeDocument/2006/math">
+                    <m:oMath>
                       <m:r>
                         <a:rPr lang="pt-BR" sz="2800" b="1" i="1" smtClean="0">
                           <a:solidFill>
@@ -38809,7 +38630,7 @@
             </a:pPr>
             <a:r>
               <a:rPr lang="pt-BR" sz="4400" b="1" i="1" dirty="0"/>
-              <a:t>Portanto, como veremos, a escolha do passo de aprendizagem é muito importante para o </a:t>
+              <a:t>Portanto, como veremos, a escolha da taxa de aprendizagem é muito importante para o </a:t>
             </a:r>
             <a:r>
               <a:rPr lang="pt-BR" sz="4400" b="1" i="1" dirty="0">
@@ -38879,7 +38700,7 @@
           <a:p>
             <a:r>
               <a:rPr lang="pt-BR" dirty="0"/>
-              <a:t>Escolha do passo de aprendizagem</a:t>
+              <a:t>Escolha da taxa de aprendizagem</a:t>
             </a:r>
           </a:p>
         </p:txBody>
@@ -39157,13 +38978,13 @@
           <a:p>
             <a:r>
               <a:rPr lang="pt-BR" dirty="0"/>
-              <a:t>Escolha do passo de aprendizagem</a:t>
+              <a:t>Escolha da taxa de aprendizagem</a:t>
             </a:r>
           </a:p>
         </p:txBody>
       </p:sp>
-      <mc:AlternateContent xmlns:mc="http://schemas.openxmlformats.org/markup-compatibility/2006" xmlns:a14="http://schemas.microsoft.com/office/drawing/2010/main">
-        <mc:Choice Requires="a14">
+      <mc:AlternateContent xmlns:mc="http://schemas.openxmlformats.org/markup-compatibility/2006">
+        <mc:Choice xmlns:a14="http://schemas.microsoft.com/office/drawing/2010/main" Requires="a14">
           <p:sp>
             <p:nvSpPr>
               <p:cNvPr id="3" name="Espaço Reservado para Conteúdo 2">
@@ -39196,7 +39017,7 @@
                   <a:rPr lang="pt-BR" b="0" i="0" dirty="0">
                     <a:effectLst/>
                   </a:rPr>
-                  <a:t>Em geral, a escolha do passo é feita </a:t>
+                  <a:t>Em geral, a escolha da taxa é feita </a:t>
                 </a:r>
                 <a:r>
                   <a:rPr lang="pt-BR" b="1" i="0" dirty="0">
@@ -39225,7 +39046,7 @@
                 </a:r>
                 <a:r>
                   <a:rPr lang="pt-BR" dirty="0"/>
-                  <a:t> do passo de aprendizagem é usar a seguinte sequência (</a:t>
+                  <a:t> da taxa de aprendizagem é usar a seguinte sequência (</a:t>
                 </a:r>
                 <a:r>
                   <a:rPr lang="pt-BR" b="1" i="1" dirty="0"/>
@@ -39248,10 +39069,7 @@
                 </a:pPr>
                 <a14:m>
                   <m:oMathPara xmlns:m="http://schemas.openxmlformats.org/officeDocument/2006/math">
-                    <m:oMathParaPr>
-                      <m:jc m:val="centerGroup"/>
-                    </m:oMathParaPr>
-                    <m:oMath xmlns:m="http://schemas.openxmlformats.org/officeDocument/2006/math">
+                    <m:oMath>
                       <m:r>
                         <a:rPr lang="pt-BR" i="1" smtClean="0">
                           <a:latin typeface="Cambria Math" panose="02040503050406030204" pitchFamily="18" charset="0"/>
@@ -39278,13 +39096,13 @@
               <a:p>
                 <a:r>
                   <a:rPr lang="pt-BR" dirty="0"/>
-                  <a:t>Vejamos um exemplo sobre como o passo de aprendizagem afeta a convergência de um modelo.</a:t>
+                  <a:t>Vejamos um exemplo sobre como a taxa de aprendizagem afeta a convergência de um modelo.</a:t>
                 </a:r>
               </a:p>
             </p:txBody>
           </p:sp>
         </mc:Choice>
-        <mc:Fallback xmlns="">
+        <mc:Fallback>
           <p:sp>
             <p:nvSpPr>
               <p:cNvPr id="3" name="Espaço Reservado para Conteúdo 2">
@@ -39309,7 +39127,7 @@
               <a:blipFill>
                 <a:blip r:embed="rId3"/>
                 <a:stretch>
-                  <a:fillRect l="-981" t="-1937" r="-818"/>
+                  <a:fillRect l="-981" t="-1937"/>
                 </a:stretch>
               </a:blipFill>
             </p:spPr>
@@ -39409,10 +39227,7 @@
                 <a:pPr/>
                 <a14:m>
                   <m:oMathPara xmlns:m="http://schemas.openxmlformats.org/officeDocument/2006/math">
-                    <m:oMathParaPr>
-                      <m:jc m:val="centerGroup"/>
-                    </m:oMathParaPr>
-                    <m:oMath xmlns:m="http://schemas.openxmlformats.org/officeDocument/2006/math">
+                    <m:oMath>
                       <m:r>
                         <a:rPr lang="pt-BR" b="0" i="1" smtClean="0">
                           <a:latin typeface="Cambria Math" panose="02040503050406030204" pitchFamily="18" charset="0"/>
@@ -39560,10 +39375,7 @@
                 <a:pPr/>
                 <a14:m>
                   <m:oMathPara xmlns:m="http://schemas.openxmlformats.org/officeDocument/2006/math">
-                    <m:oMathParaPr>
-                      <m:jc m:val="centerGroup"/>
-                    </m:oMathParaPr>
-                    <m:oMath xmlns:m="http://schemas.openxmlformats.org/officeDocument/2006/math">
+                    <m:oMath>
                       <m:r>
                         <a:rPr lang="pt-BR" b="0" i="1" smtClean="0">
                           <a:latin typeface="Cambria Math" panose="02040503050406030204" pitchFamily="18" charset="0"/>
@@ -39718,10 +39530,7 @@
                 <a:pPr/>
                 <a14:m>
                   <m:oMathPara xmlns:m="http://schemas.openxmlformats.org/officeDocument/2006/math">
-                    <m:oMathParaPr>
-                      <m:jc m:val="centerGroup"/>
-                    </m:oMathParaPr>
-                    <m:oMath xmlns:m="http://schemas.openxmlformats.org/officeDocument/2006/math">
+                    <m:oMath>
                       <m:r>
                         <a:rPr lang="pt-BR" b="0" i="1" smtClean="0">
                           <a:latin typeface="Cambria Math" panose="02040503050406030204" pitchFamily="18" charset="0"/>
@@ -39968,10 +39777,7 @@
                 <a:pPr/>
                 <a14:m>
                   <m:oMathPara xmlns:m="http://schemas.openxmlformats.org/officeDocument/2006/math">
-                    <m:oMathParaPr>
-                      <m:jc m:val="centerGroup"/>
-                    </m:oMathParaPr>
-                    <m:oMath xmlns:m="http://schemas.openxmlformats.org/officeDocument/2006/math">
+                    <m:oMath>
                       <m:r>
                         <a:rPr lang="pt-BR" b="0" i="1" smtClean="0">
                           <a:latin typeface="Cambria Math" panose="02040503050406030204" pitchFamily="18" charset="0"/>
@@ -40071,10 +39877,7 @@
                 <a:pPr/>
                 <a14:m>
                   <m:oMathPara xmlns:m="http://schemas.openxmlformats.org/officeDocument/2006/math">
-                    <m:oMathParaPr>
-                      <m:jc m:val="centerGroup"/>
-                    </m:oMathParaPr>
-                    <m:oMath xmlns:m="http://schemas.openxmlformats.org/officeDocument/2006/math">
+                    <m:oMath>
                       <m:r>
                         <a:rPr lang="pt-BR" b="0" i="1" smtClean="0">
                           <a:latin typeface="Cambria Math" panose="02040503050406030204" pitchFamily="18" charset="0"/>
@@ -40181,10 +39984,7 @@
                 <a:pPr/>
                 <a14:m>
                   <m:oMathPara xmlns:m="http://schemas.openxmlformats.org/officeDocument/2006/math">
-                    <m:oMathParaPr>
-                      <m:jc m:val="centerGroup"/>
-                    </m:oMathParaPr>
-                    <m:oMath xmlns:m="http://schemas.openxmlformats.org/officeDocument/2006/math">
+                    <m:oMath>
                       <m:r>
                         <a:rPr lang="pt-BR" b="0" i="1" smtClean="0">
                           <a:latin typeface="Cambria Math" panose="02040503050406030204" pitchFamily="18" charset="0"/>
@@ -40359,8 +40159,8 @@
           </a:p>
         </p:txBody>
       </p:sp>
-      <mc:AlternateContent xmlns:mc="http://schemas.openxmlformats.org/markup-compatibility/2006" xmlns:a14="http://schemas.microsoft.com/office/drawing/2010/main">
-        <mc:Choice Requires="a14">
+      <mc:AlternateContent xmlns:mc="http://schemas.openxmlformats.org/markup-compatibility/2006">
+        <mc:Choice xmlns:a14="http://schemas.microsoft.com/office/drawing/2010/main" Requires="a14">
           <p:sp>
             <p:nvSpPr>
               <p:cNvPr id="3" name="Espaço Reservado para Conteúdo 2">
@@ -40391,7 +40191,7 @@
               <a:p>
                 <a:r>
                   <a:rPr lang="pt-BR" dirty="0"/>
-                  <a:t>Caso o passo de aprendizagem seja </a:t>
+                  <a:t>Caso a taxa de aprendizagem seja </a:t>
                 </a:r>
                 <a:r>
                   <a:rPr lang="pt-BR" b="1" i="1" dirty="0">
@@ -40507,7 +40307,7 @@
             </p:txBody>
           </p:sp>
         </mc:Choice>
-        <mc:Fallback xmlns="">
+        <mc:Fallback>
           <p:sp>
             <p:nvSpPr>
               <p:cNvPr id="3" name="Espaço Reservado para Conteúdo 2">
@@ -40541,7 +40341,7 @@
               <a:lstStyle/>
               <a:p>
                 <a:r>
-                  <a:rPr lang="pt-BR">
+                  <a:rPr lang="en-US">
                     <a:noFill/>
                   </a:rPr>
                   <a:t> </a:t>
@@ -41340,6 +41140,23 @@
 </file>
 
 <file path=customXml/item1.xml><?xml version="1.0" encoding="utf-8"?>
+<?mso-contentType ?>
+<FormTemplates xmlns="http://schemas.microsoft.com/sharepoint/v3/contenttype/forms">
+  <Display>DocumentLibraryForm</Display>
+  <Edit>DocumentLibraryForm</Edit>
+  <New>DocumentLibraryForm</New>
+</FormTemplates>
+</file>
+
+<file path=customXml/item2.xml><?xml version="1.0" encoding="utf-8"?>
+<p:properties xmlns:p="http://schemas.microsoft.com/office/2006/metadata/properties" xmlns:xsi="http://www.w3.org/2001/XMLSchema-instance" xmlns:pc="http://schemas.microsoft.com/office/infopath/2007/PartnerControls">
+  <documentManagement>
+    <_activity xmlns="10322600-47b9-44f6-86ef-c87c87ba6e82" xsi:nil="true"/>
+  </documentManagement>
+</p:properties>
+</file>
+
+<file path=customXml/item3.xml><?xml version="1.0" encoding="utf-8"?>
 <ct:contentTypeSchema xmlns:ct="http://schemas.microsoft.com/office/2006/metadata/contentType" xmlns:ma="http://schemas.microsoft.com/office/2006/metadata/properties/metaAttributes" ct:_="" ma:_="" ma:contentTypeName="Document" ma:contentTypeID="0x010100A6553FE09A98904B92A9D00A38127206" ma:contentTypeVersion="18" ma:contentTypeDescription="Create a new document." ma:contentTypeScope="" ma:versionID="92863cfdd2d5fd2ee9b6f30d8c51b1f5">
   <xsd:schema xmlns:xsd="http://www.w3.org/2001/XMLSchema" xmlns:xs="http://www.w3.org/2001/XMLSchema" xmlns:p="http://schemas.microsoft.com/office/2006/metadata/properties" xmlns:ns3="10322600-47b9-44f6-86ef-c87c87ba6e82" xmlns:ns4="026c264a-64f6-48aa-bde0-8bf9e5064f89" targetNamespace="http://schemas.microsoft.com/office/2006/metadata/properties" ma:root="true" ma:fieldsID="86148dd4b4cd32a5258cd233a95bdcf5" ns3:_="" ns4:_="">
     <xsd:import namespace="10322600-47b9-44f6-86ef-c87c87ba6e82"/>
@@ -41592,24 +41409,32 @@
 </ct:contentTypeSchema>
 </file>
 
-<file path=customXml/item2.xml><?xml version="1.0" encoding="utf-8"?>
-<?mso-contentType ?>
-<FormTemplates xmlns="http://schemas.microsoft.com/sharepoint/v3/contenttype/forms">
-  <Display>DocumentLibraryForm</Display>
-  <Edit>DocumentLibraryForm</Edit>
-  <New>DocumentLibraryForm</New>
-</FormTemplates>
+<file path=customXml/itemProps1.xml><?xml version="1.0" encoding="utf-8"?>
+<ds:datastoreItem xmlns:ds="http://schemas.openxmlformats.org/officeDocument/2006/customXml" ds:itemID="{CF4A17E5-ECCE-48A8-A291-06961455A1A6}">
+  <ds:schemaRefs>
+    <ds:schemaRef ds:uri="http://schemas.microsoft.com/sharepoint/v3/contenttype/forms"/>
+  </ds:schemaRefs>
+</ds:datastoreItem>
 </file>
 
-<file path=customXml/item3.xml><?xml version="1.0" encoding="utf-8"?>
-<p:properties xmlns:p="http://schemas.microsoft.com/office/2006/metadata/properties" xmlns:xsi="http://www.w3.org/2001/XMLSchema-instance" xmlns:pc="http://schemas.microsoft.com/office/infopath/2007/PartnerControls">
-  <documentManagement>
-    <_activity xmlns="10322600-47b9-44f6-86ef-c87c87ba6e82" xsi:nil="true"/>
-  </documentManagement>
-</p:properties>
+<file path=customXml/itemProps2.xml><?xml version="1.0" encoding="utf-8"?>
+<ds:datastoreItem xmlns:ds="http://schemas.openxmlformats.org/officeDocument/2006/customXml" ds:itemID="{C4421A6D-F900-459F-9179-A64A47727DAC}">
+  <ds:schemaRefs>
+    <ds:schemaRef ds:uri="http://schemas.microsoft.com/office/2006/documentManagement/types"/>
+    <ds:schemaRef ds:uri="026c264a-64f6-48aa-bde0-8bf9e5064f89"/>
+    <ds:schemaRef ds:uri="http://schemas.openxmlformats.org/package/2006/metadata/core-properties"/>
+    <ds:schemaRef ds:uri="http://purl.org/dc/elements/1.1/"/>
+    <ds:schemaRef ds:uri="http://purl.org/dc/dcmitype/"/>
+    <ds:schemaRef ds:uri="http://schemas.microsoft.com/office/2006/metadata/properties"/>
+    <ds:schemaRef ds:uri="http://www.w3.org/XML/1998/namespace"/>
+    <ds:schemaRef ds:uri="http://schemas.microsoft.com/office/infopath/2007/PartnerControls"/>
+    <ds:schemaRef ds:uri="10322600-47b9-44f6-86ef-c87c87ba6e82"/>
+    <ds:schemaRef ds:uri="http://purl.org/dc/terms/"/>
+  </ds:schemaRefs>
+</ds:datastoreItem>
 </file>
 
-<file path=customXml/itemProps1.xml><?xml version="1.0" encoding="utf-8"?>
+<file path=customXml/itemProps3.xml><?xml version="1.0" encoding="utf-8"?>
 <ds:datastoreItem xmlns:ds="http://schemas.openxmlformats.org/officeDocument/2006/customXml" ds:itemID="{E765951F-25BB-44C2-B87A-A88FE1B68A23}">
   <ds:schemaRefs>
     <ds:schemaRef ds:uri="http://schemas.microsoft.com/office/2006/metadata/contentType"/>
@@ -41626,29 +41451,4 @@
     <ds:schemaRef ds:uri="http://schemas.microsoft.com/internal/obd"/>
   </ds:schemaRefs>
 </ds:datastoreItem>
-</file>
-
-<file path=customXml/itemProps2.xml><?xml version="1.0" encoding="utf-8"?>
-<ds:datastoreItem xmlns:ds="http://schemas.openxmlformats.org/officeDocument/2006/customXml" ds:itemID="{CF4A17E5-ECCE-48A8-A291-06961455A1A6}">
-  <ds:schemaRefs>
-    <ds:schemaRef ds:uri="http://schemas.microsoft.com/sharepoint/v3/contenttype/forms"/>
-  </ds:schemaRefs>
-</ds:datastoreItem>
-</file>
-
-<file path=customXml/itemProps3.xml><?xml version="1.0" encoding="utf-8"?>
-<ds:datastoreItem xmlns:ds="http://schemas.openxmlformats.org/officeDocument/2006/customXml" ds:itemID="{C4421A6D-F900-459F-9179-A64A47727DAC}">
-  <ds:schemaRefs>
-    <ds:schemaRef ds:uri="http://schemas.microsoft.com/office/2006/documentManagement/types"/>
-    <ds:schemaRef ds:uri="026c264a-64f6-48aa-bde0-8bf9e5064f89"/>
-    <ds:schemaRef ds:uri="http://schemas.openxmlformats.org/package/2006/metadata/core-properties"/>
-    <ds:schemaRef ds:uri="http://purl.org/dc/elements/1.1/"/>
-    <ds:schemaRef ds:uri="http://purl.org/dc/dcmitype/"/>
-    <ds:schemaRef ds:uri="http://schemas.microsoft.com/office/2006/metadata/properties"/>
-    <ds:schemaRef ds:uri="http://www.w3.org/XML/1998/namespace"/>
-    <ds:schemaRef ds:uri="http://schemas.microsoft.com/office/infopath/2007/PartnerControls"/>
-    <ds:schemaRef ds:uri="10322600-47b9-44f6-86ef-c87c87ba6e82"/>
-    <ds:schemaRef ds:uri="http://purl.org/dc/terms/"/>
-  </ds:schemaRefs>
-</ds:datastoreItem>
 </file>
--- a/slides/T319_Regressão_Linear (Parte III).pptx
+++ b/slides/T319_Regressão_Linear (Parte III).pptx
@@ -6837,8 +6837,8 @@
           </a:p>
         </p:txBody>
       </p:sp>
-      <mc:AlternateContent xmlns:mc="http://schemas.openxmlformats.org/markup-compatibility/2006">
-        <mc:Choice xmlns:a14="http://schemas.microsoft.com/office/drawing/2010/main" Requires="a14">
+      <mc:AlternateContent xmlns:mc="http://schemas.openxmlformats.org/markup-compatibility/2006" xmlns:a14="http://schemas.microsoft.com/office/drawing/2010/main">
+        <mc:Choice Requires="a14">
           <p:sp>
             <p:nvSpPr>
               <p:cNvPr id="3" name="Espaço Reservado para Conteúdo 2">
@@ -6988,7 +6988,7 @@
             </p:txBody>
           </p:sp>
         </mc:Choice>
-        <mc:Fallback>
+        <mc:Fallback xmlns="">
           <p:sp>
             <p:nvSpPr>
               <p:cNvPr id="3" name="Espaço Reservado para Conteúdo 2">
@@ -7967,8 +7967,8 @@
           </a:p>
         </p:txBody>
       </p:sp>
-      <mc:AlternateContent xmlns:mc="http://schemas.openxmlformats.org/markup-compatibility/2006">
-        <mc:Choice xmlns:a14="http://schemas.microsoft.com/office/drawing/2010/main" Requires="a14">
+      <mc:AlternateContent xmlns:mc="http://schemas.openxmlformats.org/markup-compatibility/2006" xmlns:a14="http://schemas.microsoft.com/office/drawing/2010/main">
+        <mc:Choice Requires="a14">
           <p:sp>
             <p:nvSpPr>
               <p:cNvPr id="3" name="Espaço Reservado para Conteúdo 2">
@@ -8112,7 +8112,7 @@
             </p:txBody>
           </p:sp>
         </mc:Choice>
-        <mc:Fallback>
+        <mc:Fallback xmlns="">
           <p:sp>
             <p:nvSpPr>
               <p:cNvPr id="3" name="Espaço Reservado para Conteúdo 2">
@@ -9917,8 +9917,8 @@
           </a:p>
         </p:txBody>
       </p:sp>
-      <mc:AlternateContent xmlns:mc="http://schemas.openxmlformats.org/markup-compatibility/2006">
-        <mc:Choice xmlns:a14="http://schemas.microsoft.com/office/drawing/2010/main" Requires="a14">
+      <mc:AlternateContent xmlns:mc="http://schemas.openxmlformats.org/markup-compatibility/2006" xmlns:a14="http://schemas.microsoft.com/office/drawing/2010/main">
+        <mc:Choice Requires="a14">
           <p:sp>
             <p:nvSpPr>
               <p:cNvPr id="3" name="Espaço Reservado para Conteúdo 2">
@@ -10059,7 +10059,7 @@
             </p:txBody>
           </p:sp>
         </mc:Choice>
-        <mc:Fallback>
+        <mc:Fallback xmlns="">
           <p:sp>
             <p:nvSpPr>
               <p:cNvPr id="3" name="Espaço Reservado para Conteúdo 2">
@@ -10227,8 +10227,8 @@
           </a:p>
         </p:txBody>
       </p:sp>
-      <mc:AlternateContent xmlns:mc="http://schemas.openxmlformats.org/markup-compatibility/2006">
-        <mc:Choice xmlns:a14="http://schemas.microsoft.com/office/drawing/2010/main" Requires="a14">
+      <mc:AlternateContent xmlns:mc="http://schemas.openxmlformats.org/markup-compatibility/2006" xmlns:a14="http://schemas.microsoft.com/office/drawing/2010/main">
+        <mc:Choice Requires="a14">
           <p:sp>
             <p:nvSpPr>
               <p:cNvPr id="3" name="Content Placeholder 2"/>
@@ -10374,7 +10374,7 @@
             </p:txBody>
           </p:sp>
         </mc:Choice>
-        <mc:Fallback>
+        <mc:Fallback xmlns="">
           <p:sp>
             <p:nvSpPr>
               <p:cNvPr id="3" name="Content Placeholder 2"/>
@@ -10637,14 +10637,13 @@
               <a:buChar char="§"/>
             </a:pPr>
             <a:r>
-              <a:rPr lang="pt-BR" b="1"/>
+              <a:rPr lang="pt-BR" b="1" dirty="0"/>
               <a:t>Ajuste adaptativo</a:t>
             </a:r>
             <a:r>
-              <a:rPr lang="pt-BR"/>
-              <a:t>: passos independentes</a:t>
-            </a:r>
-            <a:endParaRPr lang="pt-BR" dirty="0"/>
+              <a:rPr lang="pt-BR" dirty="0"/>
+              <a:t>: usa passos independentes</a:t>
+            </a:r>
           </a:p>
           <a:p>
             <a:pPr lvl="1">
@@ -23808,7 +23807,7 @@
                       <m:d>
                         <m:dPr>
                           <m:ctrlPr>
-                            <a:rPr lang="nl-BE" sz="1400" i="1">
+                            <a:rPr lang="en-US" sz="1400" i="1">
                               <a:latin typeface="Cambria Math" panose="02040503050406030204" pitchFamily="18" charset="0"/>
                             </a:rPr>
                           </m:ctrlPr>
@@ -25065,7 +25064,7 @@
                       <m:d>
                         <m:dPr>
                           <m:ctrlPr>
-                            <a:rPr lang="nl-BE" sz="1400" i="1">
+                            <a:rPr lang="en-US" sz="1400" i="1">
                               <a:latin typeface="Cambria Math" panose="02040503050406030204" pitchFamily="18" charset="0"/>
                             </a:rPr>
                           </m:ctrlPr>
@@ -33049,8 +33048,8 @@
           </a:p>
         </p:txBody>
       </p:sp>
-      <mc:AlternateContent xmlns:mc="http://schemas.openxmlformats.org/markup-compatibility/2006">
-        <mc:Choice xmlns:a14="http://schemas.microsoft.com/office/drawing/2010/main" Requires="a14">
+      <mc:AlternateContent xmlns:mc="http://schemas.openxmlformats.org/markup-compatibility/2006" xmlns:a14="http://schemas.microsoft.com/office/drawing/2010/main">
+        <mc:Choice Requires="a14">
           <p:sp>
             <p:nvSpPr>
               <p:cNvPr id="3" name="Espaço Reservado para Conteúdo 2">
@@ -33156,7 +33155,7 @@
             </p:txBody>
           </p:sp>
         </mc:Choice>
-        <mc:Fallback>
+        <mc:Fallback xmlns="">
           <p:sp>
             <p:nvSpPr>
               <p:cNvPr id="3" name="Espaço Reservado para Conteúdo 2">
@@ -34335,9 +34334,8 @@
                           <m:sSub>
                             <m:sSubPr>
                               <m:ctrlPr>
-                                <a:rPr lang="pt-BR" i="1">
+                                <a:rPr lang="pt-BR" b="1" i="1">
                                   <a:latin typeface="Cambria Math" panose="02040503050406030204" pitchFamily="18" charset="0"/>
-                                  <a:ea typeface="Cambria Math" panose="02040503050406030204" pitchFamily="18" charset="0"/>
                                 </a:rPr>
                               </m:ctrlPr>
                             </m:sSubPr>
@@ -35341,9 +35339,8 @@
                           <m:sSubSup>
                             <m:sSubSupPr>
                               <m:ctrlPr>
-                                <a:rPr lang="pt-BR" i="1">
+                                <a:rPr lang="pt-BR" b="1" i="1">
                                   <a:latin typeface="Cambria Math" panose="02040503050406030204" pitchFamily="18" charset="0"/>
-                                  <a:ea typeface="Cambria Math" panose="02040503050406030204" pitchFamily="18" charset="0"/>
                                 </a:rPr>
                               </m:ctrlPr>
                             </m:sSubSupPr>
@@ -38615,8 +38612,8 @@
         </p:nvSpPr>
         <p:spPr>
           <a:xfrm>
-            <a:off x="628061" y="2225495"/>
-            <a:ext cx="10935878" cy="2407010"/>
+            <a:off x="628061" y="1883388"/>
+            <a:ext cx="10935878" cy="3091224"/>
           </a:xfrm>
         </p:spPr>
         <p:txBody>
@@ -38629,11 +38626,11 @@
               <a:buNone/>
             </a:pPr>
             <a:r>
-              <a:rPr lang="pt-BR" sz="4400" b="1" i="1" dirty="0"/>
+              <a:rPr lang="pt-BR" sz="5400" b="1" i="1" dirty="0"/>
               <a:t>Portanto, como veremos, a escolha da taxa de aprendizagem é muito importante para o </a:t>
             </a:r>
             <a:r>
-              <a:rPr lang="pt-BR" sz="4400" b="1" i="1" dirty="0">
+              <a:rPr lang="pt-BR" sz="5400" b="1" i="1" dirty="0">
                 <a:solidFill>
                   <a:schemeClr val="accent2"/>
                 </a:solidFill>
@@ -38641,7 +38638,7 @@
               <a:t>aprendizado</a:t>
             </a:r>
             <a:r>
-              <a:rPr lang="pt-BR" sz="4400" b="1" i="1" dirty="0"/>
+              <a:rPr lang="pt-BR" sz="5400" b="1" i="1" dirty="0"/>
               <a:t> de um modelo de ML.</a:t>
             </a:r>
           </a:p>
@@ -38734,10 +38731,14 @@
           <a:lstStyle/>
           <a:p>
             <a:r>
+              <a:rPr lang="pt-BR" dirty="0"/>
+              <a:t>A taxa </a:t>
+            </a:r>
+            <a:r>
               <a:rPr lang="pt-BR" b="0" i="0" dirty="0">
                 <a:effectLst/>
               </a:rPr>
-              <a:t>O passo de aprendizagem é um </a:t>
+              <a:t>de aprendizagem é um </a:t>
             </a:r>
             <a:r>
               <a:rPr lang="pt-BR" b="1" i="1" dirty="0">
@@ -38983,8 +38984,8 @@
           </a:p>
         </p:txBody>
       </p:sp>
-      <mc:AlternateContent xmlns:mc="http://schemas.openxmlformats.org/markup-compatibility/2006">
-        <mc:Choice xmlns:a14="http://schemas.microsoft.com/office/drawing/2010/main" Requires="a14">
+      <mc:AlternateContent xmlns:mc="http://schemas.openxmlformats.org/markup-compatibility/2006" xmlns:a14="http://schemas.microsoft.com/office/drawing/2010/main">
+        <mc:Choice Requires="a14">
           <p:sp>
             <p:nvSpPr>
               <p:cNvPr id="3" name="Espaço Reservado para Conteúdo 2">
@@ -39102,7 +39103,7 @@
             </p:txBody>
           </p:sp>
         </mc:Choice>
-        <mc:Fallback>
+        <mc:Fallback xmlns="">
           <p:sp>
             <p:nvSpPr>
               <p:cNvPr id="3" name="Espaço Reservado para Conteúdo 2">
@@ -40159,8 +40160,8 @@
           </a:p>
         </p:txBody>
       </p:sp>
-      <mc:AlternateContent xmlns:mc="http://schemas.openxmlformats.org/markup-compatibility/2006">
-        <mc:Choice xmlns:a14="http://schemas.microsoft.com/office/drawing/2010/main" Requires="a14">
+      <mc:AlternateContent xmlns:mc="http://schemas.openxmlformats.org/markup-compatibility/2006" xmlns:a14="http://schemas.microsoft.com/office/drawing/2010/main">
+        <mc:Choice Requires="a14">
           <p:sp>
             <p:nvSpPr>
               <p:cNvPr id="3" name="Espaço Reservado para Conteúdo 2">
@@ -40307,7 +40308,7 @@
             </p:txBody>
           </p:sp>
         </mc:Choice>
-        <mc:Fallback>
+        <mc:Fallback xmlns="">
           <p:sp>
             <p:nvSpPr>
               <p:cNvPr id="3" name="Espaço Reservado para Conteúdo 2">
@@ -41140,15 +41141,6 @@
 </file>
 
 <file path=customXml/item1.xml><?xml version="1.0" encoding="utf-8"?>
-<?mso-contentType ?>
-<FormTemplates xmlns="http://schemas.microsoft.com/sharepoint/v3/contenttype/forms">
-  <Display>DocumentLibraryForm</Display>
-  <Edit>DocumentLibraryForm</Edit>
-  <New>DocumentLibraryForm</New>
-</FormTemplates>
-</file>
-
-<file path=customXml/item2.xml><?xml version="1.0" encoding="utf-8"?>
 <p:properties xmlns:p="http://schemas.microsoft.com/office/2006/metadata/properties" xmlns:xsi="http://www.w3.org/2001/XMLSchema-instance" xmlns:pc="http://schemas.microsoft.com/office/infopath/2007/PartnerControls">
   <documentManagement>
     <_activity xmlns="10322600-47b9-44f6-86ef-c87c87ba6e82" xsi:nil="true"/>
@@ -41156,7 +41148,7 @@
 </p:properties>
 </file>
 
-<file path=customXml/item3.xml><?xml version="1.0" encoding="utf-8"?>
+<file path=customXml/item2.xml><?xml version="1.0" encoding="utf-8"?>
 <ct:contentTypeSchema xmlns:ct="http://schemas.microsoft.com/office/2006/metadata/contentType" xmlns:ma="http://schemas.microsoft.com/office/2006/metadata/properties/metaAttributes" ct:_="" ma:_="" ma:contentTypeName="Document" ma:contentTypeID="0x010100A6553FE09A98904B92A9D00A38127206" ma:contentTypeVersion="18" ma:contentTypeDescription="Create a new document." ma:contentTypeScope="" ma:versionID="92863cfdd2d5fd2ee9b6f30d8c51b1f5">
   <xsd:schema xmlns:xsd="http://www.w3.org/2001/XMLSchema" xmlns:xs="http://www.w3.org/2001/XMLSchema" xmlns:p="http://schemas.microsoft.com/office/2006/metadata/properties" xmlns:ns3="10322600-47b9-44f6-86ef-c87c87ba6e82" xmlns:ns4="026c264a-64f6-48aa-bde0-8bf9e5064f89" targetNamespace="http://schemas.microsoft.com/office/2006/metadata/properties" ma:root="true" ma:fieldsID="86148dd4b4cd32a5258cd233a95bdcf5" ns3:_="" ns4:_="">
     <xsd:import namespace="10322600-47b9-44f6-86ef-c87c87ba6e82"/>
@@ -41409,15 +41401,16 @@
 </ct:contentTypeSchema>
 </file>
 
-<file path=customXml/itemProps1.xml><?xml version="1.0" encoding="utf-8"?>
-<ds:datastoreItem xmlns:ds="http://schemas.openxmlformats.org/officeDocument/2006/customXml" ds:itemID="{CF4A17E5-ECCE-48A8-A291-06961455A1A6}">
-  <ds:schemaRefs>
-    <ds:schemaRef ds:uri="http://schemas.microsoft.com/sharepoint/v3/contenttype/forms"/>
-  </ds:schemaRefs>
-</ds:datastoreItem>
+<file path=customXml/item3.xml><?xml version="1.0" encoding="utf-8"?>
+<?mso-contentType ?>
+<FormTemplates xmlns="http://schemas.microsoft.com/sharepoint/v3/contenttype/forms">
+  <Display>DocumentLibraryForm</Display>
+  <Edit>DocumentLibraryForm</Edit>
+  <New>DocumentLibraryForm</New>
+</FormTemplates>
 </file>
 
-<file path=customXml/itemProps2.xml><?xml version="1.0" encoding="utf-8"?>
+<file path=customXml/itemProps1.xml><?xml version="1.0" encoding="utf-8"?>
 <ds:datastoreItem xmlns:ds="http://schemas.openxmlformats.org/officeDocument/2006/customXml" ds:itemID="{C4421A6D-F900-459F-9179-A64A47727DAC}">
   <ds:schemaRefs>
     <ds:schemaRef ds:uri="http://schemas.microsoft.com/office/2006/documentManagement/types"/>
@@ -41434,7 +41427,7 @@
 </ds:datastoreItem>
 </file>
 
-<file path=customXml/itemProps3.xml><?xml version="1.0" encoding="utf-8"?>
+<file path=customXml/itemProps2.xml><?xml version="1.0" encoding="utf-8"?>
 <ds:datastoreItem xmlns:ds="http://schemas.openxmlformats.org/officeDocument/2006/customXml" ds:itemID="{E765951F-25BB-44C2-B87A-A88FE1B68A23}">
   <ds:schemaRefs>
     <ds:schemaRef ds:uri="http://schemas.microsoft.com/office/2006/metadata/contentType"/>
@@ -41451,4 +41444,12 @@
     <ds:schemaRef ds:uri="http://schemas.microsoft.com/internal/obd"/>
   </ds:schemaRefs>
 </ds:datastoreItem>
+</file>
+
+<file path=customXml/itemProps3.xml><?xml version="1.0" encoding="utf-8"?>
+<ds:datastoreItem xmlns:ds="http://schemas.openxmlformats.org/officeDocument/2006/customXml" ds:itemID="{CF4A17E5-ECCE-48A8-A291-06961455A1A6}">
+  <ds:schemaRefs>
+    <ds:schemaRef ds:uri="http://schemas.microsoft.com/sharepoint/v3/contenttype/forms"/>
+  </ds:schemaRefs>
+</ds:datastoreItem>
 </file>
--- a/slides/T319_Regressão_Linear (Parte III).pptx
+++ b/slides/T319_Regressão_Linear (Parte III).pptx
@@ -239,7 +239,7 @@
           <a:p>
             <a:fld id="{DAF0AF11-6A8A-4E64-94F5-26D4FBA2A01D}" type="datetimeFigureOut">
               <a:rPr lang="nl-BE" smtClean="0"/>
-              <a:t>25/09/2026</a:t>
+              <a:t>9/10/2026</a:t>
             </a:fld>
             <a:endParaRPr lang="nl-BE"/>
           </a:p>
@@ -610,6 +610,109 @@
       </p:grpSpPr>
       <p:sp>
         <p:nvSpPr>
+          <p:cNvPr id="2" name="Espaço Reservado para Imagem de Slide 1"/>
+          <p:cNvSpPr>
+            <a:spLocks noGrp="1" noRot="1" noChangeAspect="1"/>
+          </p:cNvSpPr>
+          <p:nvPr>
+            <p:ph type="sldImg"/>
+          </p:nvPr>
+        </p:nvSpPr>
+        <p:spPr/>
+      </p:sp>
+      <p:sp>
+        <p:nvSpPr>
+          <p:cNvPr id="3" name="Espaço Reservado para Anotações 2"/>
+          <p:cNvSpPr>
+            <a:spLocks noGrp="1"/>
+          </p:cNvSpPr>
+          <p:nvPr>
+            <p:ph type="body" idx="1"/>
+          </p:nvPr>
+        </p:nvSpPr>
+        <p:spPr/>
+        <p:txBody>
+          <a:bodyPr/>
+          <a:lstStyle/>
+          <a:p>
+            <a:r>
+              <a:rPr lang="pt-BR" dirty="0"/>
+              <a:t>O termo momento faz uma média temporal dos vetores gradientes passados.</a:t>
+            </a:r>
+          </a:p>
+          <a:p>
+            <a:r>
+              <a:rPr lang="pt-BR" dirty="0"/>
+              <a:t>Pode ser entendido como o batelada, mas só que temporalmente.</a:t>
+            </a:r>
+          </a:p>
+          <a:p>
+            <a:endParaRPr lang="pt-BR" dirty="0"/>
+          </a:p>
+          <a:p>
+            <a:r>
+              <a:rPr lang="pt-BR" dirty="0"/>
+              <a:t>O termo momento adiciona a média móvel exponencialmente decrescente das estimativas anteriores do gradiente.</a:t>
+            </a:r>
+            <a:endParaRPr lang="en-US" dirty="0"/>
+          </a:p>
+        </p:txBody>
+      </p:sp>
+      <p:sp>
+        <p:nvSpPr>
+          <p:cNvPr id="4" name="Espaço Reservado para Número de Slide 3"/>
+          <p:cNvSpPr>
+            <a:spLocks noGrp="1"/>
+          </p:cNvSpPr>
+          <p:nvPr>
+            <p:ph type="sldNum" sz="quarter" idx="5"/>
+          </p:nvPr>
+        </p:nvSpPr>
+        <p:spPr/>
+        <p:txBody>
+          <a:bodyPr/>
+          <a:lstStyle/>
+          <a:p>
+            <a:fld id="{DA8B99DF-01BC-492A-8CEF-4FD88D18DD9D}" type="slidenum">
+              <a:rPr lang="nl-BE" smtClean="0"/>
+              <a:t>23</a:t>
+            </a:fld>
+            <a:endParaRPr lang="nl-BE"/>
+          </a:p>
+        </p:txBody>
+      </p:sp>
+    </p:spTree>
+    <p:extLst>
+      <p:ext uri="{BB962C8B-B14F-4D97-AF65-F5344CB8AC3E}">
+        <p14:creationId xmlns:p14="http://schemas.microsoft.com/office/powerpoint/2010/main" val="614601543"/>
+      </p:ext>
+    </p:extLst>
+  </p:cSld>
+  <p:clrMapOvr>
+    <a:masterClrMapping/>
+  </p:clrMapOvr>
+</p:notes>
+</file>
+
+<file path=ppt/notesSlides/notesSlide11.xml><?xml version="1.0" encoding="utf-8"?>
+<p:notes xmlns:a="http://schemas.openxmlformats.org/drawingml/2006/main" xmlns:r="http://schemas.openxmlformats.org/officeDocument/2006/relationships" xmlns:p="http://schemas.openxmlformats.org/presentationml/2006/main">
+  <p:cSld>
+    <p:spTree>
+      <p:nvGrpSpPr>
+        <p:cNvPr id="1" name=""/>
+        <p:cNvGrpSpPr/>
+        <p:nvPr/>
+      </p:nvGrpSpPr>
+      <p:grpSpPr>
+        <a:xfrm>
+          <a:off x="0" y="0"/>
+          <a:ext cx="0" cy="0"/>
+          <a:chOff x="0" y="0"/>
+          <a:chExt cx="0" cy="0"/>
+        </a:xfrm>
+      </p:grpSpPr>
+      <p:sp>
+        <p:nvSpPr>
           <p:cNvPr id="2" name="Slide Image Placeholder 1"/>
           <p:cNvSpPr>
             <a:spLocks noGrp="1" noRot="1" noChangeAspect="1"/>
@@ -721,300 +824,6 @@
     <p:extLst>
       <p:ext uri="{BB962C8B-B14F-4D97-AF65-F5344CB8AC3E}">
         <p14:creationId xmlns:p14="http://schemas.microsoft.com/office/powerpoint/2010/main" val="1553186560"/>
-      </p:ext>
-    </p:extLst>
-  </p:cSld>
-  <p:clrMapOvr>
-    <a:masterClrMapping/>
-  </p:clrMapOvr>
-</p:notes>
-</file>
-
-<file path=ppt/notesSlides/notesSlide11.xml><?xml version="1.0" encoding="utf-8"?>
-<p:notes xmlns:a="http://schemas.openxmlformats.org/drawingml/2006/main" xmlns:r="http://schemas.openxmlformats.org/officeDocument/2006/relationships" xmlns:p="http://schemas.openxmlformats.org/presentationml/2006/main">
-  <p:cSld>
-    <p:spTree>
-      <p:nvGrpSpPr>
-        <p:cNvPr id="1" name=""/>
-        <p:cNvGrpSpPr/>
-        <p:nvPr/>
-      </p:nvGrpSpPr>
-      <p:grpSpPr>
-        <a:xfrm>
-          <a:off x="0" y="0"/>
-          <a:ext cx="0" cy="0"/>
-          <a:chOff x="0" y="0"/>
-          <a:chExt cx="0" cy="0"/>
-        </a:xfrm>
-      </p:grpSpPr>
-      <p:sp>
-        <p:nvSpPr>
-          <p:cNvPr id="2" name="Espaço Reservado para Imagem de Slide 1"/>
-          <p:cNvSpPr>
-            <a:spLocks noGrp="1" noRot="1" noChangeAspect="1"/>
-          </p:cNvSpPr>
-          <p:nvPr>
-            <p:ph type="sldImg"/>
-          </p:nvPr>
-        </p:nvSpPr>
-        <p:spPr/>
-      </p:sp>
-      <p:sp>
-        <p:nvSpPr>
-          <p:cNvPr id="3" name="Espaço Reservado para Anotações 2"/>
-          <p:cNvSpPr>
-            <a:spLocks noGrp="1"/>
-          </p:cNvSpPr>
-          <p:nvPr>
-            <p:ph type="body" idx="1"/>
-          </p:nvPr>
-        </p:nvSpPr>
-        <p:spPr/>
-        <p:txBody>
-          <a:bodyPr/>
-          <a:lstStyle/>
-          <a:p>
-            <a:pPr marL="0" marR="0" lvl="0" indent="0" algn="l" defTabSz="914400" rtl="0" eaLnBrk="1" fontAlgn="auto" latinLnBrk="0" hangingPunct="1">
-              <a:lnSpc>
-                <a:spcPct val="100000"/>
-              </a:lnSpc>
-              <a:spcBef>
-                <a:spcPts val="0"/>
-              </a:spcBef>
-              <a:spcAft>
-                <a:spcPts val="0"/>
-              </a:spcAft>
-              <a:buClrTx/>
-              <a:buSzTx/>
-              <a:buFontTx/>
-              <a:buNone/>
-              <a:tabLst/>
-              <a:defRPr/>
-            </a:pPr>
-            <a:r>
-              <a:rPr lang="pt-BR" b="1" dirty="0"/>
-              <a:t>Exemplo</a:t>
-            </a:r>
-            <a:r>
-              <a:rPr lang="pt-BR" dirty="0"/>
-              <a:t>:</a:t>
-            </a:r>
-            <a:r>
-              <a:rPr lang="pt-BR" baseline="0" dirty="0"/>
-              <a:t> </a:t>
-            </a:r>
-            <a:r>
-              <a:rPr lang="pt-BR" dirty="0"/>
-              <a:t>https://colab.research.google.com/</a:t>
-            </a:r>
-            <a:r>
-              <a:rPr lang="pt-BR" dirty="0" err="1"/>
-              <a:t>github</a:t>
-            </a:r>
-            <a:r>
-              <a:rPr lang="pt-BR" dirty="0"/>
-              <a:t>/zz4fap/t319_aprendizado_de_maquina/</a:t>
-            </a:r>
-            <a:r>
-              <a:rPr lang="pt-BR" dirty="0" err="1"/>
-              <a:t>blob</a:t>
-            </a:r>
-            <a:r>
-              <a:rPr lang="pt-BR" dirty="0"/>
-              <a:t>/</a:t>
-            </a:r>
-            <a:r>
-              <a:rPr lang="pt-BR" dirty="0" err="1"/>
-              <a:t>main</a:t>
-            </a:r>
-            <a:r>
-              <a:rPr lang="pt-BR" dirty="0"/>
-              <a:t>/notebooks/</a:t>
-            </a:r>
-            <a:r>
-              <a:rPr lang="pt-BR" dirty="0" err="1"/>
-              <a:t>regression</a:t>
-            </a:r>
-            <a:r>
-              <a:rPr lang="pt-BR" dirty="0"/>
-              <a:t>/</a:t>
-            </a:r>
-            <a:r>
-              <a:rPr lang="pt-BR" dirty="0" err="1"/>
-              <a:t>gd_versions</a:t>
-            </a:r>
-            <a:r>
-              <a:rPr lang="pt-BR" dirty="0"/>
-              <a:t>/</a:t>
-            </a:r>
-            <a:r>
-              <a:rPr lang="pt-BR" dirty="0" err="1"/>
-              <a:t>gde_com_redução_gradual.ipynb</a:t>
-            </a:r>
-            <a:endParaRPr lang="pt-BR" dirty="0"/>
-          </a:p>
-          <a:p>
-            <a:endParaRPr lang="pt-BR" sz="1200" baseline="0" dirty="0"/>
-          </a:p>
-          <a:p>
-            <a:r>
-              <a:rPr lang="pt-BR" sz="1200" baseline="0" dirty="0"/>
-              <a:t>Os passos começam com grandes valores (o que ajuda a progredir rapidamente e a escapar de mínimos locais, casos em que a superfície de erro seja bastante irregular) e depois diminuem cada vez mais, permitindo que o algoritmo se estabilize no mínimo global.</a:t>
-            </a:r>
-          </a:p>
-          <a:p>
-            <a:endParaRPr lang="pt-BR" sz="1200" baseline="0" dirty="0"/>
-          </a:p>
-          <a:p>
-            <a:r>
-              <a:rPr lang="pt-BR" dirty="0"/>
-              <a:t>Se a taxa de aprendizagem for reduzida muito rapidamente, o algoritmo poderá ficar preso no mínimo local ou até ficar</a:t>
-            </a:r>
-            <a:r>
-              <a:rPr lang="pt-BR" baseline="0" dirty="0"/>
-              <a:t> travado antes de chegar ao mínimo</a:t>
-            </a:r>
-            <a:r>
-              <a:rPr lang="pt-BR" dirty="0"/>
-              <a:t>. Se a taxa de aprendizado for reduzida muito lentamente, o algoritmo poderá oscilar ao</a:t>
-            </a:r>
-            <a:r>
-              <a:rPr lang="pt-BR" baseline="0" dirty="0"/>
-              <a:t> redor do</a:t>
-            </a:r>
-            <a:r>
-              <a:rPr lang="pt-BR" dirty="0"/>
-              <a:t> mínimo por um longo tempo e acabar com uma solução não ótima (</a:t>
-            </a:r>
-            <a:r>
-              <a:rPr lang="pt-BR" dirty="0" err="1"/>
-              <a:t>sub-ótima</a:t>
-            </a:r>
-            <a:r>
-              <a:rPr lang="pt-BR" dirty="0"/>
-              <a:t>) caso o treinamento se encerre muito cedo.</a:t>
-            </a:r>
-          </a:p>
-          <a:p>
-            <a:endParaRPr lang="pt-BR" dirty="0"/>
-          </a:p>
-          <a:p>
-            <a:r>
-              <a:rPr lang="pt-BR" b="1" dirty="0"/>
-              <a:t>Alguns tipos de esquema para ajuste do passo de aprendizagem são:</a:t>
-            </a:r>
-          </a:p>
-          <a:p>
-            <a:pPr marL="171450" indent="-171450">
-              <a:buFont typeface="Arial" panose="020B0604020202020204" pitchFamily="34" charset="0"/>
-              <a:buChar char="•"/>
-            </a:pPr>
-            <a:r>
-              <a:rPr lang="pt-BR" b="1" dirty="0"/>
-              <a:t>Decaimento por etapas ou degraus</a:t>
-            </a:r>
-            <a:r>
-              <a:rPr lang="pt-BR" dirty="0"/>
-              <a:t>: reduz a taxa de aprendizado de algum fator a cada número pré-definido de iterações ou épocas. Os valores típicos são utilizados para reduzir a taxa de aprendizado pela metade a cada número pré-definido de épocas. Esses números dependem muito do tipo de problema e do modelo. Uma heurística que você pode ver na prática é observar o erro de validação durante o treinamento com uma taxa de aprendizado fixa e reduzir a taxa de aprendizado em uma constante (por exemplo, 0,5) sempre que o erro de validação parar de decrescer.</a:t>
-            </a:r>
-          </a:p>
-          <a:p>
-            <a:pPr marL="171450" indent="-171450">
-              <a:buFont typeface="Arial" panose="020B0604020202020204" pitchFamily="34" charset="0"/>
-              <a:buChar char="•"/>
-            </a:pPr>
-            <a:r>
-              <a:rPr lang="pt-BR" b="1" dirty="0"/>
-              <a:t>Decaimento exponencial</a:t>
-            </a:r>
-            <a:r>
-              <a:rPr lang="pt-BR" dirty="0"/>
-              <a:t>: tem a forma matemática α = α0 e^(-</a:t>
-            </a:r>
-            <a:r>
-              <a:rPr lang="pt-BR" dirty="0" err="1"/>
-              <a:t>kt</a:t>
-            </a:r>
-            <a:r>
-              <a:rPr lang="pt-BR" dirty="0"/>
-              <a:t>), onde α0, k são hiperparâmetros e t é o número da iteração (mas você também pode usar o número de épocas).</a:t>
-            </a:r>
-          </a:p>
-          <a:p>
-            <a:pPr marL="171450" indent="-171450">
-              <a:buFont typeface="Arial" panose="020B0604020202020204" pitchFamily="34" charset="0"/>
-              <a:buChar char="•"/>
-            </a:pPr>
-            <a:r>
-              <a:rPr lang="pt-BR" b="1" dirty="0"/>
-              <a:t>Decaimento temporal</a:t>
-            </a:r>
-            <a:r>
-              <a:rPr lang="pt-BR" dirty="0"/>
-              <a:t>: tem a forma matemática α = α0 / (1 + </a:t>
-            </a:r>
-            <a:r>
-              <a:rPr lang="pt-BR" dirty="0" err="1"/>
-              <a:t>kt</a:t>
-            </a:r>
-            <a:r>
-              <a:rPr lang="pt-BR" dirty="0"/>
-              <a:t>), onde a0, k são hiperparâmetros e t é o número da iteração.</a:t>
-            </a:r>
-          </a:p>
-          <a:p>
-            <a:pPr marL="171450" indent="-171450">
-              <a:buFont typeface="Arial" panose="020B0604020202020204" pitchFamily="34" charset="0"/>
-              <a:buChar char="•"/>
-            </a:pPr>
-            <a:endParaRPr lang="pt-BR" dirty="0"/>
-          </a:p>
-          <a:p>
-            <a:pPr marL="0" indent="0">
-              <a:buFont typeface="Arial" panose="020B0604020202020204" pitchFamily="34" charset="0"/>
-              <a:buNone/>
-            </a:pPr>
-            <a:r>
-              <a:rPr lang="pt-BR" b="1" dirty="0"/>
-              <a:t>Exemplo</a:t>
-            </a:r>
-            <a:r>
-              <a:rPr lang="pt-BR" dirty="0"/>
-              <a:t>: stocastic_gradient_descent_with_learning_schedule_and_with_figures.ipynb</a:t>
-            </a:r>
-          </a:p>
-          <a:p>
-            <a:endParaRPr lang="pt-BR" dirty="0"/>
-          </a:p>
-        </p:txBody>
-      </p:sp>
-      <p:sp>
-        <p:nvSpPr>
-          <p:cNvPr id="4" name="Espaço Reservado para Número de Slide 3"/>
-          <p:cNvSpPr>
-            <a:spLocks noGrp="1"/>
-          </p:cNvSpPr>
-          <p:nvPr>
-            <p:ph type="sldNum" sz="quarter" idx="5"/>
-          </p:nvPr>
-        </p:nvSpPr>
-        <p:spPr/>
-        <p:txBody>
-          <a:bodyPr/>
-          <a:lstStyle/>
-          <a:p>
-            <a:fld id="{DA8B99DF-01BC-492A-8CEF-4FD88D18DD9D}" type="slidenum">
-              <a:rPr lang="nl-BE" smtClean="0"/>
-              <a:t>25</a:t>
-            </a:fld>
-            <a:endParaRPr lang="nl-BE"/>
-          </a:p>
-        </p:txBody>
-      </p:sp>
-    </p:spTree>
-    <p:extLst>
-      <p:ext uri="{BB962C8B-B14F-4D97-AF65-F5344CB8AC3E}">
-        <p14:creationId xmlns:p14="http://schemas.microsoft.com/office/powerpoint/2010/main" val="626906048"/>
       </p:ext>
     </p:extLst>
   </p:cSld>
@@ -1299,7 +1108,7 @@
           <a:p>
             <a:fld id="{DA8B99DF-01BC-492A-8CEF-4FD88D18DD9D}" type="slidenum">
               <a:rPr lang="nl-BE" smtClean="0"/>
-              <a:t>26</a:t>
+              <a:t>25</a:t>
             </a:fld>
             <a:endParaRPr lang="nl-BE"/>
           </a:p>
@@ -1308,7 +1117,7 @@
     </p:spTree>
     <p:extLst>
       <p:ext uri="{BB962C8B-B14F-4D97-AF65-F5344CB8AC3E}">
-        <p14:creationId xmlns:p14="http://schemas.microsoft.com/office/powerpoint/2010/main" val="3245870633"/>
+        <p14:creationId xmlns:p14="http://schemas.microsoft.com/office/powerpoint/2010/main" val="626906048"/>
       </p:ext>
     </p:extLst>
   </p:cSld>
@@ -1593,6 +1402,300 @@
           <a:p>
             <a:fld id="{DA8B99DF-01BC-492A-8CEF-4FD88D18DD9D}" type="slidenum">
               <a:rPr lang="nl-BE" smtClean="0"/>
+              <a:t>26</a:t>
+            </a:fld>
+            <a:endParaRPr lang="nl-BE"/>
+          </a:p>
+        </p:txBody>
+      </p:sp>
+    </p:spTree>
+    <p:extLst>
+      <p:ext uri="{BB962C8B-B14F-4D97-AF65-F5344CB8AC3E}">
+        <p14:creationId xmlns:p14="http://schemas.microsoft.com/office/powerpoint/2010/main" val="3245870633"/>
+      </p:ext>
+    </p:extLst>
+  </p:cSld>
+  <p:clrMapOvr>
+    <a:masterClrMapping/>
+  </p:clrMapOvr>
+</p:notes>
+</file>
+
+<file path=ppt/notesSlides/notesSlide14.xml><?xml version="1.0" encoding="utf-8"?>
+<p:notes xmlns:a="http://schemas.openxmlformats.org/drawingml/2006/main" xmlns:r="http://schemas.openxmlformats.org/officeDocument/2006/relationships" xmlns:p="http://schemas.openxmlformats.org/presentationml/2006/main">
+  <p:cSld>
+    <p:spTree>
+      <p:nvGrpSpPr>
+        <p:cNvPr id="1" name=""/>
+        <p:cNvGrpSpPr/>
+        <p:nvPr/>
+      </p:nvGrpSpPr>
+      <p:grpSpPr>
+        <a:xfrm>
+          <a:off x="0" y="0"/>
+          <a:ext cx="0" cy="0"/>
+          <a:chOff x="0" y="0"/>
+          <a:chExt cx="0" cy="0"/>
+        </a:xfrm>
+      </p:grpSpPr>
+      <p:sp>
+        <p:nvSpPr>
+          <p:cNvPr id="2" name="Espaço Reservado para Imagem de Slide 1"/>
+          <p:cNvSpPr>
+            <a:spLocks noGrp="1" noRot="1" noChangeAspect="1"/>
+          </p:cNvSpPr>
+          <p:nvPr>
+            <p:ph type="sldImg"/>
+          </p:nvPr>
+        </p:nvSpPr>
+        <p:spPr/>
+      </p:sp>
+      <p:sp>
+        <p:nvSpPr>
+          <p:cNvPr id="3" name="Espaço Reservado para Anotações 2"/>
+          <p:cNvSpPr>
+            <a:spLocks noGrp="1"/>
+          </p:cNvSpPr>
+          <p:nvPr>
+            <p:ph type="body" idx="1"/>
+          </p:nvPr>
+        </p:nvSpPr>
+        <p:spPr/>
+        <p:txBody>
+          <a:bodyPr/>
+          <a:lstStyle/>
+          <a:p>
+            <a:pPr marL="0" marR="0" lvl="0" indent="0" algn="l" defTabSz="914400" rtl="0" eaLnBrk="1" fontAlgn="auto" latinLnBrk="0" hangingPunct="1">
+              <a:lnSpc>
+                <a:spcPct val="100000"/>
+              </a:lnSpc>
+              <a:spcBef>
+                <a:spcPts val="0"/>
+              </a:spcBef>
+              <a:spcAft>
+                <a:spcPts val="0"/>
+              </a:spcAft>
+              <a:buClrTx/>
+              <a:buSzTx/>
+              <a:buFontTx/>
+              <a:buNone/>
+              <a:tabLst/>
+              <a:defRPr/>
+            </a:pPr>
+            <a:r>
+              <a:rPr lang="pt-BR" b="1" dirty="0"/>
+              <a:t>Exemplo</a:t>
+            </a:r>
+            <a:r>
+              <a:rPr lang="pt-BR" dirty="0"/>
+              <a:t>:</a:t>
+            </a:r>
+            <a:r>
+              <a:rPr lang="pt-BR" baseline="0" dirty="0"/>
+              <a:t> </a:t>
+            </a:r>
+            <a:r>
+              <a:rPr lang="pt-BR" dirty="0"/>
+              <a:t>https://colab.research.google.com/</a:t>
+            </a:r>
+            <a:r>
+              <a:rPr lang="pt-BR" dirty="0" err="1"/>
+              <a:t>github</a:t>
+            </a:r>
+            <a:r>
+              <a:rPr lang="pt-BR" dirty="0"/>
+              <a:t>/zz4fap/t319_aprendizado_de_maquina/</a:t>
+            </a:r>
+            <a:r>
+              <a:rPr lang="pt-BR" dirty="0" err="1"/>
+              <a:t>blob</a:t>
+            </a:r>
+            <a:r>
+              <a:rPr lang="pt-BR" dirty="0"/>
+              <a:t>/</a:t>
+            </a:r>
+            <a:r>
+              <a:rPr lang="pt-BR" dirty="0" err="1"/>
+              <a:t>main</a:t>
+            </a:r>
+            <a:r>
+              <a:rPr lang="pt-BR" dirty="0"/>
+              <a:t>/notebooks/</a:t>
+            </a:r>
+            <a:r>
+              <a:rPr lang="pt-BR" dirty="0" err="1"/>
+              <a:t>regression</a:t>
+            </a:r>
+            <a:r>
+              <a:rPr lang="pt-BR" dirty="0"/>
+              <a:t>/</a:t>
+            </a:r>
+            <a:r>
+              <a:rPr lang="pt-BR" dirty="0" err="1"/>
+              <a:t>gd_versions</a:t>
+            </a:r>
+            <a:r>
+              <a:rPr lang="pt-BR" dirty="0"/>
+              <a:t>/</a:t>
+            </a:r>
+            <a:r>
+              <a:rPr lang="pt-BR" dirty="0" err="1"/>
+              <a:t>gde_com_redução_gradual.ipynb</a:t>
+            </a:r>
+            <a:endParaRPr lang="pt-BR" dirty="0"/>
+          </a:p>
+          <a:p>
+            <a:endParaRPr lang="pt-BR" sz="1200" baseline="0" dirty="0"/>
+          </a:p>
+          <a:p>
+            <a:r>
+              <a:rPr lang="pt-BR" sz="1200" baseline="0" dirty="0"/>
+              <a:t>Os passos começam com grandes valores (o que ajuda a progredir rapidamente e a escapar de mínimos locais, casos em que a superfície de erro seja bastante irregular) e depois diminuem cada vez mais, permitindo que o algoritmo se estabilize no mínimo global.</a:t>
+            </a:r>
+          </a:p>
+          <a:p>
+            <a:endParaRPr lang="pt-BR" sz="1200" baseline="0" dirty="0"/>
+          </a:p>
+          <a:p>
+            <a:r>
+              <a:rPr lang="pt-BR" dirty="0"/>
+              <a:t>Se a taxa de aprendizagem for reduzida muito rapidamente, o algoritmo poderá ficar preso no mínimo local ou até ficar</a:t>
+            </a:r>
+            <a:r>
+              <a:rPr lang="pt-BR" baseline="0" dirty="0"/>
+              <a:t> travado antes de chegar ao mínimo</a:t>
+            </a:r>
+            <a:r>
+              <a:rPr lang="pt-BR" dirty="0"/>
+              <a:t>. Se a taxa de aprendizado for reduzida muito lentamente, o algoritmo poderá oscilar ao</a:t>
+            </a:r>
+            <a:r>
+              <a:rPr lang="pt-BR" baseline="0" dirty="0"/>
+              <a:t> redor do</a:t>
+            </a:r>
+            <a:r>
+              <a:rPr lang="pt-BR" dirty="0"/>
+              <a:t> mínimo por um longo tempo e acabar com uma solução não ótima (</a:t>
+            </a:r>
+            <a:r>
+              <a:rPr lang="pt-BR" dirty="0" err="1"/>
+              <a:t>sub-ótima</a:t>
+            </a:r>
+            <a:r>
+              <a:rPr lang="pt-BR" dirty="0"/>
+              <a:t>) caso o treinamento se encerre muito cedo.</a:t>
+            </a:r>
+          </a:p>
+          <a:p>
+            <a:endParaRPr lang="pt-BR" dirty="0"/>
+          </a:p>
+          <a:p>
+            <a:r>
+              <a:rPr lang="pt-BR" b="1" dirty="0"/>
+              <a:t>Alguns tipos de esquema para ajuste do passo de aprendizagem são:</a:t>
+            </a:r>
+          </a:p>
+          <a:p>
+            <a:pPr marL="171450" indent="-171450">
+              <a:buFont typeface="Arial" panose="020B0604020202020204" pitchFamily="34" charset="0"/>
+              <a:buChar char="•"/>
+            </a:pPr>
+            <a:r>
+              <a:rPr lang="pt-BR" b="1" dirty="0"/>
+              <a:t>Decaimento por etapas ou degraus</a:t>
+            </a:r>
+            <a:r>
+              <a:rPr lang="pt-BR" dirty="0"/>
+              <a:t>: reduz a taxa de aprendizado de algum fator a cada número pré-definido de iterações ou épocas. Os valores típicos são utilizados para reduzir a taxa de aprendizado pela metade a cada número pré-definido de épocas. Esses números dependem muito do tipo de problema e do modelo. Uma heurística que você pode ver na prática é observar o erro de validação durante o treinamento com uma taxa de aprendizado fixa e reduzir a taxa de aprendizado em uma constante (por exemplo, 0,5) sempre que o erro de validação parar de decrescer.</a:t>
+            </a:r>
+          </a:p>
+          <a:p>
+            <a:pPr marL="171450" indent="-171450">
+              <a:buFont typeface="Arial" panose="020B0604020202020204" pitchFamily="34" charset="0"/>
+              <a:buChar char="•"/>
+            </a:pPr>
+            <a:r>
+              <a:rPr lang="pt-BR" b="1" dirty="0"/>
+              <a:t>Decaimento exponencial</a:t>
+            </a:r>
+            <a:r>
+              <a:rPr lang="pt-BR" dirty="0"/>
+              <a:t>: tem a forma matemática α = α0 e^(-</a:t>
+            </a:r>
+            <a:r>
+              <a:rPr lang="pt-BR" dirty="0" err="1"/>
+              <a:t>kt</a:t>
+            </a:r>
+            <a:r>
+              <a:rPr lang="pt-BR" dirty="0"/>
+              <a:t>), onde α0, k são hiperparâmetros e t é o número da iteração (mas você também pode usar o número de épocas).</a:t>
+            </a:r>
+          </a:p>
+          <a:p>
+            <a:pPr marL="171450" indent="-171450">
+              <a:buFont typeface="Arial" panose="020B0604020202020204" pitchFamily="34" charset="0"/>
+              <a:buChar char="•"/>
+            </a:pPr>
+            <a:r>
+              <a:rPr lang="pt-BR" b="1" dirty="0"/>
+              <a:t>Decaimento temporal</a:t>
+            </a:r>
+            <a:r>
+              <a:rPr lang="pt-BR" dirty="0"/>
+              <a:t>: tem a forma matemática α = α0 / (1 + </a:t>
+            </a:r>
+            <a:r>
+              <a:rPr lang="pt-BR" dirty="0" err="1"/>
+              <a:t>kt</a:t>
+            </a:r>
+            <a:r>
+              <a:rPr lang="pt-BR" dirty="0"/>
+              <a:t>), onde a0, k são hiperparâmetros e t é o número da iteração.</a:t>
+            </a:r>
+          </a:p>
+          <a:p>
+            <a:pPr marL="171450" indent="-171450">
+              <a:buFont typeface="Arial" panose="020B0604020202020204" pitchFamily="34" charset="0"/>
+              <a:buChar char="•"/>
+            </a:pPr>
+            <a:endParaRPr lang="pt-BR" dirty="0"/>
+          </a:p>
+          <a:p>
+            <a:pPr marL="0" indent="0">
+              <a:buFont typeface="Arial" panose="020B0604020202020204" pitchFamily="34" charset="0"/>
+              <a:buNone/>
+            </a:pPr>
+            <a:r>
+              <a:rPr lang="pt-BR" b="1" dirty="0"/>
+              <a:t>Exemplo</a:t>
+            </a:r>
+            <a:r>
+              <a:rPr lang="pt-BR" dirty="0"/>
+              <a:t>: stocastic_gradient_descent_with_learning_schedule_and_with_figures.ipynb</a:t>
+            </a:r>
+          </a:p>
+          <a:p>
+            <a:endParaRPr lang="pt-BR" dirty="0"/>
+          </a:p>
+        </p:txBody>
+      </p:sp>
+      <p:sp>
+        <p:nvSpPr>
+          <p:cNvPr id="4" name="Espaço Reservado para Número de Slide 3"/>
+          <p:cNvSpPr>
+            <a:spLocks noGrp="1"/>
+          </p:cNvSpPr>
+          <p:nvPr>
+            <p:ph type="sldNum" sz="quarter" idx="5"/>
+          </p:nvPr>
+        </p:nvSpPr>
+        <p:spPr/>
+        <p:txBody>
+          <a:bodyPr/>
+          <a:lstStyle/>
+          <a:p>
+            <a:fld id="{DA8B99DF-01BC-492A-8CEF-4FD88D18DD9D}" type="slidenum">
+              <a:rPr lang="nl-BE" smtClean="0"/>
               <a:t>27</a:t>
             </a:fld>
             <a:endParaRPr lang="nl-BE"/>
@@ -1612,7 +1715,7 @@
 </p:notes>
 </file>
 
-<file path=ppt/notesSlides/notesSlide14.xml><?xml version="1.0" encoding="utf-8"?>
+<file path=ppt/notesSlides/notesSlide15.xml><?xml version="1.0" encoding="utf-8"?>
 <p:notes xmlns:a="http://schemas.openxmlformats.org/drawingml/2006/main" xmlns:r="http://schemas.openxmlformats.org/officeDocument/2006/relationships" xmlns:p="http://schemas.openxmlformats.org/presentationml/2006/main">
   <p:cSld>
     <p:spTree>
@@ -1727,7 +1830,7 @@
 </p:notes>
 </file>
 
-<file path=ppt/notesSlides/notesSlide15.xml><?xml version="1.0" encoding="utf-8"?>
+<file path=ppt/notesSlides/notesSlide16.xml><?xml version="1.0" encoding="utf-8"?>
 <p:notes xmlns:a="http://schemas.openxmlformats.org/drawingml/2006/main" xmlns:r="http://schemas.openxmlformats.org/officeDocument/2006/relationships" xmlns:p="http://schemas.openxmlformats.org/presentationml/2006/main">
   <p:cSld>
     <p:spTree>
@@ -1811,7 +1914,7 @@
 </p:notes>
 </file>
 
-<file path=ppt/notesSlides/notesSlide16.xml><?xml version="1.0" encoding="utf-8"?>
+<file path=ppt/notesSlides/notesSlide17.xml><?xml version="1.0" encoding="utf-8"?>
 <p:notes xmlns:a="http://schemas.openxmlformats.org/drawingml/2006/main" xmlns:r="http://schemas.openxmlformats.org/officeDocument/2006/relationships" xmlns:p="http://schemas.openxmlformats.org/presentationml/2006/main">
   <p:cSld>
     <p:spTree>
@@ -1895,7 +1998,7 @@
 </p:notes>
 </file>
 
-<file path=ppt/notesSlides/notesSlide17.xml><?xml version="1.0" encoding="utf-8"?>
+<file path=ppt/notesSlides/notesSlide18.xml><?xml version="1.0" encoding="utf-8"?>
 <p:notes xmlns:a="http://schemas.openxmlformats.org/drawingml/2006/main" xmlns:r="http://schemas.openxmlformats.org/officeDocument/2006/relationships" xmlns:p="http://schemas.openxmlformats.org/presentationml/2006/main">
   <p:cSld>
     <p:spTree>
@@ -1979,7 +2082,7 @@
 </p:notes>
 </file>
 
-<file path=ppt/notesSlides/notesSlide18.xml><?xml version="1.0" encoding="utf-8"?>
+<file path=ppt/notesSlides/notesSlide19.xml><?xml version="1.0" encoding="utf-8"?>
 <p:notes xmlns:a="http://schemas.openxmlformats.org/drawingml/2006/main" xmlns:r="http://schemas.openxmlformats.org/officeDocument/2006/relationships" xmlns:p="http://schemas.openxmlformats.org/presentationml/2006/main">
   <p:cSld>
     <p:spTree>
@@ -2063,93 +2166,6 @@
 </p:notes>
 </file>
 
-<file path=ppt/notesSlides/notesSlide19.xml><?xml version="1.0" encoding="utf-8"?>
-<p:notes xmlns:a="http://schemas.openxmlformats.org/drawingml/2006/main" xmlns:r="http://schemas.openxmlformats.org/officeDocument/2006/relationships" xmlns:p="http://schemas.openxmlformats.org/presentationml/2006/main">
-  <p:cSld>
-    <p:spTree>
-      <p:nvGrpSpPr>
-        <p:cNvPr id="1" name=""/>
-        <p:cNvGrpSpPr/>
-        <p:nvPr/>
-      </p:nvGrpSpPr>
-      <p:grpSpPr>
-        <a:xfrm>
-          <a:off x="0" y="0"/>
-          <a:ext cx="0" cy="0"/>
-          <a:chOff x="0" y="0"/>
-          <a:chExt cx="0" cy="0"/>
-        </a:xfrm>
-      </p:grpSpPr>
-      <p:sp>
-        <p:nvSpPr>
-          <p:cNvPr id="2" name="Slide Image Placeholder 1"/>
-          <p:cNvSpPr>
-            <a:spLocks noGrp="1" noRot="1" noChangeAspect="1"/>
-          </p:cNvSpPr>
-          <p:nvPr>
-            <p:ph type="sldImg"/>
-          </p:nvPr>
-        </p:nvSpPr>
-        <p:spPr/>
-      </p:sp>
-      <p:sp>
-        <p:nvSpPr>
-          <p:cNvPr id="3" name="Notes Placeholder 2"/>
-          <p:cNvSpPr>
-            <a:spLocks noGrp="1"/>
-          </p:cNvSpPr>
-          <p:nvPr>
-            <p:ph type="body" idx="1"/>
-          </p:nvPr>
-        </p:nvSpPr>
-        <p:spPr/>
-        <p:txBody>
-          <a:bodyPr/>
-          <a:lstStyle/>
-          <a:p>
-            <a:r>
-              <a:rPr lang="pt-BR" dirty="0"/>
-              <a:t>O termo momentum aumenta para dimensões cujos gradientes apontam nas mesmas direções e reduz atualizações para dimensões cujos gradientes mudam de direção. Como resultado, temos convergência mais rápida e oscilação reduzida.</a:t>
-            </a:r>
-          </a:p>
-        </p:txBody>
-      </p:sp>
-      <p:sp>
-        <p:nvSpPr>
-          <p:cNvPr id="4" name="Slide Number Placeholder 3"/>
-          <p:cNvSpPr>
-            <a:spLocks noGrp="1"/>
-          </p:cNvSpPr>
-          <p:nvPr>
-            <p:ph type="sldNum" sz="quarter" idx="10"/>
-          </p:nvPr>
-        </p:nvSpPr>
-        <p:spPr/>
-        <p:txBody>
-          <a:bodyPr/>
-          <a:lstStyle/>
-          <a:p>
-            <a:fld id="{DA8B99DF-01BC-492A-8CEF-4FD88D18DD9D}" type="slidenum">
-              <a:rPr lang="nl-BE" smtClean="0"/>
-              <a:t>43</a:t>
-            </a:fld>
-            <a:endParaRPr lang="nl-BE"/>
-          </a:p>
-        </p:txBody>
-      </p:sp>
-    </p:spTree>
-    <p:extLst>
-      <p:ext uri="{BB962C8B-B14F-4D97-AF65-F5344CB8AC3E}">
-        <p14:creationId xmlns:p14="http://schemas.microsoft.com/office/powerpoint/2010/main" val="886674621"/>
-      </p:ext>
-    </p:extLst>
-  </p:cSld>
-  <p:clrMapOvr>
-    <a:masterClrMapping/>
-  </p:clrMapOvr>
-</p:notes>
-</file>
-
 <file path=ppt/notesSlides/notesSlide2.xml><?xml version="1.0" encoding="utf-8"?>
 <p:notes xmlns:a="http://schemas.openxmlformats.org/drawingml/2006/main" xmlns:r="http://schemas.openxmlformats.org/officeDocument/2006/relationships" xmlns:p="http://schemas.openxmlformats.org/presentationml/2006/main">
   <p:cSld>
@@ -2354,6 +2370,93 @@
     <p:extLst>
       <p:ext uri="{BB962C8B-B14F-4D97-AF65-F5344CB8AC3E}">
         <p14:creationId xmlns:p14="http://schemas.microsoft.com/office/powerpoint/2010/main" val="3755092460"/>
+      </p:ext>
+    </p:extLst>
+  </p:cSld>
+  <p:clrMapOvr>
+    <a:masterClrMapping/>
+  </p:clrMapOvr>
+</p:notes>
+</file>
+
+<file path=ppt/notesSlides/notesSlide20.xml><?xml version="1.0" encoding="utf-8"?>
+<p:notes xmlns:a="http://schemas.openxmlformats.org/drawingml/2006/main" xmlns:r="http://schemas.openxmlformats.org/officeDocument/2006/relationships" xmlns:p="http://schemas.openxmlformats.org/presentationml/2006/main">
+  <p:cSld>
+    <p:spTree>
+      <p:nvGrpSpPr>
+        <p:cNvPr id="1" name=""/>
+        <p:cNvGrpSpPr/>
+        <p:nvPr/>
+      </p:nvGrpSpPr>
+      <p:grpSpPr>
+        <a:xfrm>
+          <a:off x="0" y="0"/>
+          <a:ext cx="0" cy="0"/>
+          <a:chOff x="0" y="0"/>
+          <a:chExt cx="0" cy="0"/>
+        </a:xfrm>
+      </p:grpSpPr>
+      <p:sp>
+        <p:nvSpPr>
+          <p:cNvPr id="2" name="Slide Image Placeholder 1"/>
+          <p:cNvSpPr>
+            <a:spLocks noGrp="1" noRot="1" noChangeAspect="1"/>
+          </p:cNvSpPr>
+          <p:nvPr>
+            <p:ph type="sldImg"/>
+          </p:nvPr>
+        </p:nvSpPr>
+        <p:spPr/>
+      </p:sp>
+      <p:sp>
+        <p:nvSpPr>
+          <p:cNvPr id="3" name="Notes Placeholder 2"/>
+          <p:cNvSpPr>
+            <a:spLocks noGrp="1"/>
+          </p:cNvSpPr>
+          <p:nvPr>
+            <p:ph type="body" idx="1"/>
+          </p:nvPr>
+        </p:nvSpPr>
+        <p:spPr/>
+        <p:txBody>
+          <a:bodyPr/>
+          <a:lstStyle/>
+          <a:p>
+            <a:r>
+              <a:rPr lang="pt-BR" dirty="0"/>
+              <a:t>O termo momentum aumenta para dimensões cujos gradientes apontam nas mesmas direções e reduz atualizações para dimensões cujos gradientes mudam de direção. Como resultado, temos convergência mais rápida e oscilação reduzida.</a:t>
+            </a:r>
+          </a:p>
+        </p:txBody>
+      </p:sp>
+      <p:sp>
+        <p:nvSpPr>
+          <p:cNvPr id="4" name="Slide Number Placeholder 3"/>
+          <p:cNvSpPr>
+            <a:spLocks noGrp="1"/>
+          </p:cNvSpPr>
+          <p:nvPr>
+            <p:ph type="sldNum" sz="quarter" idx="10"/>
+          </p:nvPr>
+        </p:nvSpPr>
+        <p:spPr/>
+        <p:txBody>
+          <a:bodyPr/>
+          <a:lstStyle/>
+          <a:p>
+            <a:fld id="{DA8B99DF-01BC-492A-8CEF-4FD88D18DD9D}" type="slidenum">
+              <a:rPr lang="nl-BE" smtClean="0"/>
+              <a:t>43</a:t>
+            </a:fld>
+            <a:endParaRPr lang="nl-BE"/>
+          </a:p>
+        </p:txBody>
+      </p:sp>
+    </p:spTree>
+    <p:extLst>
+      <p:ext uri="{BB962C8B-B14F-4D97-AF65-F5344CB8AC3E}">
+        <p14:creationId xmlns:p14="http://schemas.microsoft.com/office/powerpoint/2010/main" val="886674621"/>
       </p:ext>
     </p:extLst>
   </p:cSld>
@@ -3880,7 +3983,7 @@
           <a:p>
             <a:fld id="{C80E15A5-E95B-43EB-9AC7-9A96397448C0}" type="datetimeFigureOut">
               <a:rPr lang="nl-BE" smtClean="0"/>
-              <a:t>25/09/2026</a:t>
+              <a:t>9/10/2026</a:t>
             </a:fld>
             <a:endParaRPr lang="nl-BE"/>
           </a:p>
@@ -4050,7 +4153,7 @@
           <a:p>
             <a:fld id="{C80E15A5-E95B-43EB-9AC7-9A96397448C0}" type="datetimeFigureOut">
               <a:rPr lang="nl-BE" smtClean="0"/>
-              <a:t>25/09/2026</a:t>
+              <a:t>9/10/2026</a:t>
             </a:fld>
             <a:endParaRPr lang="nl-BE"/>
           </a:p>
@@ -4230,7 +4333,7 @@
           <a:p>
             <a:fld id="{C80E15A5-E95B-43EB-9AC7-9A96397448C0}" type="datetimeFigureOut">
               <a:rPr lang="nl-BE" smtClean="0"/>
-              <a:t>25/09/2026</a:t>
+              <a:t>9/10/2026</a:t>
             </a:fld>
             <a:endParaRPr lang="nl-BE"/>
           </a:p>
@@ -4400,7 +4503,7 @@
           <a:p>
             <a:fld id="{C80E15A5-E95B-43EB-9AC7-9A96397448C0}" type="datetimeFigureOut">
               <a:rPr lang="nl-BE" smtClean="0"/>
-              <a:t>25/09/2026</a:t>
+              <a:t>9/10/2026</a:t>
             </a:fld>
             <a:endParaRPr lang="nl-BE"/>
           </a:p>
@@ -4646,7 +4749,7 @@
           <a:p>
             <a:fld id="{C80E15A5-E95B-43EB-9AC7-9A96397448C0}" type="datetimeFigureOut">
               <a:rPr lang="nl-BE" smtClean="0"/>
-              <a:t>25/09/2026</a:t>
+              <a:t>9/10/2026</a:t>
             </a:fld>
             <a:endParaRPr lang="nl-BE"/>
           </a:p>
@@ -4878,7 +4981,7 @@
           <a:p>
             <a:fld id="{C80E15A5-E95B-43EB-9AC7-9A96397448C0}" type="datetimeFigureOut">
               <a:rPr lang="nl-BE" smtClean="0"/>
-              <a:t>25/09/2026</a:t>
+              <a:t>9/10/2026</a:t>
             </a:fld>
             <a:endParaRPr lang="nl-BE"/>
           </a:p>
@@ -5245,7 +5348,7 @@
           <a:p>
             <a:fld id="{C80E15A5-E95B-43EB-9AC7-9A96397448C0}" type="datetimeFigureOut">
               <a:rPr lang="nl-BE" smtClean="0"/>
-              <a:t>25/09/2026</a:t>
+              <a:t>9/10/2026</a:t>
             </a:fld>
             <a:endParaRPr lang="nl-BE"/>
           </a:p>
@@ -5363,7 +5466,7 @@
           <a:p>
             <a:fld id="{C80E15A5-E95B-43EB-9AC7-9A96397448C0}" type="datetimeFigureOut">
               <a:rPr lang="nl-BE" smtClean="0"/>
-              <a:t>25/09/2026</a:t>
+              <a:t>9/10/2026</a:t>
             </a:fld>
             <a:endParaRPr lang="nl-BE"/>
           </a:p>
@@ -5458,7 +5561,7 @@
           <a:p>
             <a:fld id="{C80E15A5-E95B-43EB-9AC7-9A96397448C0}" type="datetimeFigureOut">
               <a:rPr lang="nl-BE" smtClean="0"/>
-              <a:t>25/09/2026</a:t>
+              <a:t>9/10/2026</a:t>
             </a:fld>
             <a:endParaRPr lang="nl-BE"/>
           </a:p>
@@ -5735,7 +5838,7 @@
           <a:p>
             <a:fld id="{C80E15A5-E95B-43EB-9AC7-9A96397448C0}" type="datetimeFigureOut">
               <a:rPr lang="nl-BE" smtClean="0"/>
-              <a:t>25/09/2026</a:t>
+              <a:t>9/10/2026</a:t>
             </a:fld>
             <a:endParaRPr lang="nl-BE"/>
           </a:p>
@@ -5988,7 +6091,7 @@
           <a:p>
             <a:fld id="{C80E15A5-E95B-43EB-9AC7-9A96397448C0}" type="datetimeFigureOut">
               <a:rPr lang="nl-BE" smtClean="0"/>
-              <a:t>25/09/2026</a:t>
+              <a:t>9/10/2026</a:t>
             </a:fld>
             <a:endParaRPr lang="nl-BE"/>
           </a:p>
@@ -6201,7 +6304,7 @@
           <a:p>
             <a:fld id="{C80E15A5-E95B-43EB-9AC7-9A96397448C0}" type="datetimeFigureOut">
               <a:rPr lang="nl-BE" smtClean="0"/>
-              <a:t>25/09/2026</a:t>
+              <a:t>9/10/2026</a:t>
             </a:fld>
             <a:endParaRPr lang="nl-BE"/>
           </a:p>
@@ -9917,8 +10020,8 @@
           </a:p>
         </p:txBody>
       </p:sp>
-      <mc:AlternateContent xmlns:mc="http://schemas.openxmlformats.org/markup-compatibility/2006" xmlns:a14="http://schemas.microsoft.com/office/drawing/2010/main">
-        <mc:Choice Requires="a14">
+      <mc:AlternateContent xmlns:mc="http://schemas.openxmlformats.org/markup-compatibility/2006">
+        <mc:Choice xmlns:a14="http://schemas.microsoft.com/office/drawing/2010/main" Requires="a14">
           <p:sp>
             <p:nvSpPr>
               <p:cNvPr id="3" name="Espaço Reservado para Conteúdo 2">
@@ -9937,8 +10040,8 @@
             </p:nvSpPr>
             <p:spPr>
               <a:xfrm>
-                <a:off x="4817097" y="1825624"/>
-                <a:ext cx="7296346" cy="5032375"/>
+                <a:off x="4817096" y="1825624"/>
+                <a:ext cx="7374903" cy="5032375"/>
               </a:xfrm>
             </p:spPr>
             <p:txBody>
@@ -10011,7 +10114,19 @@
                 </a:pPr>
                 <a:r>
                   <a:rPr lang="pt-BR" dirty="0"/>
-                  <a:t>Devido à estimativa do vetor gradiente.</a:t>
+                  <a:t>Devido à </a:t>
+                </a:r>
+                <a:r>
+                  <a:rPr lang="pt-BR" b="1" dirty="0">
+                    <a:solidFill>
+                      <a:schemeClr val="accent1"/>
+                    </a:solidFill>
+                  </a:rPr>
+                  <a:t>estimativa</a:t>
+                </a:r>
+                <a:r>
+                  <a:rPr lang="pt-BR" dirty="0"/>
+                  <a:t> do vetor gradiente.</a:t>
                 </a:r>
               </a:p>
               <a:p>
@@ -10037,11 +10152,11 @@
                       <a:srgbClr val="00B050"/>
                     </a:solidFill>
                   </a:rPr>
-                  <a:t>contaminadas com ruido</a:t>
+                  <a:t>contaminadas com ruído</a:t>
                 </a:r>
                 <a:r>
                   <a:rPr lang="pt-BR" dirty="0"/>
-                  <a:t>, eles </a:t>
+                  <a:t>, elas </a:t>
                 </a:r>
                 <a:r>
                   <a:rPr lang="pt-BR" b="1" i="1" dirty="0">
@@ -10059,7 +10174,7 @@
             </p:txBody>
           </p:sp>
         </mc:Choice>
-        <mc:Fallback xmlns="">
+        <mc:Fallback>
           <p:sp>
             <p:nvSpPr>
               <p:cNvPr id="3" name="Espaço Reservado para Conteúdo 2">
@@ -10078,13 +10193,13 @@
             </p:nvSpPr>
             <p:spPr>
               <a:xfrm>
-                <a:off x="4817097" y="1825624"/>
-                <a:ext cx="7296346" cy="5032375"/>
+                <a:off x="4817096" y="1825624"/>
+                <a:ext cx="7374903" cy="5032375"/>
               </a:xfrm>
               <a:blipFill>
                 <a:blip r:embed="rId2"/>
                 <a:stretch>
-                  <a:fillRect l="-1504" t="-1937" r="-2089"/>
+                  <a:fillRect l="-1488" t="-1937" r="-2562"/>
                 </a:stretch>
               </a:blipFill>
             </p:spPr>
@@ -10598,7 +10713,7 @@
                   <a:srgbClr val="7030A0"/>
                 </a:solidFill>
               </a:rPr>
-              <a:t>ajuste do passo de aprendizagem </a:t>
+              <a:t>ajuste da taxa de aprendizagem </a:t>
             </a:r>
             <a:r>
               <a:rPr lang="pt-BR" dirty="0"/>
@@ -10642,7 +10757,7 @@
             </a:r>
             <a:r>
               <a:rPr lang="pt-BR" dirty="0"/>
-              <a:t>: usa passos independentes</a:t>
+              <a:t>: usa taxas independentes</a:t>
             </a:r>
           </a:p>
           <a:p>
@@ -10811,8 +10926,8 @@
           </a:p>
         </p:txBody>
       </p:sp>
-      <mc:AlternateContent xmlns:mc="http://schemas.openxmlformats.org/markup-compatibility/2006" xmlns:a14="http://schemas.microsoft.com/office/drawing/2010/main">
-        <mc:Choice Requires="a14">
+      <mc:AlternateContent xmlns:mc="http://schemas.openxmlformats.org/markup-compatibility/2006">
+        <mc:Choice xmlns:a14="http://schemas.microsoft.com/office/drawing/2010/main" Requires="a14">
           <p:sp>
             <p:nvSpPr>
               <p:cNvPr id="3" name="Espaço Reservado para Conteúdo 2">
@@ -10851,7 +10966,7 @@
                 </a:r>
                 <a:r>
                   <a:rPr lang="pt-BR" dirty="0"/>
-                  <a:t>(ou decaimento) do passo de aprendizagem </a:t>
+                  <a:t>(ou decaimento) da taxa de aprendizagem </a:t>
                 </a:r>
                 <a:r>
                   <a:rPr lang="pt-BR" b="1" i="1" dirty="0">
@@ -10859,7 +10974,7 @@
                       <a:srgbClr val="00B050"/>
                     </a:solidFill>
                   </a:rPr>
-                  <a:t>diminui gradualmente o passo de aprendizagem</a:t>
+                  <a:t>diminui gradualmente a taxa de aprendizagem</a:t>
                 </a:r>
                 <a:r>
                   <a:rPr lang="pt-BR" dirty="0"/>
@@ -11311,7 +11426,7 @@
                 </a:r>
                 <a:r>
                   <a:rPr lang="pt-BR" dirty="0"/>
-                  <a:t> que dão a taxa ideal de redução do passo de aprendizagem de forma que haja a convergência.</a:t>
+                  <a:t> que dão a taxa ideal de redução do passo de aprendizagem de forma que que o algoritmo convirja.</a:t>
                 </a:r>
               </a:p>
               <a:p>
@@ -11323,7 +11438,7 @@
             </p:txBody>
           </p:sp>
         </mc:Choice>
-        <mc:Fallback xmlns="">
+        <mc:Fallback>
           <p:sp>
             <p:nvSpPr>
               <p:cNvPr id="3" name="Espaço Reservado para Conteúdo 2">
@@ -11482,8 +11597,8 @@
           </a:p>
         </p:txBody>
       </p:sp>
-      <mc:AlternateContent xmlns:mc="http://schemas.openxmlformats.org/markup-compatibility/2006" xmlns:a14="http://schemas.microsoft.com/office/drawing/2010/main">
-        <mc:Choice Requires="a14">
+      <mc:AlternateContent xmlns:mc="http://schemas.openxmlformats.org/markup-compatibility/2006">
+        <mc:Choice xmlns:a14="http://schemas.microsoft.com/office/drawing/2010/main" Requires="a14">
           <p:sp>
             <p:nvSpPr>
               <p:cNvPr id="3" name="Espaço Reservado para Conteúdo 2">
@@ -11503,7 +11618,7 @@
             <p:spPr>
               <a:xfrm>
                 <a:off x="838199" y="1825624"/>
-                <a:ext cx="11070771" cy="5032375"/>
+                <a:ext cx="11246964" cy="5032375"/>
               </a:xfrm>
             </p:spPr>
             <p:txBody>
@@ -11520,7 +11635,7 @@
                 </a:r>
                 <a:r>
                   <a:rPr lang="pt-BR" dirty="0"/>
-                  <a:t> do passo de aprendizagem são:</a:t>
+                  <a:t> da taxa de aprendizagem são:</a:t>
                 </a:r>
               </a:p>
               <a:p>
@@ -11534,7 +11649,7 @@
                 </a:r>
                 <a:r>
                   <a:rPr lang="pt-BR" dirty="0"/>
-                  <a:t>: reduz o passo de aprendizagem inicial, </a:t>
+                  <a:t>: reduz a taxa de aprendizagem inicial, </a:t>
                 </a:r>
                 <a14:m>
                   <m:oMath xmlns:m="http://schemas.openxmlformats.org/officeDocument/2006/math">
@@ -11821,7 +11936,7 @@
                 </a14:m>
                 <a:r>
                   <a:rPr lang="pt-BR" dirty="0"/>
-                  <a:t> são passo de aprendizagem inicial, a taxa de decrescimento e o número da iteração de atualização atual, respectivamente.</a:t>
+                  <a:t> são a taxa de aprendizagem inicial, a taxa de decrescimento e o número da iteração de atualização atual, respectivamente.</a:t>
                 </a:r>
               </a:p>
               <a:p>
@@ -12107,7 +12222,7 @@
             </p:txBody>
           </p:sp>
         </mc:Choice>
-        <mc:Fallback xmlns="">
+        <mc:Fallback>
           <p:sp>
             <p:nvSpPr>
               <p:cNvPr id="3" name="Espaço Reservado para Conteúdo 2">
@@ -12127,12 +12242,12 @@
             <p:spPr>
               <a:xfrm>
                 <a:off x="838199" y="1825624"/>
-                <a:ext cx="11070771" cy="5032375"/>
+                <a:ext cx="11246964" cy="5032375"/>
               </a:xfrm>
               <a:blipFill>
                 <a:blip r:embed="rId2"/>
                 <a:stretch>
-                  <a:fillRect l="-936" t="-1937" r="-1101"/>
+                  <a:fillRect l="-921" t="-1937" r="-1030"/>
                 </a:stretch>
               </a:blipFill>
             </p:spPr>
@@ -12141,7 +12256,7 @@
               <a:lstStyle/>
               <a:p>
                 <a:r>
-                  <a:rPr lang="pt-BR">
+                  <a:rPr lang="en-US">
                     <a:noFill/>
                   </a:rPr>
                   <a:t> </a:t>
@@ -12209,8 +12324,8 @@
           </a:p>
         </p:txBody>
       </p:sp>
-      <mc:AlternateContent xmlns:mc="http://schemas.openxmlformats.org/markup-compatibility/2006" xmlns:a14="http://schemas.microsoft.com/office/drawing/2010/main">
-        <mc:Choice Requires="a14">
+      <mc:AlternateContent xmlns:mc="http://schemas.openxmlformats.org/markup-compatibility/2006">
+        <mc:Choice xmlns:a14="http://schemas.microsoft.com/office/drawing/2010/main" Requires="a14">
           <p:sp>
             <p:nvSpPr>
               <p:cNvPr id="3" name="Espaço Reservado para Conteúdo 2">
@@ -12854,7 +12969,7 @@
               <a:p>
                 <a:r>
                   <a:rPr lang="pt-BR" dirty="0"/>
-                  <a:t>Em geral, o passo de aprendizagem é constante, mas pode decair também.</a:t>
+                  <a:t>Em geral, a taxa de aprendizagem é constante, mas pode decair também.</a:t>
                 </a:r>
               </a:p>
               <a:p>
@@ -12920,7 +13035,7 @@
             </p:txBody>
           </p:sp>
         </mc:Choice>
-        <mc:Fallback xmlns="">
+        <mc:Fallback>
           <p:sp>
             <p:nvSpPr>
               <p:cNvPr id="3" name="Espaço Reservado para Conteúdo 2">
@@ -12943,7 +13058,7 @@
                 <a:ext cx="11284671" cy="5032375"/>
               </a:xfrm>
               <a:blipFill>
-                <a:blip r:embed="rId2"/>
+                <a:blip r:embed="rId3"/>
                 <a:stretch>
                   <a:fillRect l="-1080" t="-2663" r="-432" b="-969"/>
                 </a:stretch>
@@ -13065,7 +13180,7 @@
             </a:r>
             <a:r>
               <a:rPr lang="pt-BR" dirty="0"/>
-              <a:t> o </a:t>
+              <a:t> a </a:t>
             </a:r>
             <a:r>
               <a:rPr lang="pt-BR" b="1" i="1" dirty="0">
@@ -13073,7 +13188,19 @@
                   <a:srgbClr val="00B050"/>
                 </a:solidFill>
               </a:rPr>
-              <a:t>passo de aprendizado </a:t>
+              <a:t>taxa</a:t>
+            </a:r>
+            <a:r>
+              <a:rPr lang="pt-BR" dirty="0"/>
+              <a:t> </a:t>
+            </a:r>
+            <a:r>
+              <a:rPr lang="pt-BR" b="1" i="1" dirty="0">
+                <a:solidFill>
+                  <a:srgbClr val="00B050"/>
+                </a:solidFill>
+              </a:rPr>
+              <a:t>de aprendizado </a:t>
             </a:r>
             <a:r>
               <a:rPr lang="pt-BR" b="1" i="1" dirty="0">
@@ -13095,7 +13222,7 @@
             </a:pPr>
             <a:r>
               <a:rPr lang="pt-BR" dirty="0"/>
-              <a:t>Cada peso do modelo tem seu próprio passo de aprendizagem.</a:t>
+              <a:t>Cada peso do modelo tem sua própria taxa de aprendizagem.</a:t>
             </a:r>
           </a:p>
           <a:p>
@@ -13105,7 +13232,7 @@
             </a:pPr>
             <a:r>
               <a:rPr lang="pt-BR" dirty="0"/>
-              <a:t>Cada passo é adaptado com base no histórico dos gradientes.</a:t>
+              <a:t>Cada taxa é adaptada com base no histórico dos gradientes.</a:t>
             </a:r>
           </a:p>
           <a:p>
@@ -13141,7 +13268,7 @@
             </a:r>
             <a:r>
               <a:rPr lang="pt-BR" dirty="0"/>
-              <a:t> reduz o passo usando o acúmulo de gradientes anteriores, mas sofre com a redução excessiva do passo ao longo do tempo.</a:t>
+              <a:t> reduz a taxa usando o acúmulo de gradientes anteriores, mas sofre com a redução excessiva do passo ao longo do tempo.</a:t>
             </a:r>
           </a:p>
           <a:p>
@@ -14321,8 +14448,8 @@
         </p:nvSpPr>
         <p:spPr>
           <a:xfrm>
-            <a:off x="8123445" y="1825624"/>
-            <a:ext cx="3969351" cy="5032375"/>
+            <a:off x="7988477" y="1825624"/>
+            <a:ext cx="4104319" cy="5032375"/>
           </a:xfrm>
         </p:spPr>
         <p:txBody>
@@ -14341,15 +14468,15 @@
             </a:pPr>
             <a:r>
               <a:rPr lang="pt-BR" sz="2800" dirty="0"/>
-              <a:t>O caminho com </a:t>
+              <a:t>Mesmo com </a:t>
             </a:r>
             <a:r>
               <a:rPr lang="pt-BR" sz="2800" b="1" i="1" dirty="0"/>
-              <a:t>decaimento gradual </a:t>
+              <a:t>decaimento gradual</a:t>
             </a:r>
             <a:r>
               <a:rPr lang="pt-BR" sz="2800" dirty="0"/>
-              <a:t>também não é regular para o ponto de mínimo.</a:t>
+              <a:t>, o caminho para o ponto de mínimo não é regular.</a:t>
             </a:r>
           </a:p>
           <a:p>
@@ -14371,7 +14498,7 @@
             </a:r>
             <a:r>
               <a:rPr lang="pt-BR" sz="2800" b="1" i="1" dirty="0"/>
-              <a:t>algumas mudanças de direção</a:t>
+              <a:t>mudanças de direção</a:t>
             </a:r>
             <a:r>
               <a:rPr lang="pt-BR" sz="2800" dirty="0"/>
@@ -14388,16 +14515,12 @@
               </a:spcBef>
             </a:pPr>
             <a:r>
-              <a:rPr lang="pt-BR" dirty="0"/>
-              <a:t>O </a:t>
-            </a:r>
-            <a:r>
               <a:rPr lang="pt-BR" b="1" i="1" dirty="0">
                 <a:solidFill>
                   <a:schemeClr val="accent2"/>
                 </a:solidFill>
               </a:rPr>
-              <a:t>passo não influencia na direção</a:t>
+              <a:t>A taxa não influencia na direção</a:t>
             </a:r>
             <a:r>
               <a:rPr lang="pt-BR" dirty="0"/>
@@ -14413,7 +14536,7 @@
             </a:r>
             <a:r>
               <a:rPr lang="pt-BR" dirty="0"/>
-              <a:t> do deslocamento. </a:t>
+              <a:t> do deslocamento (i.e., do passo). </a:t>
             </a:r>
             <a:endParaRPr lang="pt-BR" sz="2800" dirty="0"/>
           </a:p>
@@ -15525,8 +15648,8 @@
           </a:p>
         </p:txBody>
       </p:sp>
-      <mc:AlternateContent xmlns:mc="http://schemas.openxmlformats.org/markup-compatibility/2006" xmlns:a14="http://schemas.microsoft.com/office/drawing/2010/main">
-        <mc:Choice Requires="a14">
+      <mc:AlternateContent xmlns:mc="http://schemas.openxmlformats.org/markup-compatibility/2006">
+        <mc:Choice xmlns:a14="http://schemas.microsoft.com/office/drawing/2010/main" Requires="a14">
           <p:sp>
             <p:nvSpPr>
               <p:cNvPr id="15" name="Espaço Reservado para Conteúdo 2">
@@ -15581,7 +15704,7 @@
                 </a:r>
                 <a:r>
                   <a:rPr lang="pt-BR" sz="2800" dirty="0"/>
-                  <a:t>do passo de aprendizagem, </a:t>
+                  <a:t>da taxa de aprendizagem, </a:t>
                 </a:r>
                 <a14:m>
                   <m:oMath xmlns:m="http://schemas.openxmlformats.org/officeDocument/2006/math">
@@ -15631,7 +15754,7 @@
             </p:txBody>
           </p:sp>
         </mc:Choice>
-        <mc:Fallback xmlns="">
+        <mc:Fallback>
           <p:sp>
             <p:nvSpPr>
               <p:cNvPr id="15" name="Espaço Reservado para Conteúdo 2">
@@ -16813,7 +16936,7 @@
             </a:r>
             <a:r>
               <a:rPr lang="pt-BR" sz="2800" dirty="0"/>
-              <a:t>: um passo de aprendizagem que tem seu valor reduzido ao longo das iterações de treinamento permite que que </a:t>
+              <a:t>: uma taxa de aprendizagem que tem seu valor reduzido ao longo das iterações de treinamento permite que que </a:t>
             </a:r>
             <a:r>
               <a:rPr lang="pt-BR" sz="2800" b="1" i="1" dirty="0">
@@ -41141,14 +41264,6 @@
 </file>
 
 <file path=customXml/item1.xml><?xml version="1.0" encoding="utf-8"?>
-<p:properties xmlns:p="http://schemas.microsoft.com/office/2006/metadata/properties" xmlns:xsi="http://www.w3.org/2001/XMLSchema-instance" xmlns:pc="http://schemas.microsoft.com/office/infopath/2007/PartnerControls">
-  <documentManagement>
-    <_activity xmlns="10322600-47b9-44f6-86ef-c87c87ba6e82" xsi:nil="true"/>
-  </documentManagement>
-</p:properties>
-</file>
-
-<file path=customXml/item2.xml><?xml version="1.0" encoding="utf-8"?>
 <ct:contentTypeSchema xmlns:ct="http://schemas.microsoft.com/office/2006/metadata/contentType" xmlns:ma="http://schemas.microsoft.com/office/2006/metadata/properties/metaAttributes" ct:_="" ma:_="" ma:contentTypeName="Document" ma:contentTypeID="0x010100A6553FE09A98904B92A9D00A38127206" ma:contentTypeVersion="18" ma:contentTypeDescription="Create a new document." ma:contentTypeScope="" ma:versionID="92863cfdd2d5fd2ee9b6f30d8c51b1f5">
   <xsd:schema xmlns:xsd="http://www.w3.org/2001/XMLSchema" xmlns:xs="http://www.w3.org/2001/XMLSchema" xmlns:p="http://schemas.microsoft.com/office/2006/metadata/properties" xmlns:ns3="10322600-47b9-44f6-86ef-c87c87ba6e82" xmlns:ns4="026c264a-64f6-48aa-bde0-8bf9e5064f89" targetNamespace="http://schemas.microsoft.com/office/2006/metadata/properties" ma:root="true" ma:fieldsID="86148dd4b4cd32a5258cd233a95bdcf5" ns3:_="" ns4:_="">
     <xsd:import namespace="10322600-47b9-44f6-86ef-c87c87ba6e82"/>
@@ -41401,7 +41516,7 @@
 </ct:contentTypeSchema>
 </file>
 
-<file path=customXml/item3.xml><?xml version="1.0" encoding="utf-8"?>
+<file path=customXml/item2.xml><?xml version="1.0" encoding="utf-8"?>
 <?mso-contentType ?>
 <FormTemplates xmlns="http://schemas.microsoft.com/sharepoint/v3/contenttype/forms">
   <Display>DocumentLibraryForm</Display>
@@ -41410,24 +41525,15 @@
 </FormTemplates>
 </file>
 
-<file path=customXml/itemProps1.xml><?xml version="1.0" encoding="utf-8"?>
-<ds:datastoreItem xmlns:ds="http://schemas.openxmlformats.org/officeDocument/2006/customXml" ds:itemID="{C4421A6D-F900-459F-9179-A64A47727DAC}">
-  <ds:schemaRefs>
-    <ds:schemaRef ds:uri="http://schemas.microsoft.com/office/2006/documentManagement/types"/>
-    <ds:schemaRef ds:uri="026c264a-64f6-48aa-bde0-8bf9e5064f89"/>
-    <ds:schemaRef ds:uri="http://schemas.openxmlformats.org/package/2006/metadata/core-properties"/>
-    <ds:schemaRef ds:uri="http://purl.org/dc/elements/1.1/"/>
-    <ds:schemaRef ds:uri="http://purl.org/dc/dcmitype/"/>
-    <ds:schemaRef ds:uri="http://schemas.microsoft.com/office/2006/metadata/properties"/>
-    <ds:schemaRef ds:uri="http://www.w3.org/XML/1998/namespace"/>
-    <ds:schemaRef ds:uri="http://schemas.microsoft.com/office/infopath/2007/PartnerControls"/>
-    <ds:schemaRef ds:uri="10322600-47b9-44f6-86ef-c87c87ba6e82"/>
-    <ds:schemaRef ds:uri="http://purl.org/dc/terms/"/>
-  </ds:schemaRefs>
-</ds:datastoreItem>
+<file path=customXml/item3.xml><?xml version="1.0" encoding="utf-8"?>
+<p:properties xmlns:p="http://schemas.microsoft.com/office/2006/metadata/properties" xmlns:xsi="http://www.w3.org/2001/XMLSchema-instance" xmlns:pc="http://schemas.microsoft.com/office/infopath/2007/PartnerControls">
+  <documentManagement>
+    <_activity xmlns="10322600-47b9-44f6-86ef-c87c87ba6e82" xsi:nil="true"/>
+  </documentManagement>
+</p:properties>
 </file>
 
-<file path=customXml/itemProps2.xml><?xml version="1.0" encoding="utf-8"?>
+<file path=customXml/itemProps1.xml><?xml version="1.0" encoding="utf-8"?>
 <ds:datastoreItem xmlns:ds="http://schemas.openxmlformats.org/officeDocument/2006/customXml" ds:itemID="{E765951F-25BB-44C2-B87A-A88FE1B68A23}">
   <ds:schemaRefs>
     <ds:schemaRef ds:uri="http://schemas.microsoft.com/office/2006/metadata/contentType"/>
@@ -41446,10 +41552,27 @@
 </ds:datastoreItem>
 </file>
 
-<file path=customXml/itemProps3.xml><?xml version="1.0" encoding="utf-8"?>
+<file path=customXml/itemProps2.xml><?xml version="1.0" encoding="utf-8"?>
 <ds:datastoreItem xmlns:ds="http://schemas.openxmlformats.org/officeDocument/2006/customXml" ds:itemID="{CF4A17E5-ECCE-48A8-A291-06961455A1A6}">
   <ds:schemaRefs>
     <ds:schemaRef ds:uri="http://schemas.microsoft.com/sharepoint/v3/contenttype/forms"/>
   </ds:schemaRefs>
 </ds:datastoreItem>
+</file>
+
+<file path=customXml/itemProps3.xml><?xml version="1.0" encoding="utf-8"?>
+<ds:datastoreItem xmlns:ds="http://schemas.openxmlformats.org/officeDocument/2006/customXml" ds:itemID="{C4421A6D-F900-459F-9179-A64A47727DAC}">
+  <ds:schemaRefs>
+    <ds:schemaRef ds:uri="http://schemas.microsoft.com/office/2006/documentManagement/types"/>
+    <ds:schemaRef ds:uri="026c264a-64f6-48aa-bde0-8bf9e5064f89"/>
+    <ds:schemaRef ds:uri="http://schemas.openxmlformats.org/package/2006/metadata/core-properties"/>
+    <ds:schemaRef ds:uri="http://purl.org/dc/elements/1.1/"/>
+    <ds:schemaRef ds:uri="http://purl.org/dc/dcmitype/"/>
+    <ds:schemaRef ds:uri="http://schemas.microsoft.com/office/2006/metadata/properties"/>
+    <ds:schemaRef ds:uri="http://www.w3.org/XML/1998/namespace"/>
+    <ds:schemaRef ds:uri="http://schemas.microsoft.com/office/infopath/2007/PartnerControls"/>
+    <ds:schemaRef ds:uri="10322600-47b9-44f6-86ef-c87c87ba6e82"/>
+    <ds:schemaRef ds:uri="http://purl.org/dc/terms/"/>
+  </ds:schemaRefs>
+</ds:datastoreItem>
 </file>
--- a/slides/T319_Regressão_Linear (Parte III).pptx
+++ b/slides/T319_Regressão_Linear (Parte III).pptx
@@ -637,7 +637,7 @@
           <a:p>
             <a:r>
               <a:rPr lang="pt-BR" dirty="0"/>
-              <a:t>O termo momento faz uma média temporal dos vetores gradientes passados.</a:t>
+              <a:t>O termo momento implementa uma média temporal dos vetores gradientes passados.</a:t>
             </a:r>
           </a:p>
           <a:p>
@@ -10020,8 +10020,8 @@
           </a:p>
         </p:txBody>
       </p:sp>
-      <mc:AlternateContent xmlns:mc="http://schemas.openxmlformats.org/markup-compatibility/2006">
-        <mc:Choice xmlns:a14="http://schemas.microsoft.com/office/drawing/2010/main" Requires="a14">
+      <mc:AlternateContent xmlns:mc="http://schemas.openxmlformats.org/markup-compatibility/2006" xmlns:a14="http://schemas.microsoft.com/office/drawing/2010/main">
+        <mc:Choice Requires="a14">
           <p:sp>
             <p:nvSpPr>
               <p:cNvPr id="3" name="Espaço Reservado para Conteúdo 2">
@@ -10174,7 +10174,7 @@
             </p:txBody>
           </p:sp>
         </mc:Choice>
-        <mc:Fallback>
+        <mc:Fallback xmlns="">
           <p:sp>
             <p:nvSpPr>
               <p:cNvPr id="3" name="Espaço Reservado para Conteúdo 2">
@@ -10705,7 +10705,7 @@
           <a:p>
             <a:r>
               <a:rPr lang="pt-BR" dirty="0"/>
-              <a:t>As mais conhecidas envolvem o </a:t>
+              <a:t>As técnicas mais conhecidas envolvem o </a:t>
             </a:r>
             <a:r>
               <a:rPr lang="pt-BR" b="1" i="1" dirty="0">
@@ -10753,11 +10753,11 @@
             </a:pPr>
             <a:r>
               <a:rPr lang="pt-BR" b="1" dirty="0"/>
-              <a:t>Ajuste adaptativo</a:t>
+              <a:t>Termo momentum</a:t>
             </a:r>
             <a:r>
               <a:rPr lang="pt-BR" dirty="0"/>
-              <a:t>: usa taxas independentes</a:t>
+              <a:t>: redução da variação de direção</a:t>
             </a:r>
           </a:p>
           <a:p>
@@ -10767,11 +10767,11 @@
             </a:pPr>
             <a:r>
               <a:rPr lang="pt-BR" b="1" dirty="0"/>
-              <a:t>Termo momentum</a:t>
+              <a:t>Ajuste adaptativo</a:t>
             </a:r>
             <a:r>
               <a:rPr lang="pt-BR" dirty="0"/>
-              <a:t>: redução da variação de direção</a:t>
+              <a:t>: usa taxas independentes</a:t>
             </a:r>
           </a:p>
         </p:txBody>
@@ -10926,8 +10926,8 @@
           </a:p>
         </p:txBody>
       </p:sp>
-      <mc:AlternateContent xmlns:mc="http://schemas.openxmlformats.org/markup-compatibility/2006">
-        <mc:Choice xmlns:a14="http://schemas.microsoft.com/office/drawing/2010/main" Requires="a14">
+      <mc:AlternateContent xmlns:mc="http://schemas.openxmlformats.org/markup-compatibility/2006" xmlns:a14="http://schemas.microsoft.com/office/drawing/2010/main">
+        <mc:Choice Requires="a14">
           <p:sp>
             <p:nvSpPr>
               <p:cNvPr id="3" name="Espaço Reservado para Conteúdo 2">
@@ -11034,7 +11034,10 @@
                 </a:pPr>
                 <a14:m>
                   <m:oMathPara xmlns:m="http://schemas.openxmlformats.org/officeDocument/2006/math">
-                    <m:oMath>
+                    <m:oMathParaPr>
+                      <m:jc m:val="centerGroup"/>
+                    </m:oMathParaPr>
+                    <m:oMath xmlns:m="http://schemas.openxmlformats.org/officeDocument/2006/math">
                       <m:r>
                         <a:rPr lang="pt-BR" sz="2800" b="1" i="1" smtClean="0">
                           <a:solidFill>
@@ -11438,7 +11441,7 @@
             </p:txBody>
           </p:sp>
         </mc:Choice>
-        <mc:Fallback>
+        <mc:Fallback xmlns="">
           <p:sp>
             <p:nvSpPr>
               <p:cNvPr id="3" name="Espaço Reservado para Conteúdo 2">
@@ -11597,8 +11600,8 @@
           </a:p>
         </p:txBody>
       </p:sp>
-      <mc:AlternateContent xmlns:mc="http://schemas.openxmlformats.org/markup-compatibility/2006">
-        <mc:Choice xmlns:a14="http://schemas.microsoft.com/office/drawing/2010/main" Requires="a14">
+      <mc:AlternateContent xmlns:mc="http://schemas.openxmlformats.org/markup-compatibility/2006" xmlns:a14="http://schemas.microsoft.com/office/drawing/2010/main">
+        <mc:Choice Requires="a14">
           <p:sp>
             <p:nvSpPr>
               <p:cNvPr id="3" name="Espaço Reservado para Conteúdo 2">
@@ -12222,7 +12225,7 @@
             </p:txBody>
           </p:sp>
         </mc:Choice>
-        <mc:Fallback>
+        <mc:Fallback xmlns="">
           <p:sp>
             <p:nvSpPr>
               <p:cNvPr id="3" name="Espaço Reservado para Conteúdo 2">
@@ -12442,7 +12445,10 @@
                 </a:pPr>
                 <a14:m>
                   <m:oMathPara xmlns:m="http://schemas.openxmlformats.org/officeDocument/2006/math">
-                    <m:oMath>
+                    <m:oMathParaPr>
+                      <m:jc m:val="centerGroup"/>
+                    </m:oMathParaPr>
+                    <m:oMath xmlns:m="http://schemas.openxmlformats.org/officeDocument/2006/math">
                       <m:r>
                         <a:rPr lang="en-US" sz="2800" b="1" i="1" smtClean="0">
                           <a:latin typeface="Cambria Math" panose="02040503050406030204" pitchFamily="18" charset="0"/>
@@ -12667,7 +12673,10 @@
                 </a:pPr>
                 <a14:m>
                   <m:oMathPara xmlns:m="http://schemas.openxmlformats.org/officeDocument/2006/math">
-                    <m:oMath>
+                    <m:oMathParaPr>
+                      <m:jc m:val="centerGroup"/>
+                    </m:oMathParaPr>
+                    <m:oMath xmlns:m="http://schemas.openxmlformats.org/officeDocument/2006/math">
                       <m:r>
                         <a:rPr lang="pt-BR" sz="2800" i="1" smtClean="0">
                           <a:latin typeface="Cambria Math" panose="02040503050406030204" pitchFamily="18" charset="0"/>
@@ -12987,7 +12996,7 @@
                 </a:r>
                 <a:r>
                   <a:rPr lang="pt-BR" dirty="0"/>
-                  <a:t> é que nós precisamos encontrar as valores ideais dos </a:t>
+                  <a:t> é que nós precisamos encontrar os valores ideais dos </a:t>
                 </a:r>
                 <a:r>
                   <a:rPr lang="pt-BR" b="1" i="1" dirty="0">
@@ -13069,7 +13078,7 @@
               <a:lstStyle/>
               <a:p>
                 <a:r>
-                  <a:rPr lang="en-US">
+                  <a:rPr lang="pt-BR">
                     <a:noFill/>
                   </a:rPr>
                   <a:t> </a:t>
@@ -13296,7 +13305,7 @@
             </a:r>
             <a:r>
               <a:rPr lang="pt-BR" dirty="0"/>
-              <a:t> com o termo momento (média dos gradientes).</a:t>
+              <a:t> com o termo momentum (média dos gradientes).</a:t>
             </a:r>
           </a:p>
           <a:p>
@@ -15648,8 +15657,8 @@
           </a:p>
         </p:txBody>
       </p:sp>
-      <mc:AlternateContent xmlns:mc="http://schemas.openxmlformats.org/markup-compatibility/2006">
-        <mc:Choice xmlns:a14="http://schemas.microsoft.com/office/drawing/2010/main" Requires="a14">
+      <mc:AlternateContent xmlns:mc="http://schemas.openxmlformats.org/markup-compatibility/2006" xmlns:a14="http://schemas.microsoft.com/office/drawing/2010/main">
+        <mc:Choice Requires="a14">
           <p:sp>
             <p:nvSpPr>
               <p:cNvPr id="15" name="Espaço Reservado para Conteúdo 2">
@@ -15754,7 +15763,7 @@
             </p:txBody>
           </p:sp>
         </mc:Choice>
-        <mc:Fallback>
+        <mc:Fallback xmlns="">
           <p:sp>
             <p:nvSpPr>
               <p:cNvPr id="15" name="Espaço Reservado para Conteúdo 2">
@@ -19226,7 +19235,10 @@
                   <a:pPr/>
                   <a14:m>
                     <m:oMathPara xmlns:m="http://schemas.openxmlformats.org/officeDocument/2006/math">
-                      <m:oMath>
+                      <m:oMathParaPr>
+                        <m:jc m:val="centerGroup"/>
+                      </m:oMathParaPr>
+                      <m:oMath xmlns:m="http://schemas.openxmlformats.org/officeDocument/2006/math">
                         <m:sSub>
                           <m:sSubPr>
                             <m:ctrlPr>
@@ -19349,7 +19361,10 @@
                   <a:pPr/>
                   <a14:m>
                     <m:oMathPara xmlns:m="http://schemas.openxmlformats.org/officeDocument/2006/math">
-                      <m:oMath>
+                      <m:oMathParaPr>
+                        <m:jc m:val="centerGroup"/>
+                      </m:oMathParaPr>
+                      <m:oMath xmlns:m="http://schemas.openxmlformats.org/officeDocument/2006/math">
                         <m:r>
                           <a:rPr lang="en-US" b="1" i="1" smtClean="0">
                             <a:latin typeface="Cambria Math" panose="02040503050406030204" pitchFamily="18" charset="0"/>
@@ -19966,7 +19981,10 @@
                   <a:pPr/>
                   <a14:m>
                     <m:oMathPara xmlns:m="http://schemas.openxmlformats.org/officeDocument/2006/math">
-                      <m:oMath>
+                      <m:oMathParaPr>
+                        <m:jc m:val="centerGroup"/>
+                      </m:oMathParaPr>
+                      <m:oMath xmlns:m="http://schemas.openxmlformats.org/officeDocument/2006/math">
                         <m:sSub>
                           <m:sSubPr>
                             <m:ctrlPr>
@@ -20089,7 +20107,10 @@
                   <a:pPr/>
                   <a14:m>
                     <m:oMathPara xmlns:m="http://schemas.openxmlformats.org/officeDocument/2006/math">
-                      <m:oMath>
+                      <m:oMathParaPr>
+                        <m:jc m:val="centerGroup"/>
+                      </m:oMathParaPr>
+                      <m:oMath xmlns:m="http://schemas.openxmlformats.org/officeDocument/2006/math">
                         <m:r>
                           <a:rPr lang="en-US" b="0" i="1" smtClean="0">
                             <a:latin typeface="Cambria Math" panose="02040503050406030204" pitchFamily="18" charset="0"/>
@@ -20968,7 +20989,10 @@
                   <a:pPr/>
                   <a14:m>
                     <m:oMathPara xmlns:m="http://schemas.openxmlformats.org/officeDocument/2006/math">
-                      <m:oMath>
+                      <m:oMathParaPr>
+                        <m:jc m:val="centerGroup"/>
+                      </m:oMathParaPr>
+                      <m:oMath xmlns:m="http://schemas.openxmlformats.org/officeDocument/2006/math">
                         <m:sSub>
                           <m:sSubPr>
                             <m:ctrlPr>
@@ -21091,7 +21115,10 @@
                   <a:pPr/>
                   <a14:m>
                     <m:oMathPara xmlns:m="http://schemas.openxmlformats.org/officeDocument/2006/math">
-                      <m:oMath>
+                      <m:oMathParaPr>
+                        <m:jc m:val="centerGroup"/>
+                      </m:oMathParaPr>
+                      <m:oMath xmlns:m="http://schemas.openxmlformats.org/officeDocument/2006/math">
                         <m:r>
                           <a:rPr lang="en-US" b="0" i="1" smtClean="0">
                             <a:latin typeface="Cambria Math" panose="02040503050406030204" pitchFamily="18" charset="0"/>
@@ -21895,7 +21922,10 @@
                   <a:pPr/>
                   <a14:m>
                     <m:oMathPara xmlns:m="http://schemas.openxmlformats.org/officeDocument/2006/math">
-                      <m:oMath>
+                      <m:oMathParaPr>
+                        <m:jc m:val="centerGroup"/>
+                      </m:oMathParaPr>
+                      <m:oMath xmlns:m="http://schemas.openxmlformats.org/officeDocument/2006/math">
                         <m:sSub>
                           <m:sSubPr>
                             <m:ctrlPr>
@@ -22018,7 +22048,10 @@
                   <a:pPr/>
                   <a14:m>
                     <m:oMathPara xmlns:m="http://schemas.openxmlformats.org/officeDocument/2006/math">
-                      <m:oMath>
+                      <m:oMathParaPr>
+                        <m:jc m:val="centerGroup"/>
+                      </m:oMathParaPr>
+                      <m:oMath xmlns:m="http://schemas.openxmlformats.org/officeDocument/2006/math">
                         <m:r>
                           <a:rPr lang="en-US" b="0" i="1" smtClean="0">
                             <a:latin typeface="Cambria Math" panose="02040503050406030204" pitchFamily="18" charset="0"/>
@@ -22130,7 +22163,10 @@
                   <a:pPr algn="ctr"/>
                   <a14:m>
                     <m:oMathPara xmlns:m="http://schemas.openxmlformats.org/officeDocument/2006/math">
-                      <m:oMath>
+                      <m:oMathParaPr>
+                        <m:jc m:val="centerGroup"/>
+                      </m:oMathParaPr>
+                      <m:oMath xmlns:m="http://schemas.openxmlformats.org/officeDocument/2006/math">
                         <m:sSub>
                           <m:sSubPr>
                             <m:ctrlPr>
@@ -23118,7 +23154,10 @@
                   <a:pPr/>
                   <a14:m>
                     <m:oMathPara xmlns:m="http://schemas.openxmlformats.org/officeDocument/2006/math">
-                      <m:oMath>
+                      <m:oMathParaPr>
+                        <m:jc m:val="centerGroup"/>
+                      </m:oMathParaPr>
+                      <m:oMath xmlns:m="http://schemas.openxmlformats.org/officeDocument/2006/math">
                         <m:sSub>
                           <m:sSubPr>
                             <m:ctrlPr>
@@ -23259,7 +23298,10 @@
                   <a:pPr/>
                   <a14:m>
                     <m:oMathPara xmlns:m="http://schemas.openxmlformats.org/officeDocument/2006/math">
-                      <m:oMath>
+                      <m:oMathParaPr>
+                        <m:jc m:val="centerGroup"/>
+                      </m:oMathParaPr>
+                      <m:oMath xmlns:m="http://schemas.openxmlformats.org/officeDocument/2006/math">
                         <m:sSub>
                           <m:sSubPr>
                             <m:ctrlPr>
@@ -23489,7 +23531,10 @@
                   <a:pPr algn="ctr"/>
                   <a14:m>
                     <m:oMathPara xmlns:m="http://schemas.openxmlformats.org/officeDocument/2006/math">
-                      <m:oMath>
+                      <m:oMathParaPr>
+                        <m:jc m:val="centerGroup"/>
+                      </m:oMathParaPr>
+                      <m:oMath xmlns:m="http://schemas.openxmlformats.org/officeDocument/2006/math">
                         <m:sSubSup>
                           <m:sSubSupPr>
                             <m:ctrlPr>
@@ -23616,7 +23661,10 @@
                   <a:pPr/>
                   <a14:m>
                     <m:oMathPara xmlns:m="http://schemas.openxmlformats.org/officeDocument/2006/math">
-                      <m:oMath>
+                      <m:oMathParaPr>
+                        <m:jc m:val="centerGroup"/>
+                      </m:oMathParaPr>
+                      <m:oMath xmlns:m="http://schemas.openxmlformats.org/officeDocument/2006/math">
                         <m:sSubSup>
                           <m:sSubSupPr>
                             <m:ctrlPr>
@@ -24368,7 +24416,10 @@
                   <a:pPr/>
                   <a14:m>
                     <m:oMathPara xmlns:m="http://schemas.openxmlformats.org/officeDocument/2006/math">
-                      <m:oMath>
+                      <m:oMathParaPr>
+                        <m:jc m:val="centerGroup"/>
+                      </m:oMathParaPr>
+                      <m:oMath xmlns:m="http://schemas.openxmlformats.org/officeDocument/2006/math">
                         <m:sSub>
                           <m:sSubPr>
                             <m:ctrlPr>
@@ -24509,7 +24560,10 @@
                   <a:pPr/>
                   <a14:m>
                     <m:oMathPara xmlns:m="http://schemas.openxmlformats.org/officeDocument/2006/math">
-                      <m:oMath>
+                      <m:oMathParaPr>
+                        <m:jc m:val="centerGroup"/>
+                      </m:oMathParaPr>
+                      <m:oMath xmlns:m="http://schemas.openxmlformats.org/officeDocument/2006/math">
                         <m:sSub>
                           <m:sSubPr>
                             <m:ctrlPr>
@@ -24747,7 +24801,10 @@
                   <a:pPr algn="ctr"/>
                   <a14:m>
                     <m:oMathPara xmlns:m="http://schemas.openxmlformats.org/officeDocument/2006/math">
-                      <m:oMath>
+                      <m:oMathParaPr>
+                        <m:jc m:val="centerGroup"/>
+                      </m:oMathParaPr>
+                      <m:oMath xmlns:m="http://schemas.openxmlformats.org/officeDocument/2006/math">
                         <m:sSubSup>
                           <m:sSubSupPr>
                             <m:ctrlPr>
@@ -24874,7 +24931,10 @@
                   <a:pPr/>
                   <a14:m>
                     <m:oMathPara xmlns:m="http://schemas.openxmlformats.org/officeDocument/2006/math">
-                      <m:oMath>
+                      <m:oMathParaPr>
+                        <m:jc m:val="centerGroup"/>
+                      </m:oMathParaPr>
+                      <m:oMath xmlns:m="http://schemas.openxmlformats.org/officeDocument/2006/math">
                         <m:sSubSup>
                           <m:sSubSupPr>
                             <m:ctrlPr>
@@ -25542,7 +25602,10 @@
                   <a:pPr/>
                   <a14:m>
                     <m:oMathPara xmlns:m="http://schemas.openxmlformats.org/officeDocument/2006/math">
-                      <m:oMath>
+                      <m:oMathParaPr>
+                        <m:jc m:val="centerGroup"/>
+                      </m:oMathParaPr>
+                      <m:oMath xmlns:m="http://schemas.openxmlformats.org/officeDocument/2006/math">
                         <m:sSub>
                           <m:sSubPr>
                             <m:ctrlPr>
@@ -25867,7 +25930,10 @@
                   <a:pPr/>
                   <a14:m>
                     <m:oMathPara xmlns:m="http://schemas.openxmlformats.org/officeDocument/2006/math">
-                      <m:oMath>
+                      <m:oMathParaPr>
+                        <m:jc m:val="centerGroup"/>
+                      </m:oMathParaPr>
+                      <m:oMath xmlns:m="http://schemas.openxmlformats.org/officeDocument/2006/math">
                         <m:sSub>
                           <m:sSubPr>
                             <m:ctrlPr>
@@ -26192,7 +26258,10 @@
                   <a:pPr/>
                   <a14:m>
                     <m:oMathPara xmlns:m="http://schemas.openxmlformats.org/officeDocument/2006/math">
-                      <m:oMath>
+                      <m:oMathParaPr>
+                        <m:jc m:val="centerGroup"/>
+                      </m:oMathParaPr>
+                      <m:oMath xmlns:m="http://schemas.openxmlformats.org/officeDocument/2006/math">
                         <m:sSub>
                           <m:sSubPr>
                             <m:ctrlPr>
@@ -26517,7 +26586,10 @@
                   <a:pPr/>
                   <a14:m>
                     <m:oMathPara xmlns:m="http://schemas.openxmlformats.org/officeDocument/2006/math">
-                      <m:oMath>
+                      <m:oMathParaPr>
+                        <m:jc m:val="centerGroup"/>
+                      </m:oMathParaPr>
+                      <m:oMath xmlns:m="http://schemas.openxmlformats.org/officeDocument/2006/math">
                         <m:sSub>
                           <m:sSubPr>
                             <m:ctrlPr>
@@ -27276,7 +27348,10 @@
                   <a:pPr/>
                   <a14:m>
                     <m:oMathPara xmlns:m="http://schemas.openxmlformats.org/officeDocument/2006/math">
-                      <m:oMath>
+                      <m:oMathParaPr>
+                        <m:jc m:val="centerGroup"/>
+                      </m:oMathParaPr>
+                      <m:oMath xmlns:m="http://schemas.openxmlformats.org/officeDocument/2006/math">
                         <m:sSub>
                           <m:sSubPr>
                             <m:ctrlPr>
@@ -28095,7 +28170,10 @@
                   <a:pPr/>
                   <a14:m>
                     <m:oMathPara xmlns:m="http://schemas.openxmlformats.org/officeDocument/2006/math">
-                      <m:oMath>
+                      <m:oMathParaPr>
+                        <m:jc m:val="centerGroup"/>
+                      </m:oMathParaPr>
+                      <m:oMath xmlns:m="http://schemas.openxmlformats.org/officeDocument/2006/math">
                         <m:sSub>
                           <m:sSubPr>
                             <m:ctrlPr>
@@ -28422,7 +28500,10 @@
                   <a:pPr/>
                   <a14:m>
                     <m:oMathPara xmlns:m="http://schemas.openxmlformats.org/officeDocument/2006/math">
-                      <m:oMath>
+                      <m:oMathParaPr>
+                        <m:jc m:val="centerGroup"/>
+                      </m:oMathParaPr>
+                      <m:oMath xmlns:m="http://schemas.openxmlformats.org/officeDocument/2006/math">
                         <m:sSub>
                           <m:sSubPr>
                             <m:ctrlPr>
@@ -28749,7 +28830,10 @@
                   <a:pPr/>
                   <a14:m>
                     <m:oMathPara xmlns:m="http://schemas.openxmlformats.org/officeDocument/2006/math">
-                      <m:oMath>
+                      <m:oMathParaPr>
+                        <m:jc m:val="centerGroup"/>
+                      </m:oMathParaPr>
+                      <m:oMath xmlns:m="http://schemas.openxmlformats.org/officeDocument/2006/math">
                         <m:sSub>
                           <m:sSubPr>
                             <m:ctrlPr>
@@ -29076,7 +29160,10 @@
                   <a:pPr/>
                   <a14:m>
                     <m:oMathPara xmlns:m="http://schemas.openxmlformats.org/officeDocument/2006/math">
-                      <m:oMath>
+                      <m:oMathParaPr>
+                        <m:jc m:val="centerGroup"/>
+                      </m:oMathParaPr>
+                      <m:oMath xmlns:m="http://schemas.openxmlformats.org/officeDocument/2006/math">
                         <m:sSub>
                           <m:sSubPr>
                             <m:ctrlPr>
@@ -30736,7 +30823,10 @@
                   <a:pPr/>
                   <a14:m>
                     <m:oMathPara xmlns:m="http://schemas.openxmlformats.org/officeDocument/2006/math">
-                      <m:oMath>
+                      <m:oMathParaPr>
+                        <m:jc m:val="centerGroup"/>
+                      </m:oMathParaPr>
+                      <m:oMath xmlns:m="http://schemas.openxmlformats.org/officeDocument/2006/math">
                         <m:sSub>
                           <m:sSubPr>
                             <m:ctrlPr>
@@ -30836,7 +30926,10 @@
                   <a:pPr/>
                   <a14:m>
                     <m:oMathPara xmlns:m="http://schemas.openxmlformats.org/officeDocument/2006/math">
-                      <m:oMath>
+                      <m:oMathParaPr>
+                        <m:jc m:val="centerGroup"/>
+                      </m:oMathParaPr>
+                      <m:oMath xmlns:m="http://schemas.openxmlformats.org/officeDocument/2006/math">
                         <m:sSub>
                           <m:sSubPr>
                             <m:ctrlPr>
@@ -32939,7 +33032,10 @@
                   <a:pPr/>
                   <a14:m>
                     <m:oMathPara xmlns:m="http://schemas.openxmlformats.org/officeDocument/2006/math">
-                      <m:oMath>
+                      <m:oMathParaPr>
+                        <m:jc m:val="centerGroup"/>
+                      </m:oMathParaPr>
+                      <m:oMath xmlns:m="http://schemas.openxmlformats.org/officeDocument/2006/math">
                         <m:sSub>
                           <m:sSubPr>
                             <m:ctrlPr>
@@ -33039,7 +33135,10 @@
                   <a:pPr/>
                   <a14:m>
                     <m:oMathPara xmlns:m="http://schemas.openxmlformats.org/officeDocument/2006/math">
-                      <m:oMath>
+                      <m:oMathParaPr>
+                        <m:jc m:val="centerGroup"/>
+                      </m:oMathParaPr>
+                      <m:oMath xmlns:m="http://schemas.openxmlformats.org/officeDocument/2006/math">
                         <m:sSub>
                           <m:sSubPr>
                             <m:ctrlPr>
@@ -33355,7 +33454,10 @@
                 <a:pPr/>
                 <a14:m>
                   <m:oMathPara xmlns:m="http://schemas.openxmlformats.org/officeDocument/2006/math">
-                    <m:oMath>
+                    <m:oMathParaPr>
+                      <m:jc m:val="centerGroup"/>
+                    </m:oMathParaPr>
+                    <m:oMath xmlns:m="http://schemas.openxmlformats.org/officeDocument/2006/math">
                       <m:r>
                         <a:rPr lang="pt-BR" sz="2800" b="1" i="1" smtClean="0">
                           <a:solidFill>
@@ -33985,7 +34087,10 @@
                     <a:pPr/>
                     <a14:m>
                       <m:oMathPara xmlns:m="http://schemas.openxmlformats.org/officeDocument/2006/math">
-                        <m:oMath>
+                        <m:oMathParaPr>
+                          <m:jc m:val="centerGroup"/>
+                        </m:oMathParaPr>
+                        <m:oMath xmlns:m="http://schemas.openxmlformats.org/officeDocument/2006/math">
                           <m:sSub>
                             <m:sSubPr>
                               <m:ctrlPr>
@@ -34085,7 +34190,10 @@
                     <a:pPr/>
                     <a14:m>
                       <m:oMathPara xmlns:m="http://schemas.openxmlformats.org/officeDocument/2006/math">
-                        <m:oMath>
+                        <m:oMathParaPr>
+                          <m:jc m:val="centerGroup"/>
+                        </m:oMathParaPr>
+                        <m:oMath xmlns:m="http://schemas.openxmlformats.org/officeDocument/2006/math">
                           <m:sSub>
                             <m:sSubPr>
                               <m:ctrlPr>
@@ -34225,7 +34333,10 @@
                     <a:pPr/>
                     <a14:m>
                       <m:oMathPara xmlns:m="http://schemas.openxmlformats.org/officeDocument/2006/math">
-                        <m:oMath>
+                        <m:oMathParaPr>
+                          <m:jc m:val="centerGroup"/>
+                        </m:oMathParaPr>
+                        <m:oMath xmlns:m="http://schemas.openxmlformats.org/officeDocument/2006/math">
                           <m:sSup>
                             <m:sSupPr>
                               <m:ctrlPr>
@@ -34453,7 +34564,10 @@
                     <a:pPr/>
                     <a14:m>
                       <m:oMathPara xmlns:m="http://schemas.openxmlformats.org/officeDocument/2006/math">
-                        <m:oMath>
+                        <m:oMathParaPr>
+                          <m:jc m:val="centerGroup"/>
+                        </m:oMathParaPr>
+                        <m:oMath xmlns:m="http://schemas.openxmlformats.org/officeDocument/2006/math">
                           <m:sSub>
                             <m:sSubPr>
                               <m:ctrlPr>
@@ -34664,7 +34778,10 @@
                     <a:pPr/>
                     <a14:m>
                       <m:oMathPara xmlns:m="http://schemas.openxmlformats.org/officeDocument/2006/math">
-                        <m:oMath>
+                        <m:oMathParaPr>
+                          <m:jc m:val="centerGroup"/>
+                        </m:oMathParaPr>
+                        <m:oMath xmlns:m="http://schemas.openxmlformats.org/officeDocument/2006/math">
                           <m:sSub>
                             <m:sSubPr>
                               <m:ctrlPr>
@@ -34764,7 +34881,10 @@
                     <a:pPr/>
                     <a14:m>
                       <m:oMathPara xmlns:m="http://schemas.openxmlformats.org/officeDocument/2006/math">
-                        <m:oMath>
+                        <m:oMathParaPr>
+                          <m:jc m:val="centerGroup"/>
+                        </m:oMathParaPr>
+                        <m:oMath xmlns:m="http://schemas.openxmlformats.org/officeDocument/2006/math">
                           <m:sSub>
                             <m:sSubPr>
                               <m:ctrlPr>
@@ -35278,7 +35398,10 @@
                     <a:pPr/>
                     <a14:m>
                       <m:oMathPara xmlns:m="http://schemas.openxmlformats.org/officeDocument/2006/math">
-                        <m:oMath>
+                        <m:oMathParaPr>
+                          <m:jc m:val="centerGroup"/>
+                        </m:oMathParaPr>
+                        <m:oMath xmlns:m="http://schemas.openxmlformats.org/officeDocument/2006/math">
                           <m:sSup>
                             <m:sSupPr>
                               <m:ctrlPr>
@@ -35458,7 +35581,10 @@
                     <a:pPr/>
                     <a14:m>
                       <m:oMathPara xmlns:m="http://schemas.openxmlformats.org/officeDocument/2006/math">
-                        <m:oMath>
+                        <m:oMathParaPr>
+                          <m:jc m:val="centerGroup"/>
+                        </m:oMathParaPr>
+                        <m:oMath xmlns:m="http://schemas.openxmlformats.org/officeDocument/2006/math">
                           <m:sSubSup>
                             <m:sSubSupPr>
                               <m:ctrlPr>
@@ -35797,7 +35923,10 @@
                   <a:pPr/>
                   <a14:m>
                     <m:oMathPara xmlns:m="http://schemas.openxmlformats.org/officeDocument/2006/math">
-                      <m:oMath>
+                      <m:oMathParaPr>
+                        <m:jc m:val="centerGroup"/>
+                      </m:oMathParaPr>
+                      <m:oMath xmlns:m="http://schemas.openxmlformats.org/officeDocument/2006/math">
                         <m:sSub>
                           <m:sSubPr>
                             <m:ctrlPr>
@@ -36353,7 +36482,10 @@
                     <a:pPr/>
                     <a14:m>
                       <m:oMathPara xmlns:m="http://schemas.openxmlformats.org/officeDocument/2006/math">
-                        <m:oMath>
+                        <m:oMathParaPr>
+                          <m:jc m:val="centerGroup"/>
+                        </m:oMathParaPr>
+                        <m:oMath xmlns:m="http://schemas.openxmlformats.org/officeDocument/2006/math">
                           <m:sSub>
                             <m:sSubPr>
                               <m:ctrlPr>
@@ -37353,7 +37485,10 @@
                   <a:pPr/>
                   <a14:m>
                     <m:oMathPara xmlns:m="http://schemas.openxmlformats.org/officeDocument/2006/math">
-                      <m:oMath>
+                      <m:oMathParaPr>
+                        <m:jc m:val="centerGroup"/>
+                      </m:oMathParaPr>
+                      <m:oMath xmlns:m="http://schemas.openxmlformats.org/officeDocument/2006/math">
                         <m:sSub>
                           <m:sSubPr>
                             <m:ctrlPr>
@@ -37453,7 +37588,10 @@
                   <a:pPr/>
                   <a14:m>
                     <m:oMathPara xmlns:m="http://schemas.openxmlformats.org/officeDocument/2006/math">
-                      <m:oMath>
+                      <m:oMathParaPr>
+                        <m:jc m:val="centerGroup"/>
+                      </m:oMathParaPr>
+                      <m:oMath xmlns:m="http://schemas.openxmlformats.org/officeDocument/2006/math">
                         <m:sSub>
                           <m:sSubPr>
                             <m:ctrlPr>
@@ -38468,7 +38606,10 @@
                 <a:pPr/>
                 <a14:m>
                   <m:oMathPara xmlns:m="http://schemas.openxmlformats.org/officeDocument/2006/math">
-                    <m:oMath>
+                    <m:oMathParaPr>
+                      <m:jc m:val="centerGroup"/>
+                    </m:oMathParaPr>
+                    <m:oMath xmlns:m="http://schemas.openxmlformats.org/officeDocument/2006/math">
                       <m:r>
                         <a:rPr lang="pt-BR" sz="2800" b="1" i="1" smtClean="0">
                           <a:solidFill>
@@ -39193,7 +39334,10 @@
                 </a:pPr>
                 <a14:m>
                   <m:oMathPara xmlns:m="http://schemas.openxmlformats.org/officeDocument/2006/math">
-                    <m:oMath>
+                    <m:oMathParaPr>
+                      <m:jc m:val="centerGroup"/>
+                    </m:oMathParaPr>
+                    <m:oMath xmlns:m="http://schemas.openxmlformats.org/officeDocument/2006/math">
                       <m:r>
                         <a:rPr lang="pt-BR" i="1" smtClean="0">
                           <a:latin typeface="Cambria Math" panose="02040503050406030204" pitchFamily="18" charset="0"/>
@@ -39351,7 +39495,10 @@
                 <a:pPr/>
                 <a14:m>
                   <m:oMathPara xmlns:m="http://schemas.openxmlformats.org/officeDocument/2006/math">
-                    <m:oMath>
+                    <m:oMathParaPr>
+                      <m:jc m:val="centerGroup"/>
+                    </m:oMathParaPr>
+                    <m:oMath xmlns:m="http://schemas.openxmlformats.org/officeDocument/2006/math">
                       <m:r>
                         <a:rPr lang="pt-BR" b="0" i="1" smtClean="0">
                           <a:latin typeface="Cambria Math" panose="02040503050406030204" pitchFamily="18" charset="0"/>
@@ -39499,7 +39646,10 @@
                 <a:pPr/>
                 <a14:m>
                   <m:oMathPara xmlns:m="http://schemas.openxmlformats.org/officeDocument/2006/math">
-                    <m:oMath>
+                    <m:oMathParaPr>
+                      <m:jc m:val="centerGroup"/>
+                    </m:oMathParaPr>
+                    <m:oMath xmlns:m="http://schemas.openxmlformats.org/officeDocument/2006/math">
                       <m:r>
                         <a:rPr lang="pt-BR" b="0" i="1" smtClean="0">
                           <a:latin typeface="Cambria Math" panose="02040503050406030204" pitchFamily="18" charset="0"/>
@@ -39654,7 +39804,10 @@
                 <a:pPr/>
                 <a14:m>
                   <m:oMathPara xmlns:m="http://schemas.openxmlformats.org/officeDocument/2006/math">
-                    <m:oMath>
+                    <m:oMathParaPr>
+                      <m:jc m:val="centerGroup"/>
+                    </m:oMathParaPr>
+                    <m:oMath xmlns:m="http://schemas.openxmlformats.org/officeDocument/2006/math">
                       <m:r>
                         <a:rPr lang="pt-BR" b="0" i="1" smtClean="0">
                           <a:latin typeface="Cambria Math" panose="02040503050406030204" pitchFamily="18" charset="0"/>
@@ -39901,7 +40054,10 @@
                 <a:pPr/>
                 <a14:m>
                   <m:oMathPara xmlns:m="http://schemas.openxmlformats.org/officeDocument/2006/math">
-                    <m:oMath>
+                    <m:oMathParaPr>
+                      <m:jc m:val="centerGroup"/>
+                    </m:oMathParaPr>
+                    <m:oMath xmlns:m="http://schemas.openxmlformats.org/officeDocument/2006/math">
                       <m:r>
                         <a:rPr lang="pt-BR" b="0" i="1" smtClean="0">
                           <a:latin typeface="Cambria Math" panose="02040503050406030204" pitchFamily="18" charset="0"/>
@@ -40001,7 +40157,10 @@
                 <a:pPr/>
                 <a14:m>
                   <m:oMathPara xmlns:m="http://schemas.openxmlformats.org/officeDocument/2006/math">
-                    <m:oMath>
+                    <m:oMathParaPr>
+                      <m:jc m:val="centerGroup"/>
+                    </m:oMathParaPr>
+                    <m:oMath xmlns:m="http://schemas.openxmlformats.org/officeDocument/2006/math">
                       <m:r>
                         <a:rPr lang="pt-BR" b="0" i="1" smtClean="0">
                           <a:latin typeface="Cambria Math" panose="02040503050406030204" pitchFamily="18" charset="0"/>
@@ -40108,7 +40267,10 @@
                 <a:pPr/>
                 <a14:m>
                   <m:oMathPara xmlns:m="http://schemas.openxmlformats.org/officeDocument/2006/math">
-                    <m:oMath>
+                    <m:oMathParaPr>
+                      <m:jc m:val="centerGroup"/>
+                    </m:oMathParaPr>
+                    <m:oMath xmlns:m="http://schemas.openxmlformats.org/officeDocument/2006/math">
                       <m:r>
                         <a:rPr lang="pt-BR" b="0" i="1" smtClean="0">
                           <a:latin typeface="Cambria Math" panose="02040503050406030204" pitchFamily="18" charset="0"/>
@@ -41264,6 +41426,23 @@
 </file>
 
 <file path=customXml/item1.xml><?xml version="1.0" encoding="utf-8"?>
+<?mso-contentType ?>
+<FormTemplates xmlns="http://schemas.microsoft.com/sharepoint/v3/contenttype/forms">
+  <Display>DocumentLibraryForm</Display>
+  <Edit>DocumentLibraryForm</Edit>
+  <New>DocumentLibraryForm</New>
+</FormTemplates>
+</file>
+
+<file path=customXml/item2.xml><?xml version="1.0" encoding="utf-8"?>
+<p:properties xmlns:p="http://schemas.microsoft.com/office/2006/metadata/properties" xmlns:xsi="http://www.w3.org/2001/XMLSchema-instance" xmlns:pc="http://schemas.microsoft.com/office/infopath/2007/PartnerControls">
+  <documentManagement>
+    <_activity xmlns="10322600-47b9-44f6-86ef-c87c87ba6e82" xsi:nil="true"/>
+  </documentManagement>
+</p:properties>
+</file>
+
+<file path=customXml/item3.xml><?xml version="1.0" encoding="utf-8"?>
 <ct:contentTypeSchema xmlns:ct="http://schemas.microsoft.com/office/2006/metadata/contentType" xmlns:ma="http://schemas.microsoft.com/office/2006/metadata/properties/metaAttributes" ct:_="" ma:_="" ma:contentTypeName="Document" ma:contentTypeID="0x010100A6553FE09A98904B92A9D00A38127206" ma:contentTypeVersion="18" ma:contentTypeDescription="Create a new document." ma:contentTypeScope="" ma:versionID="92863cfdd2d5fd2ee9b6f30d8c51b1f5">
   <xsd:schema xmlns:xsd="http://www.w3.org/2001/XMLSchema" xmlns:xs="http://www.w3.org/2001/XMLSchema" xmlns:p="http://schemas.microsoft.com/office/2006/metadata/properties" xmlns:ns3="10322600-47b9-44f6-86ef-c87c87ba6e82" xmlns:ns4="026c264a-64f6-48aa-bde0-8bf9e5064f89" targetNamespace="http://schemas.microsoft.com/office/2006/metadata/properties" ma:root="true" ma:fieldsID="86148dd4b4cd32a5258cd233a95bdcf5" ns3:_="" ns4:_="">
     <xsd:import namespace="10322600-47b9-44f6-86ef-c87c87ba6e82"/>
@@ -41516,24 +41695,32 @@
 </ct:contentTypeSchema>
 </file>
 
-<file path=customXml/item2.xml><?xml version="1.0" encoding="utf-8"?>
-<?mso-contentType ?>
-<FormTemplates xmlns="http://schemas.microsoft.com/sharepoint/v3/contenttype/forms">
-  <Display>DocumentLibraryForm</Display>
-  <Edit>DocumentLibraryForm</Edit>
-  <New>DocumentLibraryForm</New>
-</FormTemplates>
+<file path=customXml/itemProps1.xml><?xml version="1.0" encoding="utf-8"?>
+<ds:datastoreItem xmlns:ds="http://schemas.openxmlformats.org/officeDocument/2006/customXml" ds:itemID="{CF4A17E5-ECCE-48A8-A291-06961455A1A6}">
+  <ds:schemaRefs>
+    <ds:schemaRef ds:uri="http://schemas.microsoft.com/sharepoint/v3/contenttype/forms"/>
+  </ds:schemaRefs>
+</ds:datastoreItem>
 </file>
 
-<file path=customXml/item3.xml><?xml version="1.0" encoding="utf-8"?>
-<p:properties xmlns:p="http://schemas.microsoft.com/office/2006/metadata/properties" xmlns:xsi="http://www.w3.org/2001/XMLSchema-instance" xmlns:pc="http://schemas.microsoft.com/office/infopath/2007/PartnerControls">
-  <documentManagement>
-    <_activity xmlns="10322600-47b9-44f6-86ef-c87c87ba6e82" xsi:nil="true"/>
-  </documentManagement>
-</p:properties>
+<file path=customXml/itemProps2.xml><?xml version="1.0" encoding="utf-8"?>
+<ds:datastoreItem xmlns:ds="http://schemas.openxmlformats.org/officeDocument/2006/customXml" ds:itemID="{C4421A6D-F900-459F-9179-A64A47727DAC}">
+  <ds:schemaRefs>
+    <ds:schemaRef ds:uri="http://schemas.microsoft.com/office/2006/documentManagement/types"/>
+    <ds:schemaRef ds:uri="026c264a-64f6-48aa-bde0-8bf9e5064f89"/>
+    <ds:schemaRef ds:uri="http://schemas.openxmlformats.org/package/2006/metadata/core-properties"/>
+    <ds:schemaRef ds:uri="http://purl.org/dc/elements/1.1/"/>
+    <ds:schemaRef ds:uri="http://purl.org/dc/dcmitype/"/>
+    <ds:schemaRef ds:uri="http://schemas.microsoft.com/office/2006/metadata/properties"/>
+    <ds:schemaRef ds:uri="http://www.w3.org/XML/1998/namespace"/>
+    <ds:schemaRef ds:uri="http://schemas.microsoft.com/office/infopath/2007/PartnerControls"/>
+    <ds:schemaRef ds:uri="10322600-47b9-44f6-86ef-c87c87ba6e82"/>
+    <ds:schemaRef ds:uri="http://purl.org/dc/terms/"/>
+  </ds:schemaRefs>
+</ds:datastoreItem>
 </file>
 
-<file path=customXml/itemProps1.xml><?xml version="1.0" encoding="utf-8"?>
+<file path=customXml/itemProps3.xml><?xml version="1.0" encoding="utf-8"?>
 <ds:datastoreItem xmlns:ds="http://schemas.openxmlformats.org/officeDocument/2006/customXml" ds:itemID="{E765951F-25BB-44C2-B87A-A88FE1B68A23}">
   <ds:schemaRefs>
     <ds:schemaRef ds:uri="http://schemas.microsoft.com/office/2006/metadata/contentType"/>
@@ -41550,29 +41737,4 @@
     <ds:schemaRef ds:uri="http://schemas.microsoft.com/internal/obd"/>
   </ds:schemaRefs>
 </ds:datastoreItem>
-</file>
-
-<file path=customXml/itemProps2.xml><?xml version="1.0" encoding="utf-8"?>
-<ds:datastoreItem xmlns:ds="http://schemas.openxmlformats.org/officeDocument/2006/customXml" ds:itemID="{CF4A17E5-ECCE-48A8-A291-06961455A1A6}">
-  <ds:schemaRefs>
-    <ds:schemaRef ds:uri="http://schemas.microsoft.com/sharepoint/v3/contenttype/forms"/>
-  </ds:schemaRefs>
-</ds:datastoreItem>
-</file>
-
-<file path=customXml/itemProps3.xml><?xml version="1.0" encoding="utf-8"?>
-<ds:datastoreItem xmlns:ds="http://schemas.openxmlformats.org/officeDocument/2006/customXml" ds:itemID="{C4421A6D-F900-459F-9179-A64A47727DAC}">
-  <ds:schemaRefs>
-    <ds:schemaRef ds:uri="http://schemas.microsoft.com/office/2006/documentManagement/types"/>
-    <ds:schemaRef ds:uri="026c264a-64f6-48aa-bde0-8bf9e5064f89"/>
-    <ds:schemaRef ds:uri="http://schemas.openxmlformats.org/package/2006/metadata/core-properties"/>
-    <ds:schemaRef ds:uri="http://purl.org/dc/elements/1.1/"/>
-    <ds:schemaRef ds:uri="http://purl.org/dc/dcmitype/"/>
-    <ds:schemaRef ds:uri="http://schemas.microsoft.com/office/2006/metadata/properties"/>
-    <ds:schemaRef ds:uri="http://www.w3.org/XML/1998/namespace"/>
-    <ds:schemaRef ds:uri="http://schemas.microsoft.com/office/infopath/2007/PartnerControls"/>
-    <ds:schemaRef ds:uri="10322600-47b9-44f6-86ef-c87c87ba6e82"/>
-    <ds:schemaRef ds:uri="http://purl.org/dc/terms/"/>
-  </ds:schemaRefs>
-</ds:datastoreItem>
 </file>